--- a/dist/초6/수학/원과자료/초6_수학_원과자료_04_알맞은그래프고르기.pptx
+++ b/dist/초6/수학/원과자료/초6_수학_원과자료_04_알맞은그래프고르기.pptx
@@ -119,45 +119,45 @@
   <p:extLst>
     <p:ext uri="{521415D9-36F7-43E2-AB2F-B90AF26B5E84}">
       <p14:sectionLst xmlns:p14="http://schemas.microsoft.com/office/powerpoint/2010/main">
-        <p14:section name="도입" id="{4c0d6494-4d63-e112-1d66-3dbc023d1f55}">
+        <p14:section name="도입" id="{ddf3437f-9e8a-b7bb-1892-41219224bfaa}">
           <p14:sldIdLst>
             <p14:sldId id="256"/>
             <p14:sldId id="257"/>
           </p14:sldIdLst>
         </p14:section>
-        <p14:section name="개념" id="{cadd42c7-61b4-4c7a-d71b-c4e4d04bce35}">
+        <p14:section name="개념" id="{da5e388f-2e2a-16ae-0448-94d1d05634b5}">
           <p14:sldIdLst>
             <p14:sldId id="258"/>
             <p14:sldId id="259"/>
             <p14:sldId id="262"/>
           </p14:sldIdLst>
         </p14:section>
-        <p14:section name="연습" id="{26b0e396-1650-4e19-e6b2-6a466aa89876}">
+        <p14:section name="연습" id="{d892687a-d881-264f-f418-443b0e626083}">
           <p14:sldIdLst>
             <p14:sldId id="260"/>
             <p14:sldId id="261"/>
             <p14:sldId id="263"/>
           </p14:sldIdLst>
         </p14:section>
-        <p14:section name="개념" id="{0aeeb7f3-cabd-5ee4-dbff-c2d3ac959bc4}">
+        <p14:section name="개념" id="{6ddaae7b-8e28-57aa-0506-8ad354174ebf}">
           <p14:sldIdLst/>
         </p14:section>
-        <p14:section name="연습" id="{333f3b9c-2845-686d-53fb-b0422a902de7}">
+        <p14:section name="연습" id="{0a287f48-f1c5-06d8-8d0b-1a337688c31d}">
           <p14:sldIdLst/>
         </p14:section>
-        <p14:section name="확인" id="{e79d8fd0-e2f7-b944-4abe-5d14b449457a}">
+        <p14:section name="확인" id="{4a65f54a-c618-b1e2-70a7-2646691a8098}">
           <p14:sldIdLst>
             <p14:sldId id="264"/>
             <p14:sldId id="265"/>
             <p14:sldId id="266"/>
           </p14:sldIdLst>
         </p14:section>
-        <p14:section name="정리" id="{7ed736be-6f26-d3fc-4b6e-c77a4cf483f3}">
+        <p14:section name="정리" id="{5391a20c-73fd-4da2-d2de-3250c256fda6}">
           <p14:sldIdLst>
             <p14:sldId id="267"/>
           </p14:sldIdLst>
         </p14:section>
-        <p14:section name="보충" id="{78a0a5b0-89a6-628f-d983-b296ebbe61c0}">
+        <p14:section name="보충" id="{83dd26dd-922d-261b-8f8d-ed2886d96cb9}">
           <p14:sldIdLst>
             <p14:sldId id="268"/>
           </p14:sldIdLst>
@@ -765,7 +765,7 @@
               <a:rPr lang="en-US" dirty="0"/>
               <a:t>[S11 · 마무리 확인(그래프 고르고 해석하기)]
 목적: 처음 보는 자료에서 알고 싶은 것에 맞는 그래프를 고르고, 백분율을 구해 해석하는지 확인합니다. 실제로 그리는 것은 활동지 3에서 합니다.
-시간: 약 3분
+시간: 약 4분
 이렇게 말해 보세요
 - “방법별로 전체의 몇 %인지 알고 싶어. 어떤 그래프가 알맞을까? 왜?”
 - “20명이면 1명은 몇 %야? 걸어서 오는 12명은?”
@@ -1182,7 +1182,7 @@
 막히면
 - 막대그래프에서 동화 막대 끝을 옆으로 따라가 7권을 읽고, 띠그래프에서 동화 칸이 35 %인 것을 짚어 줍니다.
 주의
-- 자료: 동화 7권, 과학 6권, 역사 4권, 만화 3권(20권). 띠그래프는 35 %, 30 %, 20 %, 15 %입니다.
+- 자료: 동화 7권, 과학 5권, 역사 4권, 만화 4권(20권). 띠그래프는 35 %, 25 %, 20 %, 20 %입니다. 역사와 만화는 막대 높이도, 띠의 길이도 같습니다.
 - ‘알고 싶은 것에 따라 알맞은 그래프가 달라요’가 오늘의 핵심입니다.</a:t>
             </a:r>
             <a:endParaRPr lang="en-US" dirty="0"/>
@@ -1580,7 +1580,7 @@
               <a:rPr lang="en-US" dirty="0"/>
               <a:t>[S07 · 골라서 나타내고 해석하기(시범)]
 목적: 알고 싶은 것 정하기 → 그래프 고르기 → 나타내기 → 해석하기 순서를 시범으로 보여 줍니다.
-시간: 약 4분
+시간: 약 5분
 이렇게 말해 보세요
 - “알고 싶은 것이 ‘전체 중 몇 %’이니까 띠그래프나 원그래프가 알맞아. 오늘은 원그래프로 해 볼게.”
 - “문학책 160권은 400권의 몇 %일까? 160 ÷ 400 × 100 = 40이야.”
@@ -3128,7 +3128,7 @@
       </p:sp>
       <p:sp>
         <p:nvSpPr>
-          <p:cNvPr id="3" name="S10-card342"/>
+          <p:cNvPr id="3" name="S10-card330"/>
           <p:cNvSpPr/>
           <p:nvPr/>
         </p:nvSpPr>
@@ -3155,7 +3155,7 @@
       </p:sp>
       <p:sp>
         <p:nvSpPr>
-          <p:cNvPr id="4" name="S10-cardtext343"/>
+          <p:cNvPr id="4" name="S10-cardtext331"/>
           <p:cNvSpPr txBox="1"/>
           <p:nvPr/>
         </p:nvSpPr>
@@ -3197,7 +3197,7 @@
       </p:sp>
       <p:sp>
         <p:nvSpPr>
-          <p:cNvPr id="5" name="S10-chip344"/>
+          <p:cNvPr id="5" name="S10-chip332"/>
           <p:cNvSpPr txBox="1"/>
           <p:nvPr/>
         </p:nvSpPr>
@@ -3244,7 +3244,7 @@
       </p:sp>
       <p:sp>
         <p:nvSpPr>
-          <p:cNvPr id="6" name="S10-text345"/>
+          <p:cNvPr id="6" name="S10-text333"/>
           <p:cNvSpPr txBox="1"/>
           <p:nvPr/>
         </p:nvSpPr>
@@ -3283,7 +3283,7 @@
       </p:sp>
       <p:sp>
         <p:nvSpPr>
-          <p:cNvPr id="7" name="S10-text346"/>
+          <p:cNvPr id="7" name="S10-text334"/>
           <p:cNvSpPr txBox="1"/>
           <p:nvPr/>
         </p:nvSpPr>
@@ -3322,7 +3322,7 @@
       </p:sp>
       <p:sp>
         <p:nvSpPr>
-          <p:cNvPr id="8" name="S10-text347"/>
+          <p:cNvPr id="8" name="S10-text335"/>
           <p:cNvSpPr txBox="1"/>
           <p:nvPr/>
         </p:nvSpPr>
@@ -3361,7 +3361,7 @@
       </p:sp>
       <p:sp>
         <p:nvSpPr>
-          <p:cNvPr id="9" name="S10-text348"/>
+          <p:cNvPr id="9" name="S10-text336"/>
           <p:cNvSpPr txBox="1"/>
           <p:nvPr/>
         </p:nvSpPr>
@@ -3400,7 +3400,7 @@
       </p:sp>
       <p:sp>
         <p:nvSpPr>
-          <p:cNvPr id="10" name="S10-text349"/>
+          <p:cNvPr id="10" name="S10-text337"/>
           <p:cNvSpPr txBox="1"/>
           <p:nvPr/>
         </p:nvSpPr>
@@ -3431,7 +3431,7 @@
                 <a:ea typeface="맑은 고딕" pitchFamily="34" charset="-122"/>
                 <a:cs typeface="맑은 고딕" pitchFamily="34" charset="-120"/>
               </a:rPr>
-              <a:t>③ 원(띠)그래프</a:t>
+              <a:t>③ 원그래프</a:t>
             </a:r>
             <a:endParaRPr lang="ko-KR" sz="2800" dirty="0"/>
           </a:p>
@@ -3439,7 +3439,7 @@
       </p:sp>
       <p:sp>
         <p:nvSpPr>
-          <p:cNvPr id="11" name="S10-text350"/>
+          <p:cNvPr id="11" name="S10-text338"/>
           <p:cNvSpPr txBox="1"/>
           <p:nvPr/>
         </p:nvSpPr>
@@ -3470,7 +3470,7 @@
                 <a:ea typeface="맑은 고딕" pitchFamily="34" charset="-122"/>
                 <a:cs typeface="맑은 고딕" pitchFamily="34" charset="-120"/>
               </a:rPr>
-              <a:t>비율</a:t>
+              <a:t>비율(띠도 맞음)</a:t>
             </a:r>
             <a:endParaRPr lang="ko-KR" sz="2200" dirty="0"/>
           </a:p>
@@ -3478,7 +3478,7 @@
       </p:sp>
       <p:sp>
         <p:nvSpPr>
-          <p:cNvPr id="12" name="S10-text351"/>
+          <p:cNvPr id="12" name="S10-text339"/>
           <p:cNvSpPr txBox="1"/>
           <p:nvPr/>
         </p:nvSpPr>
@@ -3517,7 +3517,7 @@
       </p:sp>
       <p:sp>
         <p:nvSpPr>
-          <p:cNvPr id="13" name="S10-text352"/>
+          <p:cNvPr id="13" name="S10-text340"/>
           <p:cNvSpPr txBox="1"/>
           <p:nvPr/>
         </p:nvSpPr>
@@ -3556,7 +3556,7 @@
       </p:sp>
       <p:sp>
         <p:nvSpPr>
-          <p:cNvPr id="14" name="S10-chip353"/>
+          <p:cNvPr id="14" name="S10-chip341"/>
           <p:cNvSpPr txBox="1"/>
           <p:nvPr/>
         </p:nvSpPr>
@@ -3603,7 +3603,7 @@
       </p:sp>
       <p:sp>
         <p:nvSpPr>
-          <p:cNvPr id="15" name="S10-text354"/>
+          <p:cNvPr id="15" name="S10-text342"/>
           <p:cNvSpPr txBox="1"/>
           <p:nvPr/>
         </p:nvSpPr>
@@ -3642,7 +3642,7 @@
       </p:sp>
       <p:sp>
         <p:nvSpPr>
-          <p:cNvPr id="16" name="S10-text355"/>
+          <p:cNvPr id="16" name="S10-text343"/>
           <p:cNvSpPr txBox="1"/>
           <p:nvPr/>
         </p:nvSpPr>
@@ -3698,7 +3698,7 @@
       </p:sp>
       <p:sp>
         <p:nvSpPr>
-          <p:cNvPr id="17" name="S10-text356"/>
+          <p:cNvPr id="17" name="S10-text344"/>
           <p:cNvSpPr txBox="1"/>
           <p:nvPr/>
         </p:nvSpPr>
@@ -3737,7 +3737,7 @@
       </p:sp>
       <p:sp>
         <p:nvSpPr>
-          <p:cNvPr id="18" name="S10-text357"/>
+          <p:cNvPr id="18" name="S10-text345"/>
           <p:cNvSpPr txBox="1"/>
           <p:nvPr/>
         </p:nvSpPr>
@@ -3907,7 +3907,7 @@
       </p:sp>
       <p:sp>
         <p:nvSpPr>
-          <p:cNvPr id="3" name="S11-text358"/>
+          <p:cNvPr id="3" name="S11-text346"/>
           <p:cNvSpPr txBox="1"/>
           <p:nvPr/>
         </p:nvSpPr>
@@ -3946,7 +3946,7 @@
       </p:sp>
       <p:graphicFrame>
         <p:nvGraphicFramePr>
-          <p:cNvPr id="12" name="S11-table359"/>
+          <p:cNvPr id="12" name="S11-table347"/>
           <p:cNvGraphicFramePr>
             <a:graphicFrameLocks noGrp="1"/>
           </p:cNvGraphicFramePr>
@@ -4804,7 +4804,7 @@
       </p:graphicFrame>
       <p:sp>
         <p:nvSpPr>
-          <p:cNvPr id="5" name="S11-chip360"/>
+          <p:cNvPr id="5" name="S11-chip348"/>
           <p:cNvSpPr txBox="1"/>
           <p:nvPr/>
         </p:nvSpPr>
@@ -4851,7 +4851,7 @@
       </p:sp>
       <p:sp>
         <p:nvSpPr>
-          <p:cNvPr id="6" name="S11-text361"/>
+          <p:cNvPr id="6" name="S11-text349"/>
           <p:cNvSpPr txBox="1"/>
           <p:nvPr/>
         </p:nvSpPr>
@@ -4907,7 +4907,7 @@
       </p:sp>
       <p:sp>
         <p:nvSpPr>
-          <p:cNvPr id="7" name="S11-chip362"/>
+          <p:cNvPr id="7" name="S11-chip350"/>
           <p:cNvSpPr txBox="1"/>
           <p:nvPr/>
         </p:nvSpPr>
@@ -4954,7 +4954,7 @@
       </p:sp>
       <p:sp>
         <p:nvSpPr>
-          <p:cNvPr id="8" name="S11-text363"/>
+          <p:cNvPr id="8" name="S11-text351"/>
           <p:cNvSpPr txBox="1"/>
           <p:nvPr/>
         </p:nvSpPr>
@@ -5010,7 +5010,7 @@
       </p:sp>
       <p:sp>
         <p:nvSpPr>
-          <p:cNvPr id="9" name="S11-chip364"/>
+          <p:cNvPr id="9" name="S11-chip352"/>
           <p:cNvSpPr txBox="1"/>
           <p:nvPr/>
         </p:nvSpPr>
@@ -5057,7 +5057,7 @@
       </p:sp>
       <p:sp>
         <p:nvSpPr>
-          <p:cNvPr id="10" name="S11-text365"/>
+          <p:cNvPr id="10" name="S11-text353"/>
           <p:cNvSpPr txBox="1"/>
           <p:nvPr/>
         </p:nvSpPr>
@@ -5227,7 +5227,7 @@
       </p:sp>
       <p:sp>
         <p:nvSpPr>
-          <p:cNvPr id="3" name="S12-card366"/>
+          <p:cNvPr id="3" name="S12-card354"/>
           <p:cNvSpPr/>
           <p:nvPr/>
         </p:nvSpPr>
@@ -5254,7 +5254,7 @@
       </p:sp>
       <p:sp>
         <p:nvSpPr>
-          <p:cNvPr id="4" name="S12-cardtext367"/>
+          <p:cNvPr id="4" name="S12-cardtext355"/>
           <p:cNvSpPr txBox="1"/>
           <p:nvPr/>
         </p:nvSpPr>
@@ -5316,7 +5316,7 @@
       </p:sp>
       <p:sp>
         <p:nvSpPr>
-          <p:cNvPr id="5" name="S12-chip368"/>
+          <p:cNvPr id="5" name="S12-chip356"/>
           <p:cNvSpPr txBox="1"/>
           <p:nvPr/>
         </p:nvSpPr>
@@ -5363,7 +5363,7 @@
       </p:sp>
       <p:sp>
         <p:nvSpPr>
-          <p:cNvPr id="6" name="S12-chip369"/>
+          <p:cNvPr id="6" name="S12-chip357"/>
           <p:cNvSpPr txBox="1"/>
           <p:nvPr/>
         </p:nvSpPr>
@@ -5410,7 +5410,7 @@
       </p:sp>
       <p:sp>
         <p:nvSpPr>
-          <p:cNvPr id="7" name="S12-text370"/>
+          <p:cNvPr id="7" name="S12-text358"/>
           <p:cNvSpPr txBox="1"/>
           <p:nvPr/>
         </p:nvSpPr>
@@ -5449,7 +5449,7 @@
       </p:sp>
       <p:sp>
         <p:nvSpPr>
-          <p:cNvPr id="8" name="S12-text371"/>
+          <p:cNvPr id="8" name="S12-text359"/>
           <p:cNvSpPr txBox="1"/>
           <p:nvPr/>
         </p:nvSpPr>
@@ -5505,7 +5505,7 @@
       </p:sp>
       <p:sp>
         <p:nvSpPr>
-          <p:cNvPr id="9" name="S12-text372"/>
+          <p:cNvPr id="9" name="S12-text360"/>
           <p:cNvSpPr txBox="1"/>
           <p:nvPr/>
         </p:nvSpPr>
@@ -5561,7 +5561,7 @@
       </p:sp>
       <p:sp>
         <p:nvSpPr>
-          <p:cNvPr id="10" name="S12-text373"/>
+          <p:cNvPr id="10" name="S12-text361"/>
           <p:cNvSpPr txBox="1"/>
           <p:nvPr/>
         </p:nvSpPr>
@@ -5731,7 +5731,7 @@
       </p:sp>
       <p:sp>
         <p:nvSpPr>
-          <p:cNvPr id="3" name="S13-card374"/>
+          <p:cNvPr id="3" name="S13-card362"/>
           <p:cNvSpPr/>
           <p:nvPr/>
         </p:nvSpPr>
@@ -5758,7 +5758,7 @@
       </p:sp>
       <p:sp>
         <p:nvSpPr>
-          <p:cNvPr id="4" name="S13-cardtext375"/>
+          <p:cNvPr id="4" name="S13-cardtext363"/>
           <p:cNvSpPr txBox="1"/>
           <p:nvPr/>
         </p:nvSpPr>
@@ -5792,22 +5792,42 @@
                 <a:ea typeface="맑은 고딕" pitchFamily="34" charset="-122"/>
                 <a:cs typeface="맑은 고딕" pitchFamily="34" charset="-120"/>
               </a:rPr>
-              <a:t>막대그래프는 항목끼리 비교, 꺾은선그래프는 시간에 따른 변화를 보여 줘요.</a:t>
+              <a:t>막대그래프는 항목끼리 비교,</a:t>
             </a:r>
             <a:endParaRPr lang="ko-KR" sz="2800" dirty="0"/>
           </a:p>
-        </p:txBody>
-      </p:sp>
-      <p:sp>
-        <p:nvSpPr>
-          <p:cNvPr id="5" name="S13-figure376" descr="막대그래프: 축구 5명, 야구 3명, 농구 4명"/>
-          <p:cNvSpPr/>
-          <p:nvPr/>
-        </p:nvSpPr>
-        <p:spPr>
-          <a:xfrm>
-            <a:off x="2525182" y="2218773"/>
-            <a:ext cx="404536" cy="1685568"/>
+          <a:p>
+            <a:pPr eaLnBrk="0" indent="0" marL="0">
+              <a:spcAft>
+                <a:spcPts val="600"/>
+              </a:spcAft>
+              <a:buNone/>
+            </a:pPr>
+            <a:r>
+              <a:rPr lang="ko-KR" altLang="en-US" sz="2800" dirty="0">
+                <a:solidFill>
+                  <a:srgbClr val="1F2937"/>
+                </a:solidFill>
+                <a:latin typeface="맑은 고딕" pitchFamily="34" charset="0"/>
+                <a:ea typeface="맑은 고딕" pitchFamily="34" charset="-122"/>
+                <a:cs typeface="맑은 고딕" pitchFamily="34" charset="-120"/>
+              </a:rPr>
+              <a:t>꺾은선그래프는 시간에 따른 변화를 보여 줘요.</a:t>
+            </a:r>
+            <a:endParaRPr lang="ko-KR" sz="2800" dirty="0"/>
+          </a:p>
+        </p:txBody>
+      </p:sp>
+      <p:sp>
+        <p:nvSpPr>
+          <p:cNvPr id="5" name="S13-figure364" descr="막대그래프: 축구 5명, 야구 3명, 농구 4명"/>
+          <p:cNvSpPr/>
+          <p:nvPr/>
+        </p:nvSpPr>
+        <p:spPr>
+          <a:xfrm>
+            <a:off x="2146834" y="2351389"/>
+            <a:ext cx="565014" cy="1412534"/>
           </a:xfrm>
           <a:custGeom>
             <a:avLst/>
@@ -5816,15 +5836,15 @@
             <a:cxnLst/>
             <a:rect l="l" t="t" r="r" b="b"/>
             <a:pathLst>
-              <a:path w="404536" h="1685568">
+              <a:path w="565014" h="1412534">
                 <a:moveTo>
-                  <a:pt x="0" y="1685568"/>
+                  <a:pt x="0" y="1412534"/>
                 </a:moveTo>
                 <a:lnTo>
-                  <a:pt x="404536" y="1685568"/>
-                </a:lnTo>
-                <a:lnTo>
-                  <a:pt x="404536" y="0"/>
+                  <a:pt x="565014" y="1412534"/>
+                </a:lnTo>
+                <a:lnTo>
+                  <a:pt x="565014" y="0"/>
                 </a:lnTo>
                 <a:lnTo>
                   <a:pt x="0" y="0"/>
@@ -5846,14 +5866,14 @@
       </p:sp>
       <p:sp>
         <p:nvSpPr>
-          <p:cNvPr id="6" name="S13-mark377"/>
-          <p:cNvSpPr/>
-          <p:nvPr/>
-        </p:nvSpPr>
-        <p:spPr>
-          <a:xfrm>
-            <a:off x="3266832" y="2893000"/>
-            <a:ext cx="404536" cy="1011341"/>
+          <p:cNvPr id="6" name="S13-mark365"/>
+          <p:cNvSpPr/>
+          <p:nvPr/>
+        </p:nvSpPr>
+        <p:spPr>
+          <a:xfrm>
+            <a:off x="3276861" y="2916403"/>
+            <a:ext cx="565014" cy="847520"/>
           </a:xfrm>
           <a:custGeom>
             <a:avLst/>
@@ -5862,15 +5882,15 @@
             <a:cxnLst/>
             <a:rect l="l" t="t" r="r" b="b"/>
             <a:pathLst>
-              <a:path w="404536" h="1011341">
+              <a:path w="565014" h="847520">
                 <a:moveTo>
-                  <a:pt x="0" y="1011341"/>
+                  <a:pt x="0" y="847520"/>
                 </a:moveTo>
                 <a:lnTo>
-                  <a:pt x="404536" y="1011341"/>
-                </a:lnTo>
-                <a:lnTo>
-                  <a:pt x="404536" y="0"/>
+                  <a:pt x="565014" y="847520"/>
+                </a:lnTo>
+                <a:lnTo>
+                  <a:pt x="565014" y="0"/>
                 </a:lnTo>
                 <a:lnTo>
                   <a:pt x="0" y="0"/>
@@ -5892,14 +5912,14 @@
       </p:sp>
       <p:sp>
         <p:nvSpPr>
-          <p:cNvPr id="7" name="S13-mark378"/>
-          <p:cNvSpPr/>
-          <p:nvPr/>
-        </p:nvSpPr>
-        <p:spPr>
-          <a:xfrm>
-            <a:off x="4008481" y="2555886"/>
-            <a:ext cx="404536" cy="1348454"/>
+          <p:cNvPr id="7" name="S13-mark366"/>
+          <p:cNvSpPr/>
+          <p:nvPr/>
+        </p:nvSpPr>
+        <p:spPr>
+          <a:xfrm>
+            <a:off x="4406888" y="2633896"/>
+            <a:ext cx="565014" cy="1130027"/>
           </a:xfrm>
           <a:custGeom>
             <a:avLst/>
@@ -5908,15 +5928,15 @@
             <a:cxnLst/>
             <a:rect l="l" t="t" r="r" b="b"/>
             <a:pathLst>
-              <a:path w="404536" h="1348454">
+              <a:path w="565014" h="1130027">
                 <a:moveTo>
-                  <a:pt x="0" y="1348454"/>
+                  <a:pt x="0" y="1130027"/>
                 </a:moveTo>
                 <a:lnTo>
-                  <a:pt x="404536" y="1348454"/>
-                </a:lnTo>
-                <a:lnTo>
-                  <a:pt x="404536" y="0"/>
+                  <a:pt x="565014" y="1130027"/>
+                </a:lnTo>
+                <a:lnTo>
+                  <a:pt x="565014" y="0"/>
                 </a:lnTo>
                 <a:lnTo>
                   <a:pt x="0" y="0"/>
@@ -5938,14 +5958,14 @@
       </p:sp>
       <p:sp>
         <p:nvSpPr>
-          <p:cNvPr id="8" name="S13-mark379"/>
-          <p:cNvSpPr/>
-          <p:nvPr/>
-        </p:nvSpPr>
-        <p:spPr>
-          <a:xfrm>
-            <a:off x="2255491" y="3567227"/>
-            <a:ext cx="2427218" cy="0"/>
+          <p:cNvPr id="8" name="S13-mark367"/>
+          <p:cNvSpPr/>
+          <p:nvPr/>
+        </p:nvSpPr>
+        <p:spPr>
+          <a:xfrm>
+            <a:off x="1723074" y="3481416"/>
+            <a:ext cx="3672588" cy="0"/>
           </a:xfrm>
           <a:prstGeom prst="line">
             <a:avLst/>
@@ -5961,14 +5981,14 @@
       </p:sp>
       <p:sp>
         <p:nvSpPr>
-          <p:cNvPr id="9" name="S13-mark380"/>
-          <p:cNvSpPr/>
-          <p:nvPr/>
-        </p:nvSpPr>
-        <p:spPr>
-          <a:xfrm>
-            <a:off x="2255491" y="3230113"/>
-            <a:ext cx="2427218" cy="0"/>
+          <p:cNvPr id="9" name="S13-mark368"/>
+          <p:cNvSpPr/>
+          <p:nvPr/>
+        </p:nvSpPr>
+        <p:spPr>
+          <a:xfrm>
+            <a:off x="1723074" y="3198910"/>
+            <a:ext cx="3672588" cy="0"/>
           </a:xfrm>
           <a:prstGeom prst="line">
             <a:avLst/>
@@ -5984,14 +6004,14 @@
       </p:sp>
       <p:sp>
         <p:nvSpPr>
-          <p:cNvPr id="10" name="S13-mark381"/>
-          <p:cNvSpPr/>
-          <p:nvPr/>
-        </p:nvSpPr>
-        <p:spPr>
-          <a:xfrm>
-            <a:off x="2255491" y="2893000"/>
-            <a:ext cx="2427218" cy="0"/>
+          <p:cNvPr id="10" name="S13-mark369"/>
+          <p:cNvSpPr/>
+          <p:nvPr/>
+        </p:nvSpPr>
+        <p:spPr>
+          <a:xfrm>
+            <a:off x="1723074" y="2916403"/>
+            <a:ext cx="3672588" cy="0"/>
           </a:xfrm>
           <a:prstGeom prst="line">
             <a:avLst/>
@@ -6007,14 +6027,14 @@
       </p:sp>
       <p:sp>
         <p:nvSpPr>
-          <p:cNvPr id="11" name="S13-mark382"/>
-          <p:cNvSpPr/>
-          <p:nvPr/>
-        </p:nvSpPr>
-        <p:spPr>
-          <a:xfrm>
-            <a:off x="2255491" y="2555886"/>
-            <a:ext cx="2427218" cy="0"/>
+          <p:cNvPr id="11" name="S13-mark370"/>
+          <p:cNvSpPr/>
+          <p:nvPr/>
+        </p:nvSpPr>
+        <p:spPr>
+          <a:xfrm>
+            <a:off x="1723074" y="2633896"/>
+            <a:ext cx="3672588" cy="0"/>
           </a:xfrm>
           <a:prstGeom prst="line">
             <a:avLst/>
@@ -6030,14 +6050,14 @@
       </p:sp>
       <p:sp>
         <p:nvSpPr>
-          <p:cNvPr id="12" name="S13-mark383"/>
-          <p:cNvSpPr/>
-          <p:nvPr/>
-        </p:nvSpPr>
-        <p:spPr>
-          <a:xfrm>
-            <a:off x="2255491" y="2218773"/>
-            <a:ext cx="2427218" cy="0"/>
+          <p:cNvPr id="12" name="S13-mark371"/>
+          <p:cNvSpPr/>
+          <p:nvPr/>
+        </p:nvSpPr>
+        <p:spPr>
+          <a:xfrm>
+            <a:off x="1723074" y="2351389"/>
+            <a:ext cx="3672588" cy="0"/>
           </a:xfrm>
           <a:prstGeom prst="line">
             <a:avLst/>
@@ -6053,14 +6073,14 @@
       </p:sp>
       <p:sp>
         <p:nvSpPr>
-          <p:cNvPr id="13" name="S13-mark384"/>
-          <p:cNvSpPr/>
-          <p:nvPr/>
-        </p:nvSpPr>
-        <p:spPr>
-          <a:xfrm>
-            <a:off x="2255491" y="1881659"/>
-            <a:ext cx="2427218" cy="0"/>
+          <p:cNvPr id="13" name="S13-mark372"/>
+          <p:cNvSpPr/>
+          <p:nvPr/>
+        </p:nvSpPr>
+        <p:spPr>
+          <a:xfrm>
+            <a:off x="1723074" y="2068882"/>
+            <a:ext cx="3672588" cy="0"/>
           </a:xfrm>
           <a:prstGeom prst="line">
             <a:avLst/>
@@ -6076,14 +6096,14 @@
       </p:sp>
       <p:sp>
         <p:nvSpPr>
-          <p:cNvPr id="14" name="S13-mark385"/>
-          <p:cNvSpPr/>
-          <p:nvPr/>
-        </p:nvSpPr>
-        <p:spPr>
-          <a:xfrm>
-            <a:off x="2255491" y="3904341"/>
-            <a:ext cx="2427218" cy="0"/>
+          <p:cNvPr id="14" name="S13-mark373"/>
+          <p:cNvSpPr/>
+          <p:nvPr/>
+        </p:nvSpPr>
+        <p:spPr>
+          <a:xfrm>
+            <a:off x="1723074" y="3763923"/>
+            <a:ext cx="3672588" cy="0"/>
           </a:xfrm>
           <a:prstGeom prst="line">
             <a:avLst/>
@@ -6099,14 +6119,14 @@
       </p:sp>
       <p:sp>
         <p:nvSpPr>
-          <p:cNvPr id="15" name="S13-mark386"/>
+          <p:cNvPr id="15" name="S13-mark374"/>
           <p:cNvSpPr/>
           <p:nvPr/>
         </p:nvSpPr>
         <p:spPr>
           <a:xfrm flipV="1">
-            <a:off x="2255491" y="1746814"/>
-            <a:ext cx="0" cy="2157527"/>
+            <a:off x="1723074" y="1880545"/>
+            <a:ext cx="0" cy="1883379"/>
           </a:xfrm>
           <a:prstGeom prst="line">
             <a:avLst/>
@@ -6122,13 +6142,13 @@
       </p:sp>
       <p:sp>
         <p:nvSpPr>
-          <p:cNvPr id="16" name="S13-label388"/>
+          <p:cNvPr id="16" name="S13-label376"/>
           <p:cNvSpPr txBox="1"/>
           <p:nvPr/>
         </p:nvSpPr>
         <p:spPr>
           <a:xfrm>
-            <a:off x="1821878" y="3729716"/>
+            <a:off x="1175790" y="3589298"/>
             <a:ext cx="294132" cy="349250"/>
           </a:xfrm>
           <a:prstGeom prst="rect">
@@ -6161,13 +6181,13 @@
       </p:sp>
       <p:sp>
         <p:nvSpPr>
-          <p:cNvPr id="17" name="S13-label390"/>
+          <p:cNvPr id="17" name="S13-label378"/>
           <p:cNvSpPr txBox="1"/>
           <p:nvPr/>
         </p:nvSpPr>
         <p:spPr>
           <a:xfrm>
-            <a:off x="1821878" y="3392602"/>
+            <a:off x="1175790" y="3024285"/>
             <a:ext cx="294132" cy="349250"/>
           </a:xfrm>
           <a:prstGeom prst="rect">
@@ -6192,7 +6212,7 @@
                 <a:ea typeface="맑은 고딕" pitchFamily="34" charset="-122"/>
                 <a:cs typeface="맑은 고딕" pitchFamily="34" charset="-120"/>
               </a:rPr>
-              <a:t>1</a:t>
+              <a:t>2</a:t>
             </a:r>
             <a:endParaRPr lang="ko-KR" sz="2200" dirty="0"/>
           </a:p>
@@ -6200,13 +6220,13 @@
       </p:sp>
       <p:sp>
         <p:nvSpPr>
-          <p:cNvPr id="18" name="S13-label392"/>
+          <p:cNvPr id="18" name="S13-label380"/>
           <p:cNvSpPr txBox="1"/>
           <p:nvPr/>
         </p:nvSpPr>
         <p:spPr>
           <a:xfrm>
-            <a:off x="1821878" y="3055488"/>
+            <a:off x="1175790" y="2459271"/>
             <a:ext cx="294132" cy="349250"/>
           </a:xfrm>
           <a:prstGeom prst="rect">
@@ -6231,7 +6251,7 @@
                 <a:ea typeface="맑은 고딕" pitchFamily="34" charset="-122"/>
                 <a:cs typeface="맑은 고딕" pitchFamily="34" charset="-120"/>
               </a:rPr>
-              <a:t>2</a:t>
+              <a:t>4</a:t>
             </a:r>
             <a:endParaRPr lang="ko-KR" sz="2200" dirty="0"/>
           </a:p>
@@ -6239,13 +6259,13 @@
       </p:sp>
       <p:sp>
         <p:nvSpPr>
-          <p:cNvPr id="19" name="S13-label394"/>
+          <p:cNvPr id="19" name="S13-label382"/>
           <p:cNvSpPr txBox="1"/>
           <p:nvPr/>
         </p:nvSpPr>
         <p:spPr>
           <a:xfrm>
-            <a:off x="1821878" y="2718375"/>
+            <a:off x="1175790" y="1894257"/>
             <a:ext cx="294132" cy="349250"/>
           </a:xfrm>
           <a:prstGeom prst="rect">
@@ -6270,7 +6290,7 @@
                 <a:ea typeface="맑은 고딕" pitchFamily="34" charset="-122"/>
                 <a:cs typeface="맑은 고딕" pitchFamily="34" charset="-120"/>
               </a:rPr>
-              <a:t>3</a:t>
+              <a:t>6</a:t>
             </a:r>
             <a:endParaRPr lang="ko-KR" sz="2200" dirty="0"/>
           </a:p>
@@ -6278,14 +6298,14 @@
       </p:sp>
       <p:sp>
         <p:nvSpPr>
-          <p:cNvPr id="20" name="S13-label396"/>
+          <p:cNvPr id="20" name="S13-label384"/>
           <p:cNvSpPr txBox="1"/>
           <p:nvPr/>
         </p:nvSpPr>
         <p:spPr>
           <a:xfrm>
-            <a:off x="1821878" y="2381261"/>
-            <a:ext cx="294132" cy="349250"/>
+            <a:off x="963446" y="1423413"/>
+            <a:ext cx="718820" cy="349250"/>
           </a:xfrm>
           <a:prstGeom prst="rect">
             <a:avLst/>
@@ -6309,7 +6329,7 @@
                 <a:ea typeface="맑은 고딕" pitchFamily="34" charset="-122"/>
                 <a:cs typeface="맑은 고딕" pitchFamily="34" charset="-120"/>
               </a:rPr>
-              <a:t>4</a:t>
+              <a:t>(명)</a:t>
             </a:r>
             <a:endParaRPr lang="ko-KR" sz="2200" dirty="0"/>
           </a:p>
@@ -6317,14 +6337,14 @@
       </p:sp>
       <p:sp>
         <p:nvSpPr>
-          <p:cNvPr id="21" name="S13-label398"/>
+          <p:cNvPr id="21" name="S13-label386"/>
           <p:cNvSpPr txBox="1"/>
           <p:nvPr/>
         </p:nvSpPr>
         <p:spPr>
           <a:xfrm>
-            <a:off x="1821878" y="2044148"/>
-            <a:ext cx="294132" cy="349250"/>
+            <a:off x="2100665" y="3895347"/>
+            <a:ext cx="657352" cy="349250"/>
           </a:xfrm>
           <a:prstGeom prst="rect">
             <a:avLst/>
@@ -6348,7 +6368,7 @@
                 <a:ea typeface="맑은 고딕" pitchFamily="34" charset="-122"/>
                 <a:cs typeface="맑은 고딕" pitchFamily="34" charset="-120"/>
               </a:rPr>
-              <a:t>5</a:t>
+              <a:t>축구</a:t>
             </a:r>
             <a:endParaRPr lang="ko-KR" sz="2200" dirty="0"/>
           </a:p>
@@ -6356,14 +6376,14 @@
       </p:sp>
       <p:sp>
         <p:nvSpPr>
-          <p:cNvPr id="22" name="S13-label400"/>
+          <p:cNvPr id="22" name="S13-label388"/>
           <p:cNvSpPr txBox="1"/>
           <p:nvPr/>
         </p:nvSpPr>
         <p:spPr>
           <a:xfrm>
-            <a:off x="1821878" y="1707034"/>
-            <a:ext cx="294132" cy="349250"/>
+            <a:off x="3230692" y="3895347"/>
+            <a:ext cx="657352" cy="349250"/>
           </a:xfrm>
           <a:prstGeom prst="rect">
             <a:avLst/>
@@ -6387,7 +6407,7 @@
                 <a:ea typeface="맑은 고딕" pitchFamily="34" charset="-122"/>
                 <a:cs typeface="맑은 고딕" pitchFamily="34" charset="-120"/>
               </a:rPr>
-              <a:t>6</a:t>
+              <a:t>야구</a:t>
             </a:r>
             <a:endParaRPr lang="ko-KR" sz="2200" dirty="0"/>
           </a:p>
@@ -6395,14 +6415,14 @@
       </p:sp>
       <p:sp>
         <p:nvSpPr>
-          <p:cNvPr id="23" name="S13-label402"/>
+          <p:cNvPr id="23" name="S13-label390"/>
           <p:cNvSpPr txBox="1"/>
           <p:nvPr/>
         </p:nvSpPr>
         <p:spPr>
           <a:xfrm>
-            <a:off x="1609534" y="1369920"/>
-            <a:ext cx="718820" cy="349250"/>
+            <a:off x="4360719" y="3895347"/>
+            <a:ext cx="657352" cy="349250"/>
           </a:xfrm>
           <a:prstGeom prst="rect">
             <a:avLst/>
@@ -6426,7 +6446,7 @@
                 <a:ea typeface="맑은 고딕" pitchFamily="34" charset="-122"/>
                 <a:cs typeface="맑은 고딕" pitchFamily="34" charset="-120"/>
               </a:rPr>
-              <a:t>(명)</a:t>
+              <a:t>농구</a:t>
             </a:r>
             <a:endParaRPr lang="ko-KR" sz="2200" dirty="0"/>
           </a:p>
@@ -6434,124 +6454,7 @@
       </p:sp>
       <p:sp>
         <p:nvSpPr>
-          <p:cNvPr id="24" name="S13-label404"/>
-          <p:cNvSpPr txBox="1"/>
-          <p:nvPr/>
-        </p:nvSpPr>
-        <p:spPr>
-          <a:xfrm>
-            <a:off x="2398774" y="3948840"/>
-            <a:ext cx="657352" cy="349250"/>
-          </a:xfrm>
-          <a:prstGeom prst="rect">
-            <a:avLst/>
-          </a:prstGeom>
-          <a:noFill/>
-          <a:ln/>
-        </p:spPr>
-        <p:txBody>
-          <a:bodyPr wrap="square" lIns="0" tIns="0" rIns="0" bIns="0" rtlCol="0" anchor="ctr"/>
-          <a:lstStyle/>
-          <a:p>
-            <a:pPr eaLnBrk="0" algn="ctr" indent="0" marL="0">
-              <a:buNone/>
-            </a:pPr>
-            <a:r>
-              <a:rPr lang="ko-KR" altLang="en-US" sz="2200" dirty="0">
-                <a:solidFill>
-                  <a:srgbClr val="1F2937"/>
-                </a:solidFill>
-                <a:latin typeface="맑은 고딕" pitchFamily="34" charset="0"/>
-                <a:ea typeface="맑은 고딕" pitchFamily="34" charset="-122"/>
-                <a:cs typeface="맑은 고딕" pitchFamily="34" charset="-120"/>
-              </a:rPr>
-              <a:t>축구</a:t>
-            </a:r>
-            <a:endParaRPr lang="ko-KR" sz="2200" dirty="0"/>
-          </a:p>
-        </p:txBody>
-      </p:sp>
-      <p:sp>
-        <p:nvSpPr>
-          <p:cNvPr id="25" name="S13-label406"/>
-          <p:cNvSpPr txBox="1"/>
-          <p:nvPr/>
-        </p:nvSpPr>
-        <p:spPr>
-          <a:xfrm>
-            <a:off x="3140424" y="3948840"/>
-            <a:ext cx="657352" cy="349250"/>
-          </a:xfrm>
-          <a:prstGeom prst="rect">
-            <a:avLst/>
-          </a:prstGeom>
-          <a:noFill/>
-          <a:ln/>
-        </p:spPr>
-        <p:txBody>
-          <a:bodyPr wrap="square" lIns="0" tIns="0" rIns="0" bIns="0" rtlCol="0" anchor="ctr"/>
-          <a:lstStyle/>
-          <a:p>
-            <a:pPr eaLnBrk="0" algn="ctr" indent="0" marL="0">
-              <a:buNone/>
-            </a:pPr>
-            <a:r>
-              <a:rPr lang="ko-KR" altLang="en-US" sz="2200" dirty="0">
-                <a:solidFill>
-                  <a:srgbClr val="1F2937"/>
-                </a:solidFill>
-                <a:latin typeface="맑은 고딕" pitchFamily="34" charset="0"/>
-                <a:ea typeface="맑은 고딕" pitchFamily="34" charset="-122"/>
-                <a:cs typeface="맑은 고딕" pitchFamily="34" charset="-120"/>
-              </a:rPr>
-              <a:t>야구</a:t>
-            </a:r>
-            <a:endParaRPr lang="ko-KR" sz="2200" dirty="0"/>
-          </a:p>
-        </p:txBody>
-      </p:sp>
-      <p:sp>
-        <p:nvSpPr>
-          <p:cNvPr id="26" name="S13-label408"/>
-          <p:cNvSpPr txBox="1"/>
-          <p:nvPr/>
-        </p:nvSpPr>
-        <p:spPr>
-          <a:xfrm>
-            <a:off x="3882074" y="3948840"/>
-            <a:ext cx="657352" cy="349250"/>
-          </a:xfrm>
-          <a:prstGeom prst="rect">
-            <a:avLst/>
-          </a:prstGeom>
-          <a:noFill/>
-          <a:ln/>
-        </p:spPr>
-        <p:txBody>
-          <a:bodyPr wrap="square" lIns="0" tIns="0" rIns="0" bIns="0" rtlCol="0" anchor="ctr"/>
-          <a:lstStyle/>
-          <a:p>
-            <a:pPr eaLnBrk="0" algn="ctr" indent="0" marL="0">
-              <a:buNone/>
-            </a:pPr>
-            <a:r>
-              <a:rPr lang="ko-KR" altLang="en-US" sz="2200" dirty="0">
-                <a:solidFill>
-                  <a:srgbClr val="1F2937"/>
-                </a:solidFill>
-                <a:latin typeface="맑은 고딕" pitchFamily="34" charset="0"/>
-                <a:ea typeface="맑은 고딕" pitchFamily="34" charset="-122"/>
-                <a:cs typeface="맑은 고딕" pitchFamily="34" charset="-120"/>
-              </a:rPr>
-              <a:t>농구</a:t>
-            </a:r>
-            <a:endParaRPr lang="ko-KR" sz="2200" dirty="0"/>
-          </a:p>
-        </p:txBody>
-      </p:sp>
-      <p:sp>
-        <p:nvSpPr>
-          <p:cNvPr id="27" name="S13-label409"/>
+          <p:cNvPr id="24" name="S13-label391"/>
           <p:cNvSpPr txBox="1"/>
           <p:nvPr/>
         </p:nvSpPr>
@@ -6590,14 +6493,14 @@
       </p:sp>
       <p:sp>
         <p:nvSpPr>
-          <p:cNvPr id="28" name="S13-figure410" descr="꺾은선그래프: 1주 2 cm, 2주 3 cm, 3주 5 cm, 4주 6 cm"/>
-          <p:cNvSpPr/>
-          <p:nvPr/>
-        </p:nvSpPr>
-        <p:spPr>
-          <a:xfrm>
-            <a:off x="8062481" y="1881659"/>
-            <a:ext cx="2224950" cy="1348454"/>
+          <p:cNvPr id="25" name="S13-figure392" descr="꺾은선그래프: 1주 2 cm, 2주 3 cm, 3주 5 cm, 4주 6 cm"/>
+          <p:cNvSpPr/>
+          <p:nvPr/>
+        </p:nvSpPr>
+        <p:spPr>
+          <a:xfrm>
+            <a:off x="7648411" y="2112342"/>
+            <a:ext cx="3197521" cy="1065840"/>
           </a:xfrm>
           <a:custGeom>
             <a:avLst/>
@@ -6606,18 +6509,18 @@
             <a:cxnLst/>
             <a:rect l="l" t="t" r="r" b="b"/>
             <a:pathLst>
-              <a:path w="2224950" h="1348454">
+              <a:path w="3197521" h="1065840">
                 <a:moveTo>
-                  <a:pt x="0" y="1348454"/>
+                  <a:pt x="0" y="1065840"/>
                 </a:moveTo>
                 <a:lnTo>
-                  <a:pt x="741650" y="1011341"/>
-                </a:lnTo>
-                <a:lnTo>
-                  <a:pt x="1483300" y="337114"/>
-                </a:lnTo>
-                <a:lnTo>
-                  <a:pt x="2224950" y="0"/>
+                  <a:pt x="1065840" y="799380"/>
+                </a:lnTo>
+                <a:lnTo>
+                  <a:pt x="2131680" y="266460"/>
+                </a:lnTo>
+                <a:lnTo>
+                  <a:pt x="3197521" y="0"/>
                 </a:lnTo>
               </a:path>
             </a:pathLst>
@@ -6633,14 +6536,14 @@
       </p:sp>
       <p:sp>
         <p:nvSpPr>
-          <p:cNvPr id="29" name="S13-mark411"/>
+          <p:cNvPr id="26" name="S13-mark393"/>
           <p:cNvSpPr/>
           <p:nvPr/>
         </p:nvSpPr>
         <p:spPr>
           <a:xfrm flipV="1">
-            <a:off x="8062481" y="1881659"/>
-            <a:ext cx="0" cy="2022682"/>
+            <a:off x="7648411" y="2112342"/>
+            <a:ext cx="0" cy="1598760"/>
           </a:xfrm>
           <a:prstGeom prst="line">
             <a:avLst/>
@@ -6656,14 +6559,14 @@
       </p:sp>
       <p:sp>
         <p:nvSpPr>
-          <p:cNvPr id="30" name="S13-mark412"/>
+          <p:cNvPr id="27" name="S13-mark394"/>
           <p:cNvSpPr/>
           <p:nvPr/>
         </p:nvSpPr>
         <p:spPr>
           <a:xfrm flipV="1">
-            <a:off x="8804131" y="1881659"/>
-            <a:ext cx="0" cy="2022682"/>
+            <a:off x="8714251" y="2112342"/>
+            <a:ext cx="0" cy="1598760"/>
           </a:xfrm>
           <a:prstGeom prst="line">
             <a:avLst/>
@@ -6679,14 +6582,14 @@
       </p:sp>
       <p:sp>
         <p:nvSpPr>
-          <p:cNvPr id="31" name="S13-mark413"/>
+          <p:cNvPr id="28" name="S13-mark395"/>
           <p:cNvSpPr/>
           <p:nvPr/>
         </p:nvSpPr>
         <p:spPr>
           <a:xfrm flipV="1">
-            <a:off x="9545781" y="1881659"/>
-            <a:ext cx="0" cy="2022682"/>
+            <a:off x="9780092" y="2112342"/>
+            <a:ext cx="0" cy="1598760"/>
           </a:xfrm>
           <a:prstGeom prst="line">
             <a:avLst/>
@@ -6702,14 +6605,14 @@
       </p:sp>
       <p:sp>
         <p:nvSpPr>
-          <p:cNvPr id="32" name="S13-mark414"/>
+          <p:cNvPr id="29" name="S13-mark396"/>
           <p:cNvSpPr/>
           <p:nvPr/>
         </p:nvSpPr>
         <p:spPr>
           <a:xfrm flipV="1">
-            <a:off x="10287431" y="1881659"/>
-            <a:ext cx="0" cy="2022682"/>
+            <a:off x="10845932" y="2112342"/>
+            <a:ext cx="0" cy="1598760"/>
           </a:xfrm>
           <a:prstGeom prst="line">
             <a:avLst/>
@@ -6725,14 +6628,14 @@
       </p:sp>
       <p:sp>
         <p:nvSpPr>
-          <p:cNvPr id="33" name="S13-mark415"/>
-          <p:cNvSpPr/>
-          <p:nvPr/>
-        </p:nvSpPr>
-        <p:spPr>
-          <a:xfrm>
-            <a:off x="7590522" y="3567227"/>
-            <a:ext cx="3168868" cy="0"/>
+          <p:cNvPr id="30" name="S13-mark397"/>
+          <p:cNvSpPr/>
+          <p:nvPr/>
+        </p:nvSpPr>
+        <p:spPr>
+          <a:xfrm>
+            <a:off x="6982261" y="3444643"/>
+            <a:ext cx="4529821" cy="0"/>
           </a:xfrm>
           <a:prstGeom prst="line">
             <a:avLst/>
@@ -6748,14 +6651,14 @@
       </p:sp>
       <p:sp>
         <p:nvSpPr>
-          <p:cNvPr id="34" name="S13-mark416"/>
-          <p:cNvSpPr/>
-          <p:nvPr/>
-        </p:nvSpPr>
-        <p:spPr>
-          <a:xfrm>
-            <a:off x="7590522" y="3230113"/>
-            <a:ext cx="3168868" cy="0"/>
+          <p:cNvPr id="31" name="S13-mark398"/>
+          <p:cNvSpPr/>
+          <p:nvPr/>
+        </p:nvSpPr>
+        <p:spPr>
+          <a:xfrm>
+            <a:off x="6982261" y="3178183"/>
+            <a:ext cx="4529821" cy="0"/>
           </a:xfrm>
           <a:prstGeom prst="line">
             <a:avLst/>
@@ -6771,14 +6674,14 @@
       </p:sp>
       <p:sp>
         <p:nvSpPr>
-          <p:cNvPr id="35" name="S13-mark417"/>
-          <p:cNvSpPr/>
-          <p:nvPr/>
-        </p:nvSpPr>
-        <p:spPr>
-          <a:xfrm>
-            <a:off x="7590522" y="2893000"/>
-            <a:ext cx="3168868" cy="0"/>
+          <p:cNvPr id="32" name="S13-mark399"/>
+          <p:cNvSpPr/>
+          <p:nvPr/>
+        </p:nvSpPr>
+        <p:spPr>
+          <a:xfrm>
+            <a:off x="6982261" y="2911723"/>
+            <a:ext cx="4529821" cy="0"/>
           </a:xfrm>
           <a:prstGeom prst="line">
             <a:avLst/>
@@ -6794,14 +6697,14 @@
       </p:sp>
       <p:sp>
         <p:nvSpPr>
-          <p:cNvPr id="36" name="S13-mark418"/>
-          <p:cNvSpPr/>
-          <p:nvPr/>
-        </p:nvSpPr>
-        <p:spPr>
-          <a:xfrm>
-            <a:off x="7590522" y="2555886"/>
-            <a:ext cx="3168868" cy="0"/>
+          <p:cNvPr id="33" name="S13-mark400"/>
+          <p:cNvSpPr/>
+          <p:nvPr/>
+        </p:nvSpPr>
+        <p:spPr>
+          <a:xfrm>
+            <a:off x="6982261" y="2645262"/>
+            <a:ext cx="4529821" cy="0"/>
           </a:xfrm>
           <a:prstGeom prst="line">
             <a:avLst/>
@@ -6817,14 +6720,14 @@
       </p:sp>
       <p:sp>
         <p:nvSpPr>
-          <p:cNvPr id="37" name="S13-mark419"/>
-          <p:cNvSpPr/>
-          <p:nvPr/>
-        </p:nvSpPr>
-        <p:spPr>
-          <a:xfrm>
-            <a:off x="7590522" y="2218773"/>
-            <a:ext cx="3168868" cy="0"/>
+          <p:cNvPr id="34" name="S13-mark401"/>
+          <p:cNvSpPr/>
+          <p:nvPr/>
+        </p:nvSpPr>
+        <p:spPr>
+          <a:xfrm>
+            <a:off x="6982261" y="2378802"/>
+            <a:ext cx="4529821" cy="0"/>
           </a:xfrm>
           <a:prstGeom prst="line">
             <a:avLst/>
@@ -6840,14 +6743,14 @@
       </p:sp>
       <p:sp>
         <p:nvSpPr>
-          <p:cNvPr id="38" name="S13-mark420"/>
-          <p:cNvSpPr/>
-          <p:nvPr/>
-        </p:nvSpPr>
-        <p:spPr>
-          <a:xfrm>
-            <a:off x="7590522" y="1881659"/>
-            <a:ext cx="3168868" cy="0"/>
+          <p:cNvPr id="35" name="S13-mark402"/>
+          <p:cNvSpPr/>
+          <p:nvPr/>
+        </p:nvSpPr>
+        <p:spPr>
+          <a:xfrm>
+            <a:off x="6982261" y="2112342"/>
+            <a:ext cx="4529821" cy="0"/>
           </a:xfrm>
           <a:prstGeom prst="line">
             <a:avLst/>
@@ -6863,14 +6766,14 @@
       </p:sp>
       <p:sp>
         <p:nvSpPr>
-          <p:cNvPr id="39" name="S13-mark421"/>
-          <p:cNvSpPr/>
-          <p:nvPr/>
-        </p:nvSpPr>
-        <p:spPr>
-          <a:xfrm>
-            <a:off x="7590522" y="3904341"/>
-            <a:ext cx="3168868" cy="0"/>
+          <p:cNvPr id="36" name="S13-mark403"/>
+          <p:cNvSpPr/>
+          <p:nvPr/>
+        </p:nvSpPr>
+        <p:spPr>
+          <a:xfrm>
+            <a:off x="6982261" y="3711103"/>
+            <a:ext cx="4529821" cy="0"/>
           </a:xfrm>
           <a:prstGeom prst="line">
             <a:avLst/>
@@ -6886,14 +6789,14 @@
       </p:sp>
       <p:sp>
         <p:nvSpPr>
-          <p:cNvPr id="40" name="S13-mark422"/>
+          <p:cNvPr id="37" name="S13-mark404"/>
           <p:cNvSpPr/>
           <p:nvPr/>
         </p:nvSpPr>
         <p:spPr>
           <a:xfrm flipV="1">
-            <a:off x="7590522" y="1746814"/>
-            <a:ext cx="0" cy="2157527"/>
+            <a:off x="6982261" y="1934702"/>
+            <a:ext cx="0" cy="1776400"/>
           </a:xfrm>
           <a:prstGeom prst="line">
             <a:avLst/>
@@ -6909,13 +6812,13 @@
       </p:sp>
       <p:sp>
         <p:nvSpPr>
-          <p:cNvPr id="41" name="S13-mark423"/>
-          <p:cNvSpPr/>
-          <p:nvPr/>
-        </p:nvSpPr>
-        <p:spPr>
-          <a:xfrm>
-            <a:off x="8003045" y="3170677"/>
+          <p:cNvPr id="38" name="S13-mark405"/>
+          <p:cNvSpPr/>
+          <p:nvPr/>
+        </p:nvSpPr>
+        <p:spPr>
+          <a:xfrm>
+            <a:off x="7588975" y="3118747"/>
             <a:ext cx="118872" cy="118872"/>
           </a:xfrm>
           <a:prstGeom prst="ellipse">
@@ -6934,13 +6837,13 @@
       </p:sp>
       <p:sp>
         <p:nvSpPr>
-          <p:cNvPr id="42" name="S13-mark424"/>
-          <p:cNvSpPr/>
-          <p:nvPr/>
-        </p:nvSpPr>
-        <p:spPr>
-          <a:xfrm>
-            <a:off x="8744695" y="2833564"/>
+          <p:cNvPr id="39" name="S13-mark406"/>
+          <p:cNvSpPr/>
+          <p:nvPr/>
+        </p:nvSpPr>
+        <p:spPr>
+          <a:xfrm>
+            <a:off x="8654815" y="2852287"/>
             <a:ext cx="118872" cy="118872"/>
           </a:xfrm>
           <a:prstGeom prst="ellipse">
@@ -6959,13 +6862,13 @@
       </p:sp>
       <p:sp>
         <p:nvSpPr>
-          <p:cNvPr id="43" name="S13-mark425"/>
-          <p:cNvSpPr/>
-          <p:nvPr/>
-        </p:nvSpPr>
-        <p:spPr>
-          <a:xfrm>
-            <a:off x="9486345" y="2159337"/>
+          <p:cNvPr id="40" name="S13-mark407"/>
+          <p:cNvSpPr/>
+          <p:nvPr/>
+        </p:nvSpPr>
+        <p:spPr>
+          <a:xfrm>
+            <a:off x="9720656" y="2319366"/>
             <a:ext cx="118872" cy="118872"/>
           </a:xfrm>
           <a:prstGeom prst="ellipse">
@@ -6984,13 +6887,13 @@
       </p:sp>
       <p:sp>
         <p:nvSpPr>
-          <p:cNvPr id="44" name="S13-mark426"/>
-          <p:cNvSpPr/>
-          <p:nvPr/>
-        </p:nvSpPr>
-        <p:spPr>
-          <a:xfrm>
-            <a:off x="10227995" y="1822223"/>
+          <p:cNvPr id="41" name="S13-mark408"/>
+          <p:cNvSpPr/>
+          <p:nvPr/>
+        </p:nvSpPr>
+        <p:spPr>
+          <a:xfrm>
+            <a:off x="10786496" y="2052906"/>
             <a:ext cx="118872" cy="118872"/>
           </a:xfrm>
           <a:prstGeom prst="ellipse">
@@ -7009,13 +6912,13 @@
       </p:sp>
       <p:sp>
         <p:nvSpPr>
-          <p:cNvPr id="45" name="S13-label428"/>
+          <p:cNvPr id="42" name="S13-label410"/>
           <p:cNvSpPr txBox="1"/>
           <p:nvPr/>
         </p:nvSpPr>
         <p:spPr>
           <a:xfrm>
-            <a:off x="7156909" y="3729716"/>
+            <a:off x="6457710" y="3536478"/>
             <a:ext cx="294132" cy="349250"/>
           </a:xfrm>
           <a:prstGeom prst="rect">
@@ -7048,13 +6951,13 @@
       </p:sp>
       <p:sp>
         <p:nvSpPr>
-          <p:cNvPr id="46" name="S13-label430"/>
+          <p:cNvPr id="43" name="S13-label412"/>
           <p:cNvSpPr txBox="1"/>
           <p:nvPr/>
         </p:nvSpPr>
         <p:spPr>
           <a:xfrm>
-            <a:off x="7156909" y="3729716"/>
+            <a:off x="6457710" y="3003558"/>
             <a:ext cx="294132" cy="349250"/>
           </a:xfrm>
           <a:prstGeom prst="rect">
@@ -7079,7 +6982,7 @@
                 <a:ea typeface="맑은 고딕" pitchFamily="34" charset="-122"/>
                 <a:cs typeface="맑은 고딕" pitchFamily="34" charset="-120"/>
               </a:rPr>
-              <a:t>0</a:t>
+              <a:t>2</a:t>
             </a:r>
             <a:endParaRPr lang="ko-KR" sz="2200" dirty="0"/>
           </a:p>
@@ -7087,13 +6990,13 @@
       </p:sp>
       <p:sp>
         <p:nvSpPr>
-          <p:cNvPr id="47" name="S13-label432"/>
+          <p:cNvPr id="44" name="S13-label414"/>
           <p:cNvSpPr txBox="1"/>
           <p:nvPr/>
         </p:nvSpPr>
         <p:spPr>
           <a:xfrm>
-            <a:off x="7156909" y="3392602"/>
+            <a:off x="6457710" y="2470637"/>
             <a:ext cx="294132" cy="349250"/>
           </a:xfrm>
           <a:prstGeom prst="rect">
@@ -7118,7 +7021,7 @@
                 <a:ea typeface="맑은 고딕" pitchFamily="34" charset="-122"/>
                 <a:cs typeface="맑은 고딕" pitchFamily="34" charset="-120"/>
               </a:rPr>
-              <a:t>1</a:t>
+              <a:t>4</a:t>
             </a:r>
             <a:endParaRPr lang="ko-KR" sz="2200" dirty="0"/>
           </a:p>
@@ -7126,13 +7029,13 @@
       </p:sp>
       <p:sp>
         <p:nvSpPr>
-          <p:cNvPr id="48" name="S13-label434"/>
+          <p:cNvPr id="45" name="S13-label416"/>
           <p:cNvSpPr txBox="1"/>
           <p:nvPr/>
         </p:nvSpPr>
         <p:spPr>
           <a:xfrm>
-            <a:off x="7156909" y="3055488"/>
+            <a:off x="6457710" y="1937717"/>
             <a:ext cx="294132" cy="349250"/>
           </a:xfrm>
           <a:prstGeom prst="rect">
@@ -7157,7 +7060,7 @@
                 <a:ea typeface="맑은 고딕" pitchFamily="34" charset="-122"/>
                 <a:cs typeface="맑은 고딕" pitchFamily="34" charset="-120"/>
               </a:rPr>
-              <a:t>2</a:t>
+              <a:t>6</a:t>
             </a:r>
             <a:endParaRPr lang="ko-KR" sz="2200" dirty="0"/>
           </a:p>
@@ -7165,14 +7068,14 @@
       </p:sp>
       <p:sp>
         <p:nvSpPr>
-          <p:cNvPr id="49" name="S13-label436"/>
+          <p:cNvPr id="46" name="S13-label418"/>
           <p:cNvSpPr txBox="1"/>
           <p:nvPr/>
         </p:nvSpPr>
         <p:spPr>
           <a:xfrm>
-            <a:off x="7156909" y="2718375"/>
-            <a:ext cx="294132" cy="349250"/>
+            <a:off x="6189486" y="1493617"/>
+            <a:ext cx="830580" cy="349250"/>
           </a:xfrm>
           <a:prstGeom prst="rect">
             <a:avLst/>
@@ -7188,6 +7091,45 @@
               <a:buNone/>
             </a:pPr>
             <a:r>
+              <a:rPr lang="en-US" altLang="ko-KR" sz="2200" dirty="0">
+                <a:solidFill>
+                  <a:srgbClr val="1F2937"/>
+                </a:solidFill>
+                <a:latin typeface="맑은 고딕" pitchFamily="34" charset="0"/>
+                <a:ea typeface="맑은 고딕" pitchFamily="34" charset="-122"/>
+                <a:cs typeface="맑은 고딕" pitchFamily="34" charset="-120"/>
+              </a:rPr>
+              <a:t>(cm)</a:t>
+            </a:r>
+            <a:endParaRPr lang="ko-KR" sz="2200" dirty="0"/>
+          </a:p>
+        </p:txBody>
+      </p:sp>
+      <p:sp>
+        <p:nvSpPr>
+          <p:cNvPr id="47" name="S13-label420"/>
+          <p:cNvSpPr txBox="1"/>
+          <p:nvPr/>
+        </p:nvSpPr>
+        <p:spPr>
+          <a:xfrm>
+            <a:off x="7364439" y="3825143"/>
+            <a:ext cx="567944" cy="349250"/>
+          </a:xfrm>
+          <a:prstGeom prst="rect">
+            <a:avLst/>
+          </a:prstGeom>
+          <a:noFill/>
+          <a:ln/>
+        </p:spPr>
+        <p:txBody>
+          <a:bodyPr wrap="square" lIns="0" tIns="0" rIns="0" bIns="0" rtlCol="0" anchor="ctr"/>
+          <a:lstStyle/>
+          <a:p>
+            <a:pPr eaLnBrk="0" algn="ctr" indent="0" marL="0">
+              <a:buNone/>
+            </a:pPr>
+            <a:r>
               <a:rPr lang="ko-KR" altLang="en-US" sz="2200" dirty="0">
                 <a:solidFill>
                   <a:srgbClr val="1F2937"/>
@@ -7196,7 +7138,7 @@
                 <a:ea typeface="맑은 고딕" pitchFamily="34" charset="-122"/>
                 <a:cs typeface="맑은 고딕" pitchFamily="34" charset="-120"/>
               </a:rPr>
-              <a:t>3</a:t>
+              <a:t>1주</a:t>
             </a:r>
             <a:endParaRPr lang="ko-KR" sz="2200" dirty="0"/>
           </a:p>
@@ -7204,14 +7146,14 @@
       </p:sp>
       <p:sp>
         <p:nvSpPr>
-          <p:cNvPr id="50" name="S13-label438"/>
+          <p:cNvPr id="48" name="S13-label422"/>
           <p:cNvSpPr txBox="1"/>
           <p:nvPr/>
         </p:nvSpPr>
         <p:spPr>
           <a:xfrm>
-            <a:off x="7156909" y="2381261"/>
-            <a:ext cx="294132" cy="349250"/>
+            <a:off x="8430279" y="3825143"/>
+            <a:ext cx="567944" cy="349250"/>
           </a:xfrm>
           <a:prstGeom prst="rect">
             <a:avLst/>
@@ -7235,7 +7177,7 @@
                 <a:ea typeface="맑은 고딕" pitchFamily="34" charset="-122"/>
                 <a:cs typeface="맑은 고딕" pitchFamily="34" charset="-120"/>
               </a:rPr>
-              <a:t>4</a:t>
+              <a:t>2주</a:t>
             </a:r>
             <a:endParaRPr lang="ko-KR" sz="2200" dirty="0"/>
           </a:p>
@@ -7243,14 +7185,14 @@
       </p:sp>
       <p:sp>
         <p:nvSpPr>
-          <p:cNvPr id="51" name="S13-label440"/>
+          <p:cNvPr id="49" name="S13-label424"/>
           <p:cNvSpPr txBox="1"/>
           <p:nvPr/>
         </p:nvSpPr>
         <p:spPr>
           <a:xfrm>
-            <a:off x="7156909" y="2044148"/>
-            <a:ext cx="294132" cy="349250"/>
+            <a:off x="9496120" y="3825143"/>
+            <a:ext cx="567944" cy="349250"/>
           </a:xfrm>
           <a:prstGeom prst="rect">
             <a:avLst/>
@@ -7274,7 +7216,7 @@
                 <a:ea typeface="맑은 고딕" pitchFamily="34" charset="-122"/>
                 <a:cs typeface="맑은 고딕" pitchFamily="34" charset="-120"/>
               </a:rPr>
-              <a:t>5</a:t>
+              <a:t>3주</a:t>
             </a:r>
             <a:endParaRPr lang="ko-KR" sz="2200" dirty="0"/>
           </a:p>
@@ -7282,14 +7224,14 @@
       </p:sp>
       <p:sp>
         <p:nvSpPr>
-          <p:cNvPr id="52" name="S13-label442"/>
+          <p:cNvPr id="50" name="S13-label426"/>
           <p:cNvSpPr txBox="1"/>
           <p:nvPr/>
         </p:nvSpPr>
         <p:spPr>
           <a:xfrm>
-            <a:off x="7156909" y="1707034"/>
-            <a:ext cx="294132" cy="349250"/>
+            <a:off x="10561960" y="3825143"/>
+            <a:ext cx="567944" cy="349250"/>
           </a:xfrm>
           <a:prstGeom prst="rect">
             <a:avLst/>
@@ -7313,7 +7255,7 @@
                 <a:ea typeface="맑은 고딕" pitchFamily="34" charset="-122"/>
                 <a:cs typeface="맑은 고딕" pitchFamily="34" charset="-120"/>
               </a:rPr>
-              <a:t>6</a:t>
+              <a:t>4주</a:t>
             </a:r>
             <a:endParaRPr lang="ko-KR" sz="2200" dirty="0"/>
           </a:p>
@@ -7321,202 +7263,7 @@
       </p:sp>
       <p:sp>
         <p:nvSpPr>
-          <p:cNvPr id="53" name="S13-label444"/>
-          <p:cNvSpPr txBox="1"/>
-          <p:nvPr/>
-        </p:nvSpPr>
-        <p:spPr>
-          <a:xfrm>
-            <a:off x="6888685" y="1369920"/>
-            <a:ext cx="830580" cy="349250"/>
-          </a:xfrm>
-          <a:prstGeom prst="rect">
-            <a:avLst/>
-          </a:prstGeom>
-          <a:noFill/>
-          <a:ln/>
-        </p:spPr>
-        <p:txBody>
-          <a:bodyPr wrap="square" lIns="0" tIns="0" rIns="0" bIns="0" rtlCol="0" anchor="ctr"/>
-          <a:lstStyle/>
-          <a:p>
-            <a:pPr eaLnBrk="0" algn="ctr" indent="0" marL="0">
-              <a:buNone/>
-            </a:pPr>
-            <a:r>
-              <a:rPr lang="en-US" altLang="ko-KR" sz="2200" dirty="0">
-                <a:solidFill>
-                  <a:srgbClr val="1F2937"/>
-                </a:solidFill>
-                <a:latin typeface="맑은 고딕" pitchFamily="34" charset="0"/>
-                <a:ea typeface="맑은 고딕" pitchFamily="34" charset="-122"/>
-                <a:cs typeface="맑은 고딕" pitchFamily="34" charset="-120"/>
-              </a:rPr>
-              <a:t>(cm)</a:t>
-            </a:r>
-            <a:endParaRPr lang="ko-KR" sz="2200" dirty="0"/>
-          </a:p>
-        </p:txBody>
-      </p:sp>
-      <p:sp>
-        <p:nvSpPr>
-          <p:cNvPr id="54" name="S13-label446"/>
-          <p:cNvSpPr txBox="1"/>
-          <p:nvPr/>
-        </p:nvSpPr>
-        <p:spPr>
-          <a:xfrm>
-            <a:off x="7778509" y="3948840"/>
-            <a:ext cx="567944" cy="349250"/>
-          </a:xfrm>
-          <a:prstGeom prst="rect">
-            <a:avLst/>
-          </a:prstGeom>
-          <a:noFill/>
-          <a:ln/>
-        </p:spPr>
-        <p:txBody>
-          <a:bodyPr wrap="square" lIns="0" tIns="0" rIns="0" bIns="0" rtlCol="0" anchor="ctr"/>
-          <a:lstStyle/>
-          <a:p>
-            <a:pPr eaLnBrk="0" algn="ctr" indent="0" marL="0">
-              <a:buNone/>
-            </a:pPr>
-            <a:r>
-              <a:rPr lang="ko-KR" altLang="en-US" sz="2200" dirty="0">
-                <a:solidFill>
-                  <a:srgbClr val="1F2937"/>
-                </a:solidFill>
-                <a:latin typeface="맑은 고딕" pitchFamily="34" charset="0"/>
-                <a:ea typeface="맑은 고딕" pitchFamily="34" charset="-122"/>
-                <a:cs typeface="맑은 고딕" pitchFamily="34" charset="-120"/>
-              </a:rPr>
-              <a:t>1주</a:t>
-            </a:r>
-            <a:endParaRPr lang="ko-KR" sz="2200" dirty="0"/>
-          </a:p>
-        </p:txBody>
-      </p:sp>
-      <p:sp>
-        <p:nvSpPr>
-          <p:cNvPr id="55" name="S13-label448"/>
-          <p:cNvSpPr txBox="1"/>
-          <p:nvPr/>
-        </p:nvSpPr>
-        <p:spPr>
-          <a:xfrm>
-            <a:off x="8520159" y="3948840"/>
-            <a:ext cx="567944" cy="349250"/>
-          </a:xfrm>
-          <a:prstGeom prst="rect">
-            <a:avLst/>
-          </a:prstGeom>
-          <a:noFill/>
-          <a:ln/>
-        </p:spPr>
-        <p:txBody>
-          <a:bodyPr wrap="square" lIns="0" tIns="0" rIns="0" bIns="0" rtlCol="0" anchor="ctr"/>
-          <a:lstStyle/>
-          <a:p>
-            <a:pPr eaLnBrk="0" algn="ctr" indent="0" marL="0">
-              <a:buNone/>
-            </a:pPr>
-            <a:r>
-              <a:rPr lang="ko-KR" altLang="en-US" sz="2200" dirty="0">
-                <a:solidFill>
-                  <a:srgbClr val="1F2937"/>
-                </a:solidFill>
-                <a:latin typeface="맑은 고딕" pitchFamily="34" charset="0"/>
-                <a:ea typeface="맑은 고딕" pitchFamily="34" charset="-122"/>
-                <a:cs typeface="맑은 고딕" pitchFamily="34" charset="-120"/>
-              </a:rPr>
-              <a:t>2주</a:t>
-            </a:r>
-            <a:endParaRPr lang="ko-KR" sz="2200" dirty="0"/>
-          </a:p>
-        </p:txBody>
-      </p:sp>
-      <p:sp>
-        <p:nvSpPr>
-          <p:cNvPr id="56" name="S13-label450"/>
-          <p:cNvSpPr txBox="1"/>
-          <p:nvPr/>
-        </p:nvSpPr>
-        <p:spPr>
-          <a:xfrm>
-            <a:off x="9261809" y="3948840"/>
-            <a:ext cx="567944" cy="349250"/>
-          </a:xfrm>
-          <a:prstGeom prst="rect">
-            <a:avLst/>
-          </a:prstGeom>
-          <a:noFill/>
-          <a:ln/>
-        </p:spPr>
-        <p:txBody>
-          <a:bodyPr wrap="square" lIns="0" tIns="0" rIns="0" bIns="0" rtlCol="0" anchor="ctr"/>
-          <a:lstStyle/>
-          <a:p>
-            <a:pPr eaLnBrk="0" algn="ctr" indent="0" marL="0">
-              <a:buNone/>
-            </a:pPr>
-            <a:r>
-              <a:rPr lang="ko-KR" altLang="en-US" sz="2200" dirty="0">
-                <a:solidFill>
-                  <a:srgbClr val="1F2937"/>
-                </a:solidFill>
-                <a:latin typeface="맑은 고딕" pitchFamily="34" charset="0"/>
-                <a:ea typeface="맑은 고딕" pitchFamily="34" charset="-122"/>
-                <a:cs typeface="맑은 고딕" pitchFamily="34" charset="-120"/>
-              </a:rPr>
-              <a:t>3주</a:t>
-            </a:r>
-            <a:endParaRPr lang="ko-KR" sz="2200" dirty="0"/>
-          </a:p>
-        </p:txBody>
-      </p:sp>
-      <p:sp>
-        <p:nvSpPr>
-          <p:cNvPr id="57" name="S13-label452"/>
-          <p:cNvSpPr txBox="1"/>
-          <p:nvPr/>
-        </p:nvSpPr>
-        <p:spPr>
-          <a:xfrm>
-            <a:off x="10003459" y="3948840"/>
-            <a:ext cx="567944" cy="349250"/>
-          </a:xfrm>
-          <a:prstGeom prst="rect">
-            <a:avLst/>
-          </a:prstGeom>
-          <a:noFill/>
-          <a:ln/>
-        </p:spPr>
-        <p:txBody>
-          <a:bodyPr wrap="square" lIns="0" tIns="0" rIns="0" bIns="0" rtlCol="0" anchor="ctr"/>
-          <a:lstStyle/>
-          <a:p>
-            <a:pPr eaLnBrk="0" algn="ctr" indent="0" marL="0">
-              <a:buNone/>
-            </a:pPr>
-            <a:r>
-              <a:rPr lang="ko-KR" altLang="en-US" sz="2200" dirty="0">
-                <a:solidFill>
-                  <a:srgbClr val="1F2937"/>
-                </a:solidFill>
-                <a:latin typeface="맑은 고딕" pitchFamily="34" charset="0"/>
-                <a:ea typeface="맑은 고딕" pitchFamily="34" charset="-122"/>
-                <a:cs typeface="맑은 고딕" pitchFamily="34" charset="-120"/>
-              </a:rPr>
-              <a:t>4주</a:t>
-            </a:r>
-            <a:endParaRPr lang="ko-KR" sz="2200" dirty="0"/>
-          </a:p>
-        </p:txBody>
-      </p:sp>
-      <p:sp>
-        <p:nvSpPr>
-          <p:cNvPr id="58" name="S13-label453"/>
+          <p:cNvPr id="51" name="S13-label427"/>
           <p:cNvSpPr txBox="1"/>
           <p:nvPr/>
         </p:nvSpPr>
@@ -9419,20 +9166,20 @@
         </p:nvSpPr>
         <p:spPr>
           <a:xfrm>
-            <a:off x="548640" y="4696968"/>
-            <a:ext cx="5431536" cy="1520952"/>
+            <a:off x="548640" y="5349240"/>
+            <a:ext cx="11091672" cy="868680"/>
           </a:xfrm>
           <a:prstGeom prst="roundRect">
             <a:avLst>
-              <a:gd name="adj" fmla="val 7214"/>
+              <a:gd name="adj" fmla="val 12632"/>
             </a:avLst>
           </a:prstGeom>
           <a:solidFill>
-            <a:srgbClr val="EAF3F1"/>
+            <a:srgbClr val="FDEBDD"/>
           </a:solidFill>
           <a:ln w="12700">
             <a:solidFill>
-              <a:srgbClr val="EAF3F1"/>
+              <a:srgbClr val="FDEBDD"/>
             </a:solidFill>
             <a:prstDash val="solid"/>
           </a:ln>
@@ -9446,8 +9193,8 @@
         </p:nvSpPr>
         <p:spPr>
           <a:xfrm>
-            <a:off x="822960" y="4834128"/>
-            <a:ext cx="4882896" cy="1246632"/>
+            <a:off x="822960" y="5486400"/>
+            <a:ext cx="10543032" cy="594360"/>
           </a:xfrm>
           <a:prstGeom prst="rect">
             <a:avLst/>
@@ -9466,179 +9213,30 @@
               <a:buNone/>
             </a:pPr>
             <a:r>
-              <a:rPr lang="ko-KR" altLang="en-US" sz="2800" b="1" dirty="0">
-                <a:solidFill>
-                  <a:srgbClr val="1F2937"/>
-                </a:solidFill>
-                <a:latin typeface="맑은 고딕" pitchFamily="34" charset="0"/>
-                <a:ea typeface="맑은 고딕" pitchFamily="34" charset="-122"/>
-                <a:cs typeface="맑은 고딕" pitchFamily="34" charset="-120"/>
-              </a:rPr>
-              <a:t>막대그래프</a:t>
+              <a:rPr lang="ko-KR" altLang="en-US" sz="2800" dirty="0">
+                <a:solidFill>
+                  <a:srgbClr val="1F2937"/>
+                </a:solidFill>
+                <a:latin typeface="맑은 고딕" pitchFamily="34" charset="0"/>
+                <a:ea typeface="맑은 고딕" pitchFamily="34" charset="-122"/>
+                <a:cs typeface="맑은 고딕" pitchFamily="34" charset="-120"/>
+              </a:rPr>
+              <a:t>알고 싶은 것에 따라 알맞은 그래프가 달라요.</a:t>
             </a:r>
             <a:endParaRPr lang="ko-KR" sz="2800" dirty="0"/>
           </a:p>
-          <a:p>
-            <a:pPr eaLnBrk="0" indent="0" marL="0">
-              <a:spcAft>
-                <a:spcPts val="600"/>
-              </a:spcAft>
-              <a:buNone/>
-            </a:pPr>
-            <a:r>
-              <a:rPr lang="ko-KR" altLang="en-US" sz="2200" dirty="0">
-                <a:solidFill>
-                  <a:srgbClr val="1F2937"/>
-                </a:solidFill>
-                <a:latin typeface="맑은 고딕" pitchFamily="34" charset="0"/>
-                <a:ea typeface="맑은 고딕" pitchFamily="34" charset="-122"/>
-                <a:cs typeface="맑은 고딕" pitchFamily="34" charset="-120"/>
-              </a:rPr>
-              <a:t>몇 권인지, 어느 것이</a:t>
-            </a:r>
-            <a:endParaRPr lang="ko-KR" sz="2800" dirty="0"/>
-          </a:p>
-          <a:p>
-            <a:pPr eaLnBrk="0" indent="0" marL="0">
-              <a:spcAft>
-                <a:spcPts val="600"/>
-              </a:spcAft>
-              <a:buNone/>
-            </a:pPr>
-            <a:r>
-              <a:rPr lang="ko-KR" altLang="en-US" sz="2200" dirty="0">
-                <a:solidFill>
-                  <a:srgbClr val="1F2937"/>
-                </a:solidFill>
-                <a:latin typeface="맑은 고딕" pitchFamily="34" charset="0"/>
-                <a:ea typeface="맑은 고딕" pitchFamily="34" charset="-122"/>
-                <a:cs typeface="맑은 고딕" pitchFamily="34" charset="-120"/>
-              </a:rPr>
-              <a:t>더 많은지 비교해요.</a:t>
-            </a:r>
-            <a:endParaRPr lang="ko-KR" sz="2800" dirty="0"/>
-          </a:p>
-        </p:txBody>
-      </p:sp>
-      <p:sp>
-        <p:nvSpPr>
-          <p:cNvPr id="6" name="S03-card47"/>
-          <p:cNvSpPr/>
-          <p:nvPr/>
-        </p:nvSpPr>
-        <p:spPr>
-          <a:xfrm>
-            <a:off x="6208776" y="4696968"/>
-            <a:ext cx="5431536" cy="1520952"/>
-          </a:xfrm>
-          <a:prstGeom prst="roundRect">
-            <a:avLst>
-              <a:gd name="adj" fmla="val 7214"/>
-            </a:avLst>
-          </a:prstGeom>
-          <a:solidFill>
-            <a:srgbClr val="EAF3F1"/>
-          </a:solidFill>
-          <a:ln w="12700">
-            <a:solidFill>
-              <a:srgbClr val="EAF3F1"/>
-            </a:solidFill>
-            <a:prstDash val="solid"/>
-          </a:ln>
-        </p:spPr>
-      </p:sp>
-      <p:sp>
-        <p:nvSpPr>
-          <p:cNvPr id="7" name="S03-cardtext48"/>
-          <p:cNvSpPr txBox="1"/>
-          <p:nvPr/>
-        </p:nvSpPr>
-        <p:spPr>
-          <a:xfrm>
-            <a:off x="6483096" y="4834128"/>
-            <a:ext cx="4882896" cy="1246632"/>
-          </a:xfrm>
-          <a:prstGeom prst="rect">
-            <a:avLst/>
-          </a:prstGeom>
-          <a:noFill/>
-          <a:ln/>
-        </p:spPr>
-        <p:txBody>
-          <a:bodyPr wrap="square" lIns="0" tIns="0" rIns="0" bIns="0" rtlCol="0" anchor="ctr"/>
-          <a:lstStyle/>
-          <a:p>
-            <a:pPr eaLnBrk="0" indent="0" marL="0">
-              <a:spcAft>
-                <a:spcPts val="600"/>
-              </a:spcAft>
-              <a:buNone/>
-            </a:pPr>
-            <a:r>
-              <a:rPr lang="ko-KR" altLang="en-US" sz="2800" b="1" dirty="0">
-                <a:solidFill>
-                  <a:srgbClr val="1F2937"/>
-                </a:solidFill>
-                <a:latin typeface="맑은 고딕" pitchFamily="34" charset="0"/>
-                <a:ea typeface="맑은 고딕" pitchFamily="34" charset="-122"/>
-                <a:cs typeface="맑은 고딕" pitchFamily="34" charset="-120"/>
-              </a:rPr>
-              <a:t>띠그래프</a:t>
-            </a:r>
-            <a:endParaRPr lang="ko-KR" sz="2800" dirty="0"/>
-          </a:p>
-          <a:p>
-            <a:pPr eaLnBrk="0" indent="0" marL="0">
-              <a:spcAft>
-                <a:spcPts val="600"/>
-              </a:spcAft>
-              <a:buNone/>
-            </a:pPr>
-            <a:r>
-              <a:rPr lang="ko-KR" altLang="en-US" sz="2200" dirty="0">
-                <a:solidFill>
-                  <a:srgbClr val="1F2937"/>
-                </a:solidFill>
-                <a:latin typeface="맑은 고딕" pitchFamily="34" charset="0"/>
-                <a:ea typeface="맑은 고딕" pitchFamily="34" charset="-122"/>
-                <a:cs typeface="맑은 고딕" pitchFamily="34" charset="-120"/>
-              </a:rPr>
-              <a:t>전체의 몇 %인지</a:t>
-            </a:r>
-            <a:endParaRPr lang="ko-KR" sz="2800" dirty="0"/>
-          </a:p>
-          <a:p>
-            <a:pPr eaLnBrk="0" indent="0" marL="0">
-              <a:spcAft>
-                <a:spcPts val="600"/>
-              </a:spcAft>
-              <a:buNone/>
-            </a:pPr>
-            <a:r>
-              <a:rPr lang="ko-KR" altLang="en-US" sz="2200" dirty="0">
-                <a:solidFill>
-                  <a:srgbClr val="1F2937"/>
-                </a:solidFill>
-                <a:latin typeface="맑은 고딕" pitchFamily="34" charset="0"/>
-                <a:ea typeface="맑은 고딕" pitchFamily="34" charset="-122"/>
-                <a:cs typeface="맑은 고딕" pitchFamily="34" charset="-120"/>
-              </a:rPr>
-              <a:t>한눈에 보여요.</a:t>
-            </a:r>
-            <a:endParaRPr lang="ko-KR" sz="2800" dirty="0"/>
-          </a:p>
-        </p:txBody>
-      </p:sp>
-      <p:sp>
-        <p:nvSpPr>
-          <p:cNvPr id="8" name="S03-figure49" descr="막대그래프(세로 눈금 한 칸 1권): 동화 7권, 과학 6권, 역사 4권, 만화 3권"/>
-          <p:cNvSpPr/>
-          <p:nvPr/>
-        </p:nvSpPr>
-        <p:spPr>
-          <a:xfrm>
-            <a:off x="2726886" y="2517787"/>
-            <a:ext cx="211143" cy="1231669"/>
+        </p:txBody>
+      </p:sp>
+      <p:sp>
+        <p:nvSpPr>
+          <p:cNvPr id="6" name="S03-figure47" descr="막대그래프(세로 눈금 한 칸 1권): 동화 7권, 과학 5권, 역사 4권, 만화 4권"/>
+          <p:cNvSpPr/>
+          <p:nvPr/>
+        </p:nvSpPr>
+        <p:spPr>
+          <a:xfrm>
+            <a:off x="1711376" y="2925826"/>
+            <a:ext cx="569366" cy="1162456"/>
           </a:xfrm>
           <a:custGeom>
             <a:avLst/>
@@ -9647,15 +9245,15 @@
             <a:cxnLst/>
             <a:rect l="l" t="t" r="r" b="b"/>
             <a:pathLst>
-              <a:path w="211143" h="1231669">
+              <a:path w="569366" h="1162456">
                 <a:moveTo>
-                  <a:pt x="0" y="1231669"/>
+                  <a:pt x="0" y="1162456"/>
                 </a:moveTo>
                 <a:lnTo>
-                  <a:pt x="211143" y="1231669"/>
-                </a:lnTo>
-                <a:lnTo>
-                  <a:pt x="211143" y="0"/>
+                  <a:pt x="569366" y="1162456"/>
+                </a:lnTo>
+                <a:lnTo>
+                  <a:pt x="569366" y="0"/>
                 </a:lnTo>
                 <a:lnTo>
                   <a:pt x="0" y="0"/>
@@ -9677,14 +9275,14 @@
       </p:sp>
       <p:sp>
         <p:nvSpPr>
-          <p:cNvPr id="9" name="S03-mark50"/>
-          <p:cNvSpPr/>
-          <p:nvPr/>
-        </p:nvSpPr>
-        <p:spPr>
-          <a:xfrm>
-            <a:off x="3078792" y="2693739"/>
-            <a:ext cx="211143" cy="1055716"/>
+          <p:cNvPr id="7" name="S03-mark48"/>
+          <p:cNvSpPr/>
+          <p:nvPr/>
+        </p:nvSpPr>
+        <p:spPr>
+          <a:xfrm>
+            <a:off x="2755214" y="3257956"/>
+            <a:ext cx="569366" cy="830326"/>
           </a:xfrm>
           <a:custGeom>
             <a:avLst/>
@@ -9693,15 +9291,15 @@
             <a:cxnLst/>
             <a:rect l="l" t="t" r="r" b="b"/>
             <a:pathLst>
-              <a:path w="211143" h="1055716">
+              <a:path w="569366" h="830326">
                 <a:moveTo>
-                  <a:pt x="0" y="1055716"/>
+                  <a:pt x="0" y="830326"/>
                 </a:moveTo>
                 <a:lnTo>
-                  <a:pt x="211143" y="1055716"/>
-                </a:lnTo>
-                <a:lnTo>
-                  <a:pt x="211143" y="0"/>
+                  <a:pt x="569366" y="830326"/>
+                </a:lnTo>
+                <a:lnTo>
+                  <a:pt x="569366" y="0"/>
                 </a:lnTo>
                 <a:lnTo>
                   <a:pt x="0" y="0"/>
@@ -9723,14 +9321,14 @@
       </p:sp>
       <p:sp>
         <p:nvSpPr>
-          <p:cNvPr id="10" name="S03-mark51"/>
-          <p:cNvSpPr/>
-          <p:nvPr/>
-        </p:nvSpPr>
-        <p:spPr>
-          <a:xfrm>
-            <a:off x="3430697" y="3045645"/>
-            <a:ext cx="211143" cy="703811"/>
+          <p:cNvPr id="8" name="S03-mark49"/>
+          <p:cNvSpPr/>
+          <p:nvPr/>
+        </p:nvSpPr>
+        <p:spPr>
+          <a:xfrm>
+            <a:off x="3799053" y="3424022"/>
+            <a:ext cx="569366" cy="664261"/>
           </a:xfrm>
           <a:custGeom>
             <a:avLst/>
@@ -9739,15 +9337,15 @@
             <a:cxnLst/>
             <a:rect l="l" t="t" r="r" b="b"/>
             <a:pathLst>
-              <a:path w="211143" h="703811">
+              <a:path w="569366" h="664261">
                 <a:moveTo>
-                  <a:pt x="0" y="703811"/>
+                  <a:pt x="0" y="664261"/>
                 </a:moveTo>
                 <a:lnTo>
-                  <a:pt x="211143" y="703811"/>
-                </a:lnTo>
-                <a:lnTo>
-                  <a:pt x="211143" y="0"/>
+                  <a:pt x="569366" y="664261"/>
+                </a:lnTo>
+                <a:lnTo>
+                  <a:pt x="569366" y="0"/>
                 </a:lnTo>
                 <a:lnTo>
                   <a:pt x="0" y="0"/>
@@ -9769,14 +9367,14 @@
       </p:sp>
       <p:sp>
         <p:nvSpPr>
-          <p:cNvPr id="11" name="S03-mark52"/>
-          <p:cNvSpPr/>
-          <p:nvPr/>
-        </p:nvSpPr>
-        <p:spPr>
-          <a:xfrm>
-            <a:off x="3782603" y="3221597"/>
-            <a:ext cx="211143" cy="527858"/>
+          <p:cNvPr id="9" name="S03-mark50"/>
+          <p:cNvSpPr/>
+          <p:nvPr/>
+        </p:nvSpPr>
+        <p:spPr>
+          <a:xfrm>
+            <a:off x="4842891" y="3424022"/>
+            <a:ext cx="569366" cy="664261"/>
           </a:xfrm>
           <a:custGeom>
             <a:avLst/>
@@ -9785,15 +9383,15 @@
             <a:cxnLst/>
             <a:rect l="l" t="t" r="r" b="b"/>
             <a:pathLst>
-              <a:path w="211143" h="527858">
+              <a:path w="569366" h="664261">
                 <a:moveTo>
-                  <a:pt x="0" y="527858"/>
+                  <a:pt x="0" y="664261"/>
                 </a:moveTo>
                 <a:lnTo>
-                  <a:pt x="211143" y="527858"/>
-                </a:lnTo>
-                <a:lnTo>
-                  <a:pt x="211143" y="0"/>
+                  <a:pt x="569366" y="664261"/>
+                </a:lnTo>
+                <a:lnTo>
+                  <a:pt x="569366" y="0"/>
                 </a:lnTo>
                 <a:lnTo>
                   <a:pt x="0" y="0"/>
@@ -9815,14 +9413,60 @@
       </p:sp>
       <p:sp>
         <p:nvSpPr>
+          <p:cNvPr id="10" name="S03-mark51"/>
+          <p:cNvSpPr/>
+          <p:nvPr/>
+        </p:nvSpPr>
+        <p:spPr>
+          <a:xfrm>
+            <a:off x="1331798" y="3922217"/>
+            <a:ext cx="4460037" cy="0"/>
+          </a:xfrm>
+          <a:prstGeom prst="line">
+            <a:avLst/>
+          </a:prstGeom>
+          <a:noFill/>
+          <a:ln w="9525">
+            <a:solidFill>
+              <a:srgbClr val="B8C2CC"/>
+            </a:solidFill>
+            <a:prstDash val="solid"/>
+          </a:ln>
+        </p:spPr>
+      </p:sp>
+      <p:sp>
+        <p:nvSpPr>
+          <p:cNvPr id="11" name="S03-mark52"/>
+          <p:cNvSpPr/>
+          <p:nvPr/>
+        </p:nvSpPr>
+        <p:spPr>
+          <a:xfrm>
+            <a:off x="1331798" y="3756152"/>
+            <a:ext cx="4460037" cy="0"/>
+          </a:xfrm>
+          <a:prstGeom prst="line">
+            <a:avLst/>
+          </a:prstGeom>
+          <a:noFill/>
+          <a:ln w="9525">
+            <a:solidFill>
+              <a:srgbClr val="B8C2CC"/>
+            </a:solidFill>
+            <a:prstDash val="solid"/>
+          </a:ln>
+        </p:spPr>
+      </p:sp>
+      <p:sp>
+        <p:nvSpPr>
           <p:cNvPr id="12" name="S03-mark53"/>
           <p:cNvSpPr/>
           <p:nvPr/>
         </p:nvSpPr>
         <p:spPr>
           <a:xfrm>
-            <a:off x="2603719" y="3573503"/>
-            <a:ext cx="1513193" cy="0"/>
+            <a:off x="1331798" y="3590087"/>
+            <a:ext cx="4460037" cy="0"/>
           </a:xfrm>
           <a:prstGeom prst="line">
             <a:avLst/>
@@ -9844,8 +9488,8 @@
         </p:nvSpPr>
         <p:spPr>
           <a:xfrm>
-            <a:off x="2603719" y="3397550"/>
-            <a:ext cx="1513193" cy="0"/>
+            <a:off x="1331798" y="3424022"/>
+            <a:ext cx="4460037" cy="0"/>
           </a:xfrm>
           <a:prstGeom prst="line">
             <a:avLst/>
@@ -9867,8 +9511,8 @@
         </p:nvSpPr>
         <p:spPr>
           <a:xfrm>
-            <a:off x="2603719" y="3221597"/>
-            <a:ext cx="1513193" cy="0"/>
+            <a:off x="1331798" y="3257956"/>
+            <a:ext cx="4460037" cy="0"/>
           </a:xfrm>
           <a:prstGeom prst="line">
             <a:avLst/>
@@ -9890,8 +9534,8 @@
         </p:nvSpPr>
         <p:spPr>
           <a:xfrm>
-            <a:off x="2603719" y="3045645"/>
-            <a:ext cx="1513193" cy="0"/>
+            <a:off x="1331798" y="3091891"/>
+            <a:ext cx="4460037" cy="0"/>
           </a:xfrm>
           <a:prstGeom prst="line">
             <a:avLst/>
@@ -9913,8 +9557,8 @@
         </p:nvSpPr>
         <p:spPr>
           <a:xfrm>
-            <a:off x="2603719" y="2869692"/>
-            <a:ext cx="1513193" cy="0"/>
+            <a:off x="1331798" y="2925826"/>
+            <a:ext cx="4460037" cy="0"/>
           </a:xfrm>
           <a:prstGeom prst="line">
             <a:avLst/>
@@ -9936,8 +9580,8 @@
         </p:nvSpPr>
         <p:spPr>
           <a:xfrm>
-            <a:off x="2603719" y="2693739"/>
-            <a:ext cx="1513193" cy="0"/>
+            <a:off x="1331798" y="2759761"/>
+            <a:ext cx="4460037" cy="0"/>
           </a:xfrm>
           <a:prstGeom prst="line">
             <a:avLst/>
@@ -9959,16 +9603,16 @@
         </p:nvSpPr>
         <p:spPr>
           <a:xfrm>
-            <a:off x="2603719" y="2517787"/>
-            <a:ext cx="1513193" cy="0"/>
+            <a:off x="1331798" y="4088282"/>
+            <a:ext cx="4460037" cy="0"/>
           </a:xfrm>
           <a:prstGeom prst="line">
             <a:avLst/>
           </a:prstGeom>
           <a:noFill/>
-          <a:ln w="9525">
-            <a:solidFill>
-              <a:srgbClr val="B8C2CC"/>
+          <a:ln w="19050">
+            <a:solidFill>
+              <a:srgbClr val="1F2937"/>
             </a:solidFill>
             <a:prstDash val="solid"/>
           </a:ln>
@@ -9981,17 +9625,17 @@
           <p:nvPr/>
         </p:nvSpPr>
         <p:spPr>
-          <a:xfrm>
-            <a:off x="2603719" y="2341834"/>
-            <a:ext cx="1513193" cy="0"/>
+          <a:xfrm flipV="1">
+            <a:off x="1331798" y="2569972"/>
+            <a:ext cx="0" cy="1518310"/>
           </a:xfrm>
           <a:prstGeom prst="line">
             <a:avLst/>
           </a:prstGeom>
           <a:noFill/>
-          <a:ln w="9525">
-            <a:solidFill>
-              <a:srgbClr val="B8C2CC"/>
+          <a:ln w="19050">
+            <a:solidFill>
+              <a:srgbClr val="1F2937"/>
             </a:solidFill>
             <a:prstDash val="solid"/>
           </a:ln>
@@ -9999,59 +9643,13 @@
       </p:sp>
       <p:sp>
         <p:nvSpPr>
-          <p:cNvPr id="20" name="S03-mark61"/>
-          <p:cNvSpPr/>
-          <p:nvPr/>
-        </p:nvSpPr>
-        <p:spPr>
-          <a:xfrm>
-            <a:off x="2603719" y="3749456"/>
-            <a:ext cx="1513193" cy="0"/>
-          </a:xfrm>
-          <a:prstGeom prst="line">
-            <a:avLst/>
-          </a:prstGeom>
-          <a:noFill/>
-          <a:ln w="19050">
-            <a:solidFill>
-              <a:srgbClr val="1F2937"/>
-            </a:solidFill>
-            <a:prstDash val="solid"/>
-          </a:ln>
-        </p:spPr>
-      </p:sp>
-      <p:sp>
-        <p:nvSpPr>
-          <p:cNvPr id="21" name="S03-mark62"/>
-          <p:cNvSpPr/>
-          <p:nvPr/>
-        </p:nvSpPr>
-        <p:spPr>
-          <a:xfrm flipV="1">
-            <a:off x="2603719" y="2271453"/>
-            <a:ext cx="0" cy="1478003"/>
-          </a:xfrm>
-          <a:prstGeom prst="line">
-            <a:avLst/>
-          </a:prstGeom>
-          <a:noFill/>
-          <a:ln w="19050">
-            <a:solidFill>
-              <a:srgbClr val="1F2937"/>
-            </a:solidFill>
-            <a:prstDash val="solid"/>
-          </a:ln>
-        </p:spPr>
-      </p:sp>
-      <p:sp>
-        <p:nvSpPr>
-          <p:cNvPr id="22" name="S03-label64"/>
+          <p:cNvPr id="20" name="S03-label62"/>
           <p:cNvSpPr txBox="1"/>
           <p:nvPr/>
         </p:nvSpPr>
         <p:spPr>
           <a:xfrm>
-            <a:off x="2307094" y="3574831"/>
+            <a:off x="781431" y="3913657"/>
             <a:ext cx="294132" cy="349250"/>
           </a:xfrm>
           <a:prstGeom prst="rect">
@@ -10084,13 +9682,13 @@
       </p:sp>
       <p:sp>
         <p:nvSpPr>
-          <p:cNvPr id="23" name="S03-label66"/>
+          <p:cNvPr id="21" name="S03-label64"/>
           <p:cNvSpPr txBox="1"/>
           <p:nvPr/>
         </p:nvSpPr>
         <p:spPr>
           <a:xfrm>
-            <a:off x="2307094" y="3222925"/>
+            <a:off x="781431" y="3581527"/>
             <a:ext cx="294132" cy="349250"/>
           </a:xfrm>
           <a:prstGeom prst="rect">
@@ -10123,13 +9721,13 @@
       </p:sp>
       <p:sp>
         <p:nvSpPr>
-          <p:cNvPr id="24" name="S03-label68"/>
+          <p:cNvPr id="22" name="S03-label66"/>
           <p:cNvSpPr txBox="1"/>
           <p:nvPr/>
         </p:nvSpPr>
         <p:spPr>
           <a:xfrm>
-            <a:off x="2307094" y="2871020"/>
+            <a:off x="781431" y="3249397"/>
             <a:ext cx="294132" cy="349250"/>
           </a:xfrm>
           <a:prstGeom prst="rect">
@@ -10162,13 +9760,13 @@
       </p:sp>
       <p:sp>
         <p:nvSpPr>
-          <p:cNvPr id="25" name="S03-label70"/>
+          <p:cNvPr id="23" name="S03-label68"/>
           <p:cNvSpPr txBox="1"/>
           <p:nvPr/>
         </p:nvSpPr>
         <p:spPr>
           <a:xfrm>
-            <a:off x="2307094" y="2519114"/>
+            <a:off x="781431" y="2917266"/>
             <a:ext cx="294132" cy="349250"/>
           </a:xfrm>
           <a:prstGeom prst="rect">
@@ -10201,13 +9799,13 @@
       </p:sp>
       <p:sp>
         <p:nvSpPr>
-          <p:cNvPr id="26" name="S03-label72"/>
+          <p:cNvPr id="24" name="S03-label70"/>
           <p:cNvSpPr txBox="1"/>
           <p:nvPr/>
         </p:nvSpPr>
         <p:spPr>
           <a:xfrm>
-            <a:off x="2307094" y="2167209"/>
+            <a:off x="781431" y="2585136"/>
             <a:ext cx="294132" cy="349250"/>
           </a:xfrm>
           <a:prstGeom prst="rect">
@@ -10240,13 +9838,13 @@
       </p:sp>
       <p:sp>
         <p:nvSpPr>
-          <p:cNvPr id="27" name="S03-label74"/>
+          <p:cNvPr id="25" name="S03-label72"/>
           <p:cNvSpPr txBox="1"/>
           <p:nvPr/>
         </p:nvSpPr>
         <p:spPr>
           <a:xfrm>
-            <a:off x="2094750" y="1991256"/>
+            <a:off x="569087" y="2110664"/>
             <a:ext cx="718820" cy="349250"/>
           </a:xfrm>
           <a:prstGeom prst="rect">
@@ -10279,13 +9877,13 @@
       </p:sp>
       <p:sp>
         <p:nvSpPr>
-          <p:cNvPr id="28" name="S03-label76"/>
+          <p:cNvPr id="26" name="S03-label74"/>
           <p:cNvSpPr txBox="1"/>
           <p:nvPr/>
         </p:nvSpPr>
         <p:spPr>
           <a:xfrm>
-            <a:off x="2503782" y="3689200"/>
+            <a:off x="1667383" y="4222064"/>
             <a:ext cx="657352" cy="349250"/>
           </a:xfrm>
           <a:prstGeom prst="rect">
@@ -10318,13 +9916,13 @@
       </p:sp>
       <p:sp>
         <p:nvSpPr>
-          <p:cNvPr id="29" name="S03-label78"/>
+          <p:cNvPr id="27" name="S03-label76"/>
           <p:cNvSpPr txBox="1"/>
           <p:nvPr/>
         </p:nvSpPr>
         <p:spPr>
           <a:xfrm>
-            <a:off x="2855687" y="3689200"/>
+            <a:off x="2711221" y="4222064"/>
             <a:ext cx="657352" cy="349250"/>
           </a:xfrm>
           <a:prstGeom prst="rect">
@@ -10357,13 +9955,13 @@
       </p:sp>
       <p:sp>
         <p:nvSpPr>
-          <p:cNvPr id="30" name="S03-label80"/>
+          <p:cNvPr id="28" name="S03-label78"/>
           <p:cNvSpPr txBox="1"/>
           <p:nvPr/>
         </p:nvSpPr>
         <p:spPr>
           <a:xfrm>
-            <a:off x="3207593" y="3689200"/>
+            <a:off x="3755060" y="4222064"/>
             <a:ext cx="657352" cy="349250"/>
           </a:xfrm>
           <a:prstGeom prst="rect">
@@ -10396,13 +9994,13 @@
       </p:sp>
       <p:sp>
         <p:nvSpPr>
-          <p:cNvPr id="31" name="S03-label82"/>
+          <p:cNvPr id="29" name="S03-label80"/>
           <p:cNvSpPr txBox="1"/>
           <p:nvPr/>
         </p:nvSpPr>
         <p:spPr>
           <a:xfrm>
-            <a:off x="3559498" y="3689200"/>
+            <a:off x="4798898" y="4222064"/>
             <a:ext cx="657352" cy="349250"/>
           </a:xfrm>
           <a:prstGeom prst="rect">
@@ -10435,13 +10033,13 @@
       </p:sp>
       <p:sp>
         <p:nvSpPr>
-          <p:cNvPr id="32" name="S03-label83"/>
+          <p:cNvPr id="30" name="S03-label81"/>
           <p:cNvSpPr txBox="1"/>
           <p:nvPr/>
         </p:nvSpPr>
         <p:spPr>
           <a:xfrm>
-            <a:off x="548640" y="4091178"/>
+            <a:off x="548640" y="4743450"/>
             <a:ext cx="5385816" cy="377190"/>
           </a:xfrm>
           <a:prstGeom prst="rect">
@@ -10466,7 +10064,7 @@
                 <a:ea typeface="맑은 고딕" pitchFamily="34" charset="-122"/>
                 <a:cs typeface="맑은 고딕" pitchFamily="34" charset="-120"/>
               </a:rPr>
-              <a:t>막대그래프</a:t>
+              <a:t>막대그래프: 몇 권인지 비교</a:t>
             </a:r>
             <a:endParaRPr lang="ko-KR" sz="2200" dirty="0"/>
           </a:p>
@@ -10474,13 +10072,13 @@
       </p:sp>
       <p:sp>
         <p:nvSpPr>
-          <p:cNvPr id="33" name="S03-figure84" descr="같은 자료의 띠그래프: 동화 35 %, 과학 30 %, 역사 20 %, 만화 15 %"/>
-          <p:cNvSpPr/>
-          <p:nvPr/>
-        </p:nvSpPr>
-        <p:spPr>
-          <a:xfrm>
-            <a:off x="6338316" y="2452019"/>
+          <p:cNvPr id="31" name="S03-figure82" descr="같은 자료의 띠그래프: 동화 35 %, 과학 25 %, 역사 20 %, 만화 20 %"/>
+          <p:cNvSpPr/>
+          <p:nvPr/>
+        </p:nvSpPr>
+        <p:spPr>
+          <a:xfrm>
+            <a:off x="6338316" y="2778155"/>
             <a:ext cx="1595076" cy="820325"/>
           </a:xfrm>
           <a:custGeom>
@@ -10520,14 +10118,14 @@
       </p:sp>
       <p:sp>
         <p:nvSpPr>
-          <p:cNvPr id="34" name="S03-mark85"/>
-          <p:cNvSpPr/>
-          <p:nvPr/>
-        </p:nvSpPr>
-        <p:spPr>
-          <a:xfrm>
-            <a:off x="7933392" y="2452019"/>
-            <a:ext cx="1367208" cy="820325"/>
+          <p:cNvPr id="32" name="S03-mark83"/>
+          <p:cNvSpPr/>
+          <p:nvPr/>
+        </p:nvSpPr>
+        <p:spPr>
+          <a:xfrm>
+            <a:off x="7933392" y="2778155"/>
+            <a:ext cx="1139340" cy="820325"/>
           </a:xfrm>
           <a:custGeom>
             <a:avLst/>
@@ -10536,15 +10134,15 @@
             <a:cxnLst/>
             <a:rect l="l" t="t" r="r" b="b"/>
             <a:pathLst>
-              <a:path w="1367208" h="820325">
+              <a:path w="1139340" h="820325">
                 <a:moveTo>
                   <a:pt x="0" y="820325"/>
                 </a:moveTo>
                 <a:lnTo>
-                  <a:pt x="1367208" y="820325"/>
-                </a:lnTo>
-                <a:lnTo>
-                  <a:pt x="1367208" y="0"/>
+                  <a:pt x="1139340" y="820325"/>
+                </a:lnTo>
+                <a:lnTo>
+                  <a:pt x="1139340" y="0"/>
                 </a:lnTo>
                 <a:lnTo>
                   <a:pt x="0" y="0"/>
@@ -10566,13 +10164,13 @@
       </p:sp>
       <p:sp>
         <p:nvSpPr>
-          <p:cNvPr id="35" name="S03-mark86"/>
-          <p:cNvSpPr/>
-          <p:nvPr/>
-        </p:nvSpPr>
-        <p:spPr>
-          <a:xfrm>
-            <a:off x="9300599" y="2452019"/>
+          <p:cNvPr id="33" name="S03-mark84"/>
+          <p:cNvSpPr/>
+          <p:nvPr/>
+        </p:nvSpPr>
+        <p:spPr>
+          <a:xfrm>
+            <a:off x="9072731" y="2778155"/>
             <a:ext cx="911472" cy="820325"/>
           </a:xfrm>
           <a:custGeom>
@@ -10612,14 +10210,14 @@
       </p:sp>
       <p:sp>
         <p:nvSpPr>
-          <p:cNvPr id="36" name="S03-mark87"/>
-          <p:cNvSpPr/>
-          <p:nvPr/>
-        </p:nvSpPr>
-        <p:spPr>
-          <a:xfrm>
-            <a:off x="10212071" y="2452019"/>
-            <a:ext cx="683604" cy="820325"/>
+          <p:cNvPr id="34" name="S03-mark85"/>
+          <p:cNvSpPr/>
+          <p:nvPr/>
+        </p:nvSpPr>
+        <p:spPr>
+          <a:xfrm>
+            <a:off x="9984203" y="2778155"/>
+            <a:ext cx="911472" cy="820325"/>
           </a:xfrm>
           <a:custGeom>
             <a:avLst/>
@@ -10628,15 +10226,15 @@
             <a:cxnLst/>
             <a:rect l="l" t="t" r="r" b="b"/>
             <a:pathLst>
-              <a:path w="683604" h="820325">
+              <a:path w="911472" h="820325">
                 <a:moveTo>
                   <a:pt x="0" y="820325"/>
                 </a:moveTo>
                 <a:lnTo>
-                  <a:pt x="683604" y="820325"/>
-                </a:lnTo>
-                <a:lnTo>
-                  <a:pt x="683604" y="0"/>
+                  <a:pt x="911472" y="820325"/>
+                </a:lnTo>
+                <a:lnTo>
+                  <a:pt x="911472" y="0"/>
                 </a:lnTo>
                 <a:lnTo>
                   <a:pt x="0" y="0"/>
@@ -10658,14 +10256,60 @@
       </p:sp>
       <p:sp>
         <p:nvSpPr>
+          <p:cNvPr id="35" name="S03-mark86"/>
+          <p:cNvSpPr/>
+          <p:nvPr/>
+        </p:nvSpPr>
+        <p:spPr>
+          <a:xfrm>
+            <a:off x="6338316" y="3653168"/>
+            <a:ext cx="4557359" cy="0"/>
+          </a:xfrm>
+          <a:prstGeom prst="line">
+            <a:avLst/>
+          </a:prstGeom>
+          <a:noFill/>
+          <a:ln w="12700">
+            <a:solidFill>
+              <a:srgbClr val="B8C2CC"/>
+            </a:solidFill>
+            <a:prstDash val="solid"/>
+          </a:ln>
+        </p:spPr>
+      </p:sp>
+      <p:sp>
+        <p:nvSpPr>
+          <p:cNvPr id="36" name="S03-mark87"/>
+          <p:cNvSpPr/>
+          <p:nvPr/>
+        </p:nvSpPr>
+        <p:spPr>
+          <a:xfrm>
+            <a:off x="6338316" y="3653168"/>
+            <a:ext cx="0" cy="100262"/>
+          </a:xfrm>
+          <a:prstGeom prst="line">
+            <a:avLst/>
+          </a:prstGeom>
+          <a:noFill/>
+          <a:ln w="12700">
+            <a:solidFill>
+              <a:srgbClr val="B8C2CC"/>
+            </a:solidFill>
+            <a:prstDash val="solid"/>
+          </a:ln>
+        </p:spPr>
+      </p:sp>
+      <p:sp>
+        <p:nvSpPr>
           <p:cNvPr id="37" name="S03-mark88"/>
           <p:cNvSpPr/>
           <p:nvPr/>
         </p:nvSpPr>
         <p:spPr>
           <a:xfrm>
-            <a:off x="6338316" y="3327032"/>
-            <a:ext cx="4557359" cy="0"/>
+            <a:off x="6566184" y="3653168"/>
+            <a:ext cx="0" cy="54688"/>
           </a:xfrm>
           <a:prstGeom prst="line">
             <a:avLst/>
@@ -10687,7 +10331,7 @@
         </p:nvSpPr>
         <p:spPr>
           <a:xfrm>
-            <a:off x="6338316" y="3327032"/>
+            <a:off x="6794052" y="3653168"/>
             <a:ext cx="0" cy="100262"/>
           </a:xfrm>
           <a:prstGeom prst="line">
@@ -10710,7 +10354,7 @@
         </p:nvSpPr>
         <p:spPr>
           <a:xfrm>
-            <a:off x="6566184" y="3327032"/>
+            <a:off x="7021920" y="3653168"/>
             <a:ext cx="0" cy="54688"/>
           </a:xfrm>
           <a:prstGeom prst="line">
@@ -10733,7 +10377,7 @@
         </p:nvSpPr>
         <p:spPr>
           <a:xfrm>
-            <a:off x="6794052" y="3327032"/>
+            <a:off x="7249788" y="3653168"/>
             <a:ext cx="0" cy="100262"/>
           </a:xfrm>
           <a:prstGeom prst="line">
@@ -10756,7 +10400,7 @@
         </p:nvSpPr>
         <p:spPr>
           <a:xfrm>
-            <a:off x="7021920" y="3327032"/>
+            <a:off x="7477656" y="3653168"/>
             <a:ext cx="0" cy="54688"/>
           </a:xfrm>
           <a:prstGeom prst="line">
@@ -10779,7 +10423,7 @@
         </p:nvSpPr>
         <p:spPr>
           <a:xfrm>
-            <a:off x="7249788" y="3327032"/>
+            <a:off x="7705524" y="3653168"/>
             <a:ext cx="0" cy="100262"/>
           </a:xfrm>
           <a:prstGeom prst="line">
@@ -10802,7 +10446,7 @@
         </p:nvSpPr>
         <p:spPr>
           <a:xfrm>
-            <a:off x="7477656" y="3327032"/>
+            <a:off x="7933392" y="3653168"/>
             <a:ext cx="0" cy="54688"/>
           </a:xfrm>
           <a:prstGeom prst="line">
@@ -10825,7 +10469,7 @@
         </p:nvSpPr>
         <p:spPr>
           <a:xfrm>
-            <a:off x="7705524" y="3327032"/>
+            <a:off x="8161260" y="3653168"/>
             <a:ext cx="0" cy="100262"/>
           </a:xfrm>
           <a:prstGeom prst="line">
@@ -10848,7 +10492,7 @@
         </p:nvSpPr>
         <p:spPr>
           <a:xfrm>
-            <a:off x="7933392" y="3327032"/>
+            <a:off x="8389128" y="3653168"/>
             <a:ext cx="0" cy="54688"/>
           </a:xfrm>
           <a:prstGeom prst="line">
@@ -10871,7 +10515,7 @@
         </p:nvSpPr>
         <p:spPr>
           <a:xfrm>
-            <a:off x="8161260" y="3327032"/>
+            <a:off x="8616995" y="3653168"/>
             <a:ext cx="0" cy="100262"/>
           </a:xfrm>
           <a:prstGeom prst="line">
@@ -10894,7 +10538,7 @@
         </p:nvSpPr>
         <p:spPr>
           <a:xfrm>
-            <a:off x="8389128" y="3327032"/>
+            <a:off x="8844863" y="3653168"/>
             <a:ext cx="0" cy="54688"/>
           </a:xfrm>
           <a:prstGeom prst="line">
@@ -10917,7 +10561,7 @@
         </p:nvSpPr>
         <p:spPr>
           <a:xfrm>
-            <a:off x="8616995" y="3327032"/>
+            <a:off x="9072731" y="3653168"/>
             <a:ext cx="0" cy="100262"/>
           </a:xfrm>
           <a:prstGeom prst="line">
@@ -10940,7 +10584,7 @@
         </p:nvSpPr>
         <p:spPr>
           <a:xfrm>
-            <a:off x="8844863" y="3327032"/>
+            <a:off x="9300599" y="3653168"/>
             <a:ext cx="0" cy="54688"/>
           </a:xfrm>
           <a:prstGeom prst="line">
@@ -10963,7 +10607,7 @@
         </p:nvSpPr>
         <p:spPr>
           <a:xfrm>
-            <a:off x="9072731" y="3327032"/>
+            <a:off x="9528467" y="3653168"/>
             <a:ext cx="0" cy="100262"/>
           </a:xfrm>
           <a:prstGeom prst="line">
@@ -10986,7 +10630,7 @@
         </p:nvSpPr>
         <p:spPr>
           <a:xfrm>
-            <a:off x="9300599" y="3327032"/>
+            <a:off x="9756335" y="3653168"/>
             <a:ext cx="0" cy="54688"/>
           </a:xfrm>
           <a:prstGeom prst="line">
@@ -11009,7 +10653,7 @@
         </p:nvSpPr>
         <p:spPr>
           <a:xfrm>
-            <a:off x="9528467" y="3327032"/>
+            <a:off x="9984203" y="3653168"/>
             <a:ext cx="0" cy="100262"/>
           </a:xfrm>
           <a:prstGeom prst="line">
@@ -11032,7 +10676,7 @@
         </p:nvSpPr>
         <p:spPr>
           <a:xfrm>
-            <a:off x="9756335" y="3327032"/>
+            <a:off x="10212071" y="3653168"/>
             <a:ext cx="0" cy="54688"/>
           </a:xfrm>
           <a:prstGeom prst="line">
@@ -11055,7 +10699,7 @@
         </p:nvSpPr>
         <p:spPr>
           <a:xfrm>
-            <a:off x="9984203" y="3327032"/>
+            <a:off x="10439939" y="3653168"/>
             <a:ext cx="0" cy="100262"/>
           </a:xfrm>
           <a:prstGeom prst="line">
@@ -11078,7 +10722,7 @@
         </p:nvSpPr>
         <p:spPr>
           <a:xfrm>
-            <a:off x="10212071" y="3327032"/>
+            <a:off x="10667807" y="3653168"/>
             <a:ext cx="0" cy="54688"/>
           </a:xfrm>
           <a:prstGeom prst="line">
@@ -11101,7 +10745,7 @@
         </p:nvSpPr>
         <p:spPr>
           <a:xfrm>
-            <a:off x="10439939" y="3327032"/>
+            <a:off x="10895675" y="3653168"/>
             <a:ext cx="0" cy="100262"/>
           </a:xfrm>
           <a:prstGeom prst="line">
@@ -11118,59 +10762,13 @@
       </p:sp>
       <p:sp>
         <p:nvSpPr>
-          <p:cNvPr id="57" name="S03-mark108"/>
-          <p:cNvSpPr/>
-          <p:nvPr/>
-        </p:nvSpPr>
-        <p:spPr>
-          <a:xfrm>
-            <a:off x="10667807" y="3327032"/>
-            <a:ext cx="0" cy="54688"/>
-          </a:xfrm>
-          <a:prstGeom prst="line">
-            <a:avLst/>
-          </a:prstGeom>
-          <a:noFill/>
-          <a:ln w="12700">
-            <a:solidFill>
-              <a:srgbClr val="B8C2CC"/>
-            </a:solidFill>
-            <a:prstDash val="solid"/>
-          </a:ln>
-        </p:spPr>
-      </p:sp>
-      <p:sp>
-        <p:nvSpPr>
-          <p:cNvPr id="58" name="S03-mark109"/>
-          <p:cNvSpPr/>
-          <p:nvPr/>
-        </p:nvSpPr>
-        <p:spPr>
-          <a:xfrm>
-            <a:off x="10895675" y="3327032"/>
-            <a:ext cx="0" cy="100262"/>
-          </a:xfrm>
-          <a:prstGeom prst="line">
-            <a:avLst/>
-          </a:prstGeom>
-          <a:noFill/>
-          <a:ln w="12700">
-            <a:solidFill>
-              <a:srgbClr val="B8C2CC"/>
-            </a:solidFill>
-            <a:prstDash val="solid"/>
-          </a:ln>
-        </p:spPr>
-      </p:sp>
-      <p:sp>
-        <p:nvSpPr>
-          <p:cNvPr id="59" name="S03-label111"/>
+          <p:cNvPr id="57" name="S03-label109"/>
           <p:cNvSpPr txBox="1"/>
           <p:nvPr/>
         </p:nvSpPr>
         <p:spPr>
           <a:xfrm>
-            <a:off x="6555718" y="2512931"/>
+            <a:off x="6555718" y="2839067"/>
             <a:ext cx="1160272" cy="698500"/>
           </a:xfrm>
           <a:prstGeom prst="rect">
@@ -11220,13 +10818,13 @@
       </p:sp>
       <p:sp>
         <p:nvSpPr>
-          <p:cNvPr id="60" name="S03-label113"/>
+          <p:cNvPr id="58" name="S03-label111"/>
           <p:cNvSpPr txBox="1"/>
           <p:nvPr/>
         </p:nvSpPr>
         <p:spPr>
           <a:xfrm>
-            <a:off x="8036859" y="2512931"/>
+            <a:off x="7922926" y="2839067"/>
             <a:ext cx="1160272" cy="698500"/>
           </a:xfrm>
           <a:prstGeom prst="rect">
@@ -11268,7 +10866,7 @@
                 <a:ea typeface="맑은 고딕" pitchFamily="34" charset="-122"/>
                 <a:cs typeface="맑은 고딕" pitchFamily="34" charset="-120"/>
               </a:rPr>
-              <a:t>30 %</a:t>
+              <a:t>25 %</a:t>
             </a:r>
             <a:endParaRPr lang="ko-KR" sz="2200" dirty="0"/>
           </a:p>
@@ -11276,13 +10874,13 @@
       </p:sp>
       <p:sp>
         <p:nvSpPr>
-          <p:cNvPr id="61" name="S03-label115"/>
+          <p:cNvPr id="59" name="S03-label113"/>
           <p:cNvSpPr txBox="1"/>
           <p:nvPr/>
         </p:nvSpPr>
         <p:spPr>
           <a:xfrm>
-            <a:off x="9176199" y="2512931"/>
+            <a:off x="8948331" y="2839067"/>
             <a:ext cx="1160272" cy="698500"/>
           </a:xfrm>
           <a:prstGeom prst="rect">
@@ -11332,13 +10930,13 @@
       </p:sp>
       <p:sp>
         <p:nvSpPr>
-          <p:cNvPr id="62" name="S03-label117"/>
+          <p:cNvPr id="60" name="S03-label115"/>
           <p:cNvSpPr txBox="1"/>
           <p:nvPr/>
         </p:nvSpPr>
         <p:spPr>
           <a:xfrm>
-            <a:off x="9973737" y="2512931"/>
+            <a:off x="9859803" y="2839067"/>
             <a:ext cx="1160272" cy="698500"/>
           </a:xfrm>
           <a:prstGeom prst="rect">
@@ -11380,7 +10978,7 @@
                 <a:ea typeface="맑은 고딕" pitchFamily="34" charset="-122"/>
                 <a:cs typeface="맑은 고딕" pitchFamily="34" charset="-120"/>
               </a:rPr>
-              <a:t>15 %</a:t>
+              <a:t>20 %</a:t>
             </a:r>
             <a:endParaRPr lang="ko-KR" sz="2200" dirty="0"/>
           </a:p>
@@ -11388,13 +10986,13 @@
       </p:sp>
       <p:sp>
         <p:nvSpPr>
-          <p:cNvPr id="63" name="S03-label119"/>
+          <p:cNvPr id="61" name="S03-label117"/>
           <p:cNvSpPr txBox="1"/>
           <p:nvPr/>
         </p:nvSpPr>
         <p:spPr>
           <a:xfrm>
-            <a:off x="6191250" y="3403062"/>
+            <a:off x="6191250" y="3729198"/>
             <a:ext cx="294132" cy="349250"/>
           </a:xfrm>
           <a:prstGeom prst="rect">
@@ -11427,13 +11025,13 @@
       </p:sp>
       <p:sp>
         <p:nvSpPr>
-          <p:cNvPr id="64" name="S03-label121"/>
+          <p:cNvPr id="62" name="S03-label119"/>
           <p:cNvSpPr txBox="1"/>
           <p:nvPr/>
         </p:nvSpPr>
         <p:spPr>
           <a:xfrm>
-            <a:off x="7010520" y="3403062"/>
+            <a:off x="7010520" y="3729198"/>
             <a:ext cx="478536" cy="349250"/>
           </a:xfrm>
           <a:prstGeom prst="rect">
@@ -11466,13 +11064,13 @@
       </p:sp>
       <p:sp>
         <p:nvSpPr>
-          <p:cNvPr id="65" name="S03-label123"/>
+          <p:cNvPr id="63" name="S03-label121"/>
           <p:cNvSpPr txBox="1"/>
           <p:nvPr/>
         </p:nvSpPr>
         <p:spPr>
           <a:xfrm>
-            <a:off x="7921992" y="3403062"/>
+            <a:off x="7921992" y="3729198"/>
             <a:ext cx="478536" cy="349250"/>
           </a:xfrm>
           <a:prstGeom prst="rect">
@@ -11505,13 +11103,13 @@
       </p:sp>
       <p:sp>
         <p:nvSpPr>
-          <p:cNvPr id="66" name="S03-label125"/>
+          <p:cNvPr id="64" name="S03-label123"/>
           <p:cNvSpPr txBox="1"/>
           <p:nvPr/>
         </p:nvSpPr>
         <p:spPr>
           <a:xfrm>
-            <a:off x="8833463" y="3403062"/>
+            <a:off x="8833463" y="3729198"/>
             <a:ext cx="478536" cy="349250"/>
           </a:xfrm>
           <a:prstGeom prst="rect">
@@ -11544,13 +11142,13 @@
       </p:sp>
       <p:sp>
         <p:nvSpPr>
-          <p:cNvPr id="67" name="S03-label127"/>
+          <p:cNvPr id="65" name="S03-label125"/>
           <p:cNvSpPr txBox="1"/>
           <p:nvPr/>
         </p:nvSpPr>
         <p:spPr>
           <a:xfrm>
-            <a:off x="9744935" y="3403062"/>
+            <a:off x="9744935" y="3729198"/>
             <a:ext cx="478536" cy="349250"/>
           </a:xfrm>
           <a:prstGeom prst="rect">
@@ -11583,13 +11181,13 @@
       </p:sp>
       <p:sp>
         <p:nvSpPr>
-          <p:cNvPr id="68" name="S03-label129"/>
+          <p:cNvPr id="66" name="S03-label127"/>
           <p:cNvSpPr txBox="1"/>
           <p:nvPr/>
         </p:nvSpPr>
         <p:spPr>
           <a:xfrm>
-            <a:off x="10564205" y="3403062"/>
+            <a:off x="10564205" y="3729198"/>
             <a:ext cx="662940" cy="349250"/>
           </a:xfrm>
           <a:prstGeom prst="rect">
@@ -11622,14 +11220,14 @@
       </p:sp>
       <p:sp>
         <p:nvSpPr>
-          <p:cNvPr id="69" name="S03-label131"/>
+          <p:cNvPr id="67" name="S03-label129"/>
           <p:cNvSpPr txBox="1"/>
           <p:nvPr/>
         </p:nvSpPr>
         <p:spPr>
           <a:xfrm>
-            <a:off x="11070233" y="3403062"/>
-            <a:ext cx="562356" cy="349250"/>
+            <a:off x="10975237" y="3729198"/>
+            <a:ext cx="752348" cy="349250"/>
           </a:xfrm>
           <a:prstGeom prst="rect">
             <a:avLst/>
@@ -11661,13 +11259,13 @@
       </p:sp>
       <p:sp>
         <p:nvSpPr>
-          <p:cNvPr id="70" name="S03-label132"/>
+          <p:cNvPr id="68" name="S03-label130"/>
           <p:cNvSpPr txBox="1"/>
           <p:nvPr/>
         </p:nvSpPr>
         <p:spPr>
           <a:xfrm>
-            <a:off x="6254496" y="4091178"/>
+            <a:off x="6254496" y="4743450"/>
             <a:ext cx="5385816" cy="377190"/>
           </a:xfrm>
           <a:prstGeom prst="rect">
@@ -11692,7 +11290,7 @@
                 <a:ea typeface="맑은 고딕" pitchFamily="34" charset="-122"/>
                 <a:cs typeface="맑은 고딕" pitchFamily="34" charset="-120"/>
               </a:rPr>
-              <a:t>띠그래프</a:t>
+              <a:t>띠그래프: 전체의 몇 %인지</a:t>
             </a:r>
             <a:endParaRPr lang="ko-KR" sz="2200" dirty="0"/>
           </a:p>
@@ -11814,7 +11412,7 @@
       </p:sp>
       <p:sp>
         <p:nvSpPr>
-          <p:cNvPr id="3" name="S04-card133"/>
+          <p:cNvPr id="3" name="S04-card131"/>
           <p:cNvSpPr/>
           <p:nvPr/>
         </p:nvSpPr>
@@ -11841,7 +11439,7 @@
       </p:sp>
       <p:sp>
         <p:nvSpPr>
-          <p:cNvPr id="4" name="S04-cardtext134"/>
+          <p:cNvPr id="4" name="S04-cardtext132"/>
           <p:cNvSpPr txBox="1"/>
           <p:nvPr/>
         </p:nvSpPr>
@@ -11923,7 +11521,7 @@
       </p:sp>
       <p:sp>
         <p:nvSpPr>
-          <p:cNvPr id="5" name="S04-card135"/>
+          <p:cNvPr id="5" name="S04-card133"/>
           <p:cNvSpPr/>
           <p:nvPr/>
         </p:nvSpPr>
@@ -11950,7 +11548,7 @@
       </p:sp>
       <p:sp>
         <p:nvSpPr>
-          <p:cNvPr id="6" name="S04-cardtext136"/>
+          <p:cNvPr id="6" name="S04-cardtext134"/>
           <p:cNvSpPr txBox="1"/>
           <p:nvPr/>
         </p:nvSpPr>
@@ -12032,7 +11630,7 @@
       </p:sp>
       <p:sp>
         <p:nvSpPr>
-          <p:cNvPr id="7" name="S04-card137"/>
+          <p:cNvPr id="7" name="S04-card135"/>
           <p:cNvSpPr/>
           <p:nvPr/>
         </p:nvSpPr>
@@ -12059,7 +11657,7 @@
       </p:sp>
       <p:sp>
         <p:nvSpPr>
-          <p:cNvPr id="8" name="S04-cardtext138"/>
+          <p:cNvPr id="8" name="S04-cardtext136"/>
           <p:cNvSpPr txBox="1"/>
           <p:nvPr/>
         </p:nvSpPr>
@@ -12141,7 +11739,7 @@
       </p:sp>
       <p:sp>
         <p:nvSpPr>
-          <p:cNvPr id="9" name="S04-card139"/>
+          <p:cNvPr id="9" name="S04-card137"/>
           <p:cNvSpPr/>
           <p:nvPr/>
         </p:nvSpPr>
@@ -12168,7 +11766,7 @@
       </p:sp>
       <p:sp>
         <p:nvSpPr>
-          <p:cNvPr id="10" name="S04-cardtext140"/>
+          <p:cNvPr id="10" name="S04-cardtext138"/>
           <p:cNvSpPr txBox="1"/>
           <p:nvPr/>
         </p:nvSpPr>
@@ -12250,7 +11848,7 @@
       </p:sp>
       <p:sp>
         <p:nvSpPr>
-          <p:cNvPr id="11" name="S04-card141"/>
+          <p:cNvPr id="11" name="S04-card139"/>
           <p:cNvSpPr/>
           <p:nvPr/>
         </p:nvSpPr>
@@ -12277,7 +11875,7 @@
       </p:sp>
       <p:sp>
         <p:nvSpPr>
-          <p:cNvPr id="12" name="S04-cardtext142"/>
+          <p:cNvPr id="12" name="S04-cardtext140"/>
           <p:cNvSpPr txBox="1"/>
           <p:nvPr/>
         </p:nvSpPr>
@@ -12359,7 +11957,7 @@
       </p:sp>
       <p:sp>
         <p:nvSpPr>
-          <p:cNvPr id="13" name="S04-card143"/>
+          <p:cNvPr id="13" name="S04-card141"/>
           <p:cNvSpPr/>
           <p:nvPr/>
         </p:nvSpPr>
@@ -12386,7 +11984,7 @@
       </p:sp>
       <p:sp>
         <p:nvSpPr>
-          <p:cNvPr id="14" name="S04-cardtext144"/>
+          <p:cNvPr id="14" name="S04-cardtext142"/>
           <p:cNvSpPr txBox="1"/>
           <p:nvPr/>
         </p:nvSpPr>
@@ -12582,7 +12180,7 @@
       </p:sp>
       <p:sp>
         <p:nvSpPr>
-          <p:cNvPr id="3" name="S05-text145"/>
+          <p:cNvPr id="3" name="S05-text143"/>
           <p:cNvSpPr txBox="1"/>
           <p:nvPr/>
         </p:nvSpPr>
@@ -12621,7 +12219,7 @@
       </p:sp>
       <p:sp>
         <p:nvSpPr>
-          <p:cNvPr id="4" name="S05-card146"/>
+          <p:cNvPr id="4" name="S05-card144"/>
           <p:cNvSpPr/>
           <p:nvPr/>
         </p:nvSpPr>
@@ -12648,7 +12246,7 @@
       </p:sp>
       <p:sp>
         <p:nvSpPr>
-          <p:cNvPr id="5" name="S05-cardtext147"/>
+          <p:cNvPr id="5" name="S05-cardtext145"/>
           <p:cNvSpPr txBox="1"/>
           <p:nvPr/>
         </p:nvSpPr>
@@ -12690,7 +12288,7 @@
       </p:sp>
       <p:sp>
         <p:nvSpPr>
-          <p:cNvPr id="6" name="S05-chip148"/>
+          <p:cNvPr id="6" name="S05-chip146"/>
           <p:cNvSpPr txBox="1"/>
           <p:nvPr/>
         </p:nvSpPr>
@@ -12737,7 +12335,7 @@
       </p:sp>
       <p:sp>
         <p:nvSpPr>
-          <p:cNvPr id="7" name="S05-text149"/>
+          <p:cNvPr id="7" name="S05-text147"/>
           <p:cNvSpPr txBox="1"/>
           <p:nvPr/>
         </p:nvSpPr>
@@ -12793,7 +12391,7 @@
       </p:sp>
       <p:sp>
         <p:nvSpPr>
-          <p:cNvPr id="8" name="S05-chip150"/>
+          <p:cNvPr id="8" name="S05-chip148"/>
           <p:cNvSpPr txBox="1"/>
           <p:nvPr/>
         </p:nvSpPr>
@@ -12840,7 +12438,7 @@
       </p:sp>
       <p:sp>
         <p:nvSpPr>
-          <p:cNvPr id="9" name="S05-text151"/>
+          <p:cNvPr id="9" name="S05-text149"/>
           <p:cNvSpPr txBox="1"/>
           <p:nvPr/>
         </p:nvSpPr>
@@ -12896,7 +12494,7 @@
       </p:sp>
       <p:sp>
         <p:nvSpPr>
-          <p:cNvPr id="10" name="S05-chip152"/>
+          <p:cNvPr id="10" name="S05-chip150"/>
           <p:cNvSpPr txBox="1"/>
           <p:nvPr/>
         </p:nvSpPr>
@@ -12943,7 +12541,7 @@
       </p:sp>
       <p:sp>
         <p:nvSpPr>
-          <p:cNvPr id="11" name="S05-text153"/>
+          <p:cNvPr id="11" name="S05-text151"/>
           <p:cNvSpPr txBox="1"/>
           <p:nvPr/>
         </p:nvSpPr>
@@ -12999,7 +12597,7 @@
       </p:sp>
       <p:sp>
         <p:nvSpPr>
-          <p:cNvPr id="12" name="S05-chip154"/>
+          <p:cNvPr id="12" name="S05-chip152"/>
           <p:cNvSpPr txBox="1"/>
           <p:nvPr/>
         </p:nvSpPr>
@@ -13046,7 +12644,7 @@
       </p:sp>
       <p:sp>
         <p:nvSpPr>
-          <p:cNvPr id="13" name="S05-text155"/>
+          <p:cNvPr id="13" name="S05-text153"/>
           <p:cNvSpPr txBox="1"/>
           <p:nvPr/>
         </p:nvSpPr>
@@ -13216,7 +12814,7 @@
       </p:sp>
       <p:sp>
         <p:nvSpPr>
-          <p:cNvPr id="3" name="S06-card156"/>
+          <p:cNvPr id="3" name="S06-card154"/>
           <p:cNvSpPr/>
           <p:nvPr/>
         </p:nvSpPr>
@@ -13243,7 +12841,7 @@
       </p:sp>
       <p:sp>
         <p:nvSpPr>
-          <p:cNvPr id="4" name="S06-cardtext157"/>
+          <p:cNvPr id="4" name="S06-cardtext155"/>
           <p:cNvSpPr txBox="1"/>
           <p:nvPr/>
         </p:nvSpPr>
@@ -13285,7 +12883,7 @@
       </p:sp>
       <p:sp>
         <p:nvSpPr>
-          <p:cNvPr id="5" name="S06-card158"/>
+          <p:cNvPr id="5" name="S06-card156"/>
           <p:cNvSpPr/>
           <p:nvPr/>
         </p:nvSpPr>
@@ -13312,7 +12910,7 @@
       </p:sp>
       <p:sp>
         <p:nvSpPr>
-          <p:cNvPr id="6" name="S06-cardtext159"/>
+          <p:cNvPr id="6" name="S06-cardtext157"/>
           <p:cNvSpPr txBox="1"/>
           <p:nvPr/>
         </p:nvSpPr>
@@ -13354,7 +12952,7 @@
       </p:sp>
       <p:sp>
         <p:nvSpPr>
-          <p:cNvPr id="7" name="S06-chip160"/>
+          <p:cNvPr id="7" name="S06-chip158"/>
           <p:cNvSpPr txBox="1"/>
           <p:nvPr/>
         </p:nvSpPr>
@@ -13401,14 +12999,14 @@
       </p:sp>
       <p:sp>
         <p:nvSpPr>
-          <p:cNvPr id="8" name="S06-figure161" descr="좋아하는 과일별 학생 수를 꺾은선으로 이은 그래프: 사과 6, 배 3, 귤 7, 포도 4"/>
-          <p:cNvSpPr/>
-          <p:nvPr/>
-        </p:nvSpPr>
-        <p:spPr>
-          <a:xfrm>
-            <a:off x="2830013" y="3651511"/>
-            <a:ext cx="1032528" cy="688352"/>
+          <p:cNvPr id="8" name="S06-figure159" descr="좋아하는 과일별 학생 수를 꺾은선으로 이은 그래프: 사과 6, 배 3, 귤 7, 포도 4"/>
+          <p:cNvSpPr/>
+          <p:nvPr/>
+        </p:nvSpPr>
+        <p:spPr>
+          <a:xfrm>
+            <a:off x="2394615" y="3811416"/>
+            <a:ext cx="2100692" cy="509259"/>
           </a:xfrm>
           <a:custGeom>
             <a:avLst/>
@@ -13417,18 +13015,18 @@
             <a:cxnLst/>
             <a:rect l="l" t="t" r="r" b="b"/>
             <a:pathLst>
-              <a:path w="1032528" h="688352">
+              <a:path w="2100692" h="509259">
                 <a:moveTo>
-                  <a:pt x="0" y="172088"/>
+                  <a:pt x="0" y="127315"/>
                 </a:moveTo>
                 <a:lnTo>
-                  <a:pt x="344176" y="688352"/>
-                </a:lnTo>
-                <a:lnTo>
-                  <a:pt x="688352" y="0"/>
-                </a:lnTo>
-                <a:lnTo>
-                  <a:pt x="1032528" y="516264"/>
+                  <a:pt x="700231" y="509259"/>
+                </a:lnTo>
+                <a:lnTo>
+                  <a:pt x="1400462" y="0"/>
+                </a:lnTo>
+                <a:lnTo>
+                  <a:pt x="2100692" y="381944"/>
                 </a:lnTo>
               </a:path>
             </a:pathLst>
@@ -13444,14 +13042,14 @@
       </p:sp>
       <p:sp>
         <p:nvSpPr>
-          <p:cNvPr id="9" name="S06-mark162"/>
+          <p:cNvPr id="9" name="S06-mark160"/>
           <p:cNvSpPr/>
           <p:nvPr/>
         </p:nvSpPr>
         <p:spPr>
           <a:xfrm flipV="1">
-            <a:off x="2830013" y="3479423"/>
-            <a:ext cx="0" cy="1376704"/>
+            <a:off x="2394615" y="3684101"/>
+            <a:ext cx="0" cy="1018518"/>
           </a:xfrm>
           <a:prstGeom prst="line">
             <a:avLst/>
@@ -13467,14 +13065,14 @@
       </p:sp>
       <p:sp>
         <p:nvSpPr>
-          <p:cNvPr id="10" name="S06-mark163"/>
+          <p:cNvPr id="10" name="S06-mark161"/>
           <p:cNvSpPr/>
           <p:nvPr/>
         </p:nvSpPr>
         <p:spPr>
           <a:xfrm flipV="1">
-            <a:off x="3174189" y="3479423"/>
-            <a:ext cx="0" cy="1376704"/>
+            <a:off x="3094846" y="3684101"/>
+            <a:ext cx="0" cy="1018518"/>
           </a:xfrm>
           <a:prstGeom prst="line">
             <a:avLst/>
@@ -13490,14 +13088,14 @@
       </p:sp>
       <p:sp>
         <p:nvSpPr>
-          <p:cNvPr id="11" name="S06-mark164"/>
+          <p:cNvPr id="11" name="S06-mark162"/>
           <p:cNvSpPr/>
           <p:nvPr/>
         </p:nvSpPr>
         <p:spPr>
           <a:xfrm flipV="1">
-            <a:off x="3518365" y="3479423"/>
-            <a:ext cx="0" cy="1376704"/>
+            <a:off x="3795077" y="3684101"/>
+            <a:ext cx="0" cy="1018518"/>
           </a:xfrm>
           <a:prstGeom prst="line">
             <a:avLst/>
@@ -13513,14 +13111,14 @@
       </p:sp>
       <p:sp>
         <p:nvSpPr>
-          <p:cNvPr id="12" name="S06-mark165"/>
+          <p:cNvPr id="12" name="S06-mark163"/>
           <p:cNvSpPr/>
           <p:nvPr/>
         </p:nvSpPr>
         <p:spPr>
           <a:xfrm flipV="1">
-            <a:off x="3862542" y="3479423"/>
-            <a:ext cx="0" cy="1376704"/>
+            <a:off x="4495308" y="3684101"/>
+            <a:ext cx="0" cy="1018518"/>
           </a:xfrm>
           <a:prstGeom prst="line">
             <a:avLst/>
@@ -13536,14 +13134,14 @@
       </p:sp>
       <p:sp>
         <p:nvSpPr>
-          <p:cNvPr id="13" name="S06-mark166"/>
-          <p:cNvSpPr/>
-          <p:nvPr/>
-        </p:nvSpPr>
-        <p:spPr>
-          <a:xfrm>
-            <a:off x="2606299" y="4684040"/>
-            <a:ext cx="1479957" cy="0"/>
+          <p:cNvPr id="13" name="S06-mark164"/>
+          <p:cNvSpPr/>
+          <p:nvPr/>
+        </p:nvSpPr>
+        <p:spPr>
+          <a:xfrm>
+            <a:off x="1949014" y="4575304"/>
+            <a:ext cx="2991895" cy="0"/>
           </a:xfrm>
           <a:prstGeom prst="line">
             <a:avLst/>
@@ -13559,14 +13157,14 @@
       </p:sp>
       <p:sp>
         <p:nvSpPr>
-          <p:cNvPr id="14" name="S06-mark167"/>
-          <p:cNvSpPr/>
-          <p:nvPr/>
-        </p:nvSpPr>
-        <p:spPr>
-          <a:xfrm>
-            <a:off x="2606299" y="4511951"/>
-            <a:ext cx="1479957" cy="0"/>
+          <p:cNvPr id="14" name="S06-mark165"/>
+          <p:cNvSpPr/>
+          <p:nvPr/>
+        </p:nvSpPr>
+        <p:spPr>
+          <a:xfrm>
+            <a:off x="1949014" y="4447990"/>
+            <a:ext cx="2991895" cy="0"/>
           </a:xfrm>
           <a:prstGeom prst="line">
             <a:avLst/>
@@ -13582,14 +13180,14 @@
       </p:sp>
       <p:sp>
         <p:nvSpPr>
-          <p:cNvPr id="15" name="S06-mark168"/>
-          <p:cNvSpPr/>
-          <p:nvPr/>
-        </p:nvSpPr>
-        <p:spPr>
-          <a:xfrm>
-            <a:off x="2606299" y="4339863"/>
-            <a:ext cx="1479957" cy="0"/>
+          <p:cNvPr id="15" name="S06-mark166"/>
+          <p:cNvSpPr/>
+          <p:nvPr/>
+        </p:nvSpPr>
+        <p:spPr>
+          <a:xfrm>
+            <a:off x="1949014" y="4320675"/>
+            <a:ext cx="2991895" cy="0"/>
           </a:xfrm>
           <a:prstGeom prst="line">
             <a:avLst/>
@@ -13605,14 +13203,14 @@
       </p:sp>
       <p:sp>
         <p:nvSpPr>
-          <p:cNvPr id="16" name="S06-mark169"/>
-          <p:cNvSpPr/>
-          <p:nvPr/>
-        </p:nvSpPr>
-        <p:spPr>
-          <a:xfrm>
-            <a:off x="2606299" y="4167775"/>
-            <a:ext cx="1479957" cy="0"/>
+          <p:cNvPr id="16" name="S06-mark167"/>
+          <p:cNvSpPr/>
+          <p:nvPr/>
+        </p:nvSpPr>
+        <p:spPr>
+          <a:xfrm>
+            <a:off x="1949014" y="4193360"/>
+            <a:ext cx="2991895" cy="0"/>
           </a:xfrm>
           <a:prstGeom prst="line">
             <a:avLst/>
@@ -13628,14 +13226,14 @@
       </p:sp>
       <p:sp>
         <p:nvSpPr>
-          <p:cNvPr id="17" name="S06-mark170"/>
-          <p:cNvSpPr/>
-          <p:nvPr/>
-        </p:nvSpPr>
-        <p:spPr>
-          <a:xfrm>
-            <a:off x="2606299" y="3995687"/>
-            <a:ext cx="1479957" cy="0"/>
+          <p:cNvPr id="17" name="S06-mark168"/>
+          <p:cNvSpPr/>
+          <p:nvPr/>
+        </p:nvSpPr>
+        <p:spPr>
+          <a:xfrm>
+            <a:off x="1949014" y="4066045"/>
+            <a:ext cx="2991895" cy="0"/>
           </a:xfrm>
           <a:prstGeom prst="line">
             <a:avLst/>
@@ -13651,14 +13249,14 @@
       </p:sp>
       <p:sp>
         <p:nvSpPr>
-          <p:cNvPr id="18" name="S06-mark171"/>
-          <p:cNvSpPr/>
-          <p:nvPr/>
-        </p:nvSpPr>
-        <p:spPr>
-          <a:xfrm>
-            <a:off x="2606299" y="3823599"/>
-            <a:ext cx="1479957" cy="0"/>
+          <p:cNvPr id="18" name="S06-mark169"/>
+          <p:cNvSpPr/>
+          <p:nvPr/>
+        </p:nvSpPr>
+        <p:spPr>
+          <a:xfrm>
+            <a:off x="1949014" y="3938731"/>
+            <a:ext cx="2991895" cy="0"/>
           </a:xfrm>
           <a:prstGeom prst="line">
             <a:avLst/>
@@ -13674,14 +13272,14 @@
       </p:sp>
       <p:sp>
         <p:nvSpPr>
-          <p:cNvPr id="19" name="S06-mark172"/>
-          <p:cNvSpPr/>
-          <p:nvPr/>
-        </p:nvSpPr>
-        <p:spPr>
-          <a:xfrm>
-            <a:off x="2606299" y="3651511"/>
-            <a:ext cx="1479957" cy="0"/>
+          <p:cNvPr id="19" name="S06-mark170"/>
+          <p:cNvSpPr/>
+          <p:nvPr/>
+        </p:nvSpPr>
+        <p:spPr>
+          <a:xfrm>
+            <a:off x="1949014" y="3811416"/>
+            <a:ext cx="2991895" cy="0"/>
           </a:xfrm>
           <a:prstGeom prst="line">
             <a:avLst/>
@@ -13697,14 +13295,14 @@
       </p:sp>
       <p:sp>
         <p:nvSpPr>
-          <p:cNvPr id="20" name="S06-mark173"/>
-          <p:cNvSpPr/>
-          <p:nvPr/>
-        </p:nvSpPr>
-        <p:spPr>
-          <a:xfrm>
-            <a:off x="2606299" y="3479423"/>
-            <a:ext cx="1479957" cy="0"/>
+          <p:cNvPr id="20" name="S06-mark171"/>
+          <p:cNvSpPr/>
+          <p:nvPr/>
+        </p:nvSpPr>
+        <p:spPr>
+          <a:xfrm>
+            <a:off x="1949014" y="3684101"/>
+            <a:ext cx="2991895" cy="0"/>
           </a:xfrm>
           <a:prstGeom prst="line">
             <a:avLst/>
@@ -13720,14 +13318,14 @@
       </p:sp>
       <p:sp>
         <p:nvSpPr>
-          <p:cNvPr id="21" name="S06-mark174"/>
-          <p:cNvSpPr/>
-          <p:nvPr/>
-        </p:nvSpPr>
-        <p:spPr>
-          <a:xfrm>
-            <a:off x="2606299" y="4856128"/>
-            <a:ext cx="1479957" cy="0"/>
+          <p:cNvPr id="21" name="S06-mark172"/>
+          <p:cNvSpPr/>
+          <p:nvPr/>
+        </p:nvSpPr>
+        <p:spPr>
+          <a:xfrm>
+            <a:off x="1949014" y="4702619"/>
+            <a:ext cx="2991895" cy="0"/>
           </a:xfrm>
           <a:prstGeom prst="line">
             <a:avLst/>
@@ -13743,14 +13341,14 @@
       </p:sp>
       <p:sp>
         <p:nvSpPr>
-          <p:cNvPr id="22" name="S06-mark175"/>
+          <p:cNvPr id="22" name="S06-mark173"/>
           <p:cNvSpPr/>
           <p:nvPr/>
         </p:nvSpPr>
         <p:spPr>
           <a:xfrm flipV="1">
-            <a:off x="2606299" y="3410588"/>
-            <a:ext cx="0" cy="1445540"/>
+            <a:off x="1949014" y="3556787"/>
+            <a:ext cx="0" cy="1145832"/>
           </a:xfrm>
           <a:prstGeom prst="line">
             <a:avLst/>
@@ -13766,13 +13364,13 @@
       </p:sp>
       <p:sp>
         <p:nvSpPr>
-          <p:cNvPr id="23" name="S06-mark176"/>
-          <p:cNvSpPr/>
-          <p:nvPr/>
-        </p:nvSpPr>
-        <p:spPr>
-          <a:xfrm>
-            <a:off x="2770577" y="3764163"/>
+          <p:cNvPr id="23" name="S06-mark174"/>
+          <p:cNvSpPr/>
+          <p:nvPr/>
+        </p:nvSpPr>
+        <p:spPr>
+          <a:xfrm>
+            <a:off x="2335179" y="3879295"/>
             <a:ext cx="118872" cy="118872"/>
           </a:xfrm>
           <a:prstGeom prst="ellipse">
@@ -13791,13 +13389,13 @@
       </p:sp>
       <p:sp>
         <p:nvSpPr>
-          <p:cNvPr id="24" name="S06-mark177"/>
-          <p:cNvSpPr/>
-          <p:nvPr/>
-        </p:nvSpPr>
-        <p:spPr>
-          <a:xfrm>
-            <a:off x="3114753" y="4280427"/>
+          <p:cNvPr id="24" name="S06-mark175"/>
+          <p:cNvSpPr/>
+          <p:nvPr/>
+        </p:nvSpPr>
+        <p:spPr>
+          <a:xfrm>
+            <a:off x="3035410" y="4261239"/>
             <a:ext cx="118872" cy="118872"/>
           </a:xfrm>
           <a:prstGeom prst="ellipse">
@@ -13816,13 +13414,13 @@
       </p:sp>
       <p:sp>
         <p:nvSpPr>
-          <p:cNvPr id="25" name="S06-mark178"/>
-          <p:cNvSpPr/>
-          <p:nvPr/>
-        </p:nvSpPr>
-        <p:spPr>
-          <a:xfrm>
-            <a:off x="3458929" y="3592075"/>
+          <p:cNvPr id="25" name="S06-mark176"/>
+          <p:cNvSpPr/>
+          <p:nvPr/>
+        </p:nvSpPr>
+        <p:spPr>
+          <a:xfrm>
+            <a:off x="3735641" y="3751980"/>
             <a:ext cx="118872" cy="118872"/>
           </a:xfrm>
           <a:prstGeom prst="ellipse">
@@ -13841,13 +13439,13 @@
       </p:sp>
       <p:sp>
         <p:nvSpPr>
-          <p:cNvPr id="26" name="S06-mark179"/>
-          <p:cNvSpPr/>
-          <p:nvPr/>
-        </p:nvSpPr>
-        <p:spPr>
-          <a:xfrm>
-            <a:off x="3803106" y="4108339"/>
+          <p:cNvPr id="26" name="S06-mark177"/>
+          <p:cNvSpPr/>
+          <p:nvPr/>
+        </p:nvSpPr>
+        <p:spPr>
+          <a:xfrm>
+            <a:off x="4435872" y="4133924"/>
             <a:ext cx="118872" cy="118872"/>
           </a:xfrm>
           <a:prstGeom prst="ellipse">
@@ -13866,13 +13464,13 @@
       </p:sp>
       <p:sp>
         <p:nvSpPr>
-          <p:cNvPr id="27" name="S06-label181"/>
+          <p:cNvPr id="27" name="S06-label179"/>
           <p:cNvSpPr txBox="1"/>
           <p:nvPr/>
         </p:nvSpPr>
         <p:spPr>
           <a:xfrm>
-            <a:off x="2312958" y="4681503"/>
+            <a:off x="1531404" y="4527994"/>
             <a:ext cx="294132" cy="349250"/>
           </a:xfrm>
           <a:prstGeom prst="rect">
@@ -13905,13 +13503,13 @@
       </p:sp>
       <p:sp>
         <p:nvSpPr>
-          <p:cNvPr id="28" name="S06-label183"/>
+          <p:cNvPr id="28" name="S06-label181"/>
           <p:cNvSpPr txBox="1"/>
           <p:nvPr/>
         </p:nvSpPr>
         <p:spPr>
           <a:xfrm>
-            <a:off x="2312958" y="4681503"/>
+            <a:off x="1531404" y="4018735"/>
             <a:ext cx="294132" cy="349250"/>
           </a:xfrm>
           <a:prstGeom prst="rect">
@@ -13936,7 +13534,7 @@
                 <a:ea typeface="맑은 고딕" pitchFamily="34" charset="-122"/>
                 <a:cs typeface="맑은 고딕" pitchFamily="34" charset="-120"/>
               </a:rPr>
-              <a:t>0</a:t>
+              <a:t>4</a:t>
             </a:r>
             <a:endParaRPr lang="ko-KR" sz="2200" dirty="0"/>
           </a:p>
@@ -13944,13 +13542,13 @@
       </p:sp>
       <p:sp>
         <p:nvSpPr>
-          <p:cNvPr id="29" name="S06-label185"/>
+          <p:cNvPr id="29" name="S06-label183"/>
           <p:cNvSpPr txBox="1"/>
           <p:nvPr/>
         </p:nvSpPr>
         <p:spPr>
           <a:xfrm>
-            <a:off x="2312958" y="4337326"/>
+            <a:off x="1531404" y="3509476"/>
             <a:ext cx="294132" cy="349250"/>
           </a:xfrm>
           <a:prstGeom prst="rect">
@@ -13975,7 +13573,7 @@
                 <a:ea typeface="맑은 고딕" pitchFamily="34" charset="-122"/>
                 <a:cs typeface="맑은 고딕" pitchFamily="34" charset="-120"/>
               </a:rPr>
-              <a:t>2</a:t>
+              <a:t>8</a:t>
             </a:r>
             <a:endParaRPr lang="ko-KR" sz="2200" dirty="0"/>
           </a:p>
@@ -13983,14 +13581,14 @@
       </p:sp>
       <p:sp>
         <p:nvSpPr>
-          <p:cNvPr id="30" name="S06-label187"/>
+          <p:cNvPr id="30" name="S06-label185"/>
           <p:cNvSpPr txBox="1"/>
           <p:nvPr/>
         </p:nvSpPr>
         <p:spPr>
           <a:xfrm>
-            <a:off x="2312958" y="3993150"/>
-            <a:ext cx="294132" cy="349250"/>
+            <a:off x="1319060" y="3191190"/>
+            <a:ext cx="718820" cy="349250"/>
           </a:xfrm>
           <a:prstGeom prst="rect">
             <a:avLst/>
@@ -14014,7 +13612,7 @@
                 <a:ea typeface="맑은 고딕" pitchFamily="34" charset="-122"/>
                 <a:cs typeface="맑은 고딕" pitchFamily="34" charset="-120"/>
               </a:rPr>
-              <a:t>4</a:t>
+              <a:t>(명)</a:t>
             </a:r>
             <a:endParaRPr lang="ko-KR" sz="2200" dirty="0"/>
           </a:p>
@@ -14022,14 +13620,14 @@
       </p:sp>
       <p:sp>
         <p:nvSpPr>
-          <p:cNvPr id="31" name="S06-label189"/>
+          <p:cNvPr id="31" name="S06-label187"/>
           <p:cNvSpPr txBox="1"/>
           <p:nvPr/>
         </p:nvSpPr>
         <p:spPr>
           <a:xfrm>
-            <a:off x="2312958" y="3648974"/>
-            <a:ext cx="294132" cy="349250"/>
+            <a:off x="2065939" y="4734880"/>
+            <a:ext cx="657352" cy="349250"/>
           </a:xfrm>
           <a:prstGeom prst="rect">
             <a:avLst/>
@@ -14053,7 +13651,7 @@
                 <a:ea typeface="맑은 고딕" pitchFamily="34" charset="-122"/>
                 <a:cs typeface="맑은 고딕" pitchFamily="34" charset="-120"/>
               </a:rPr>
-              <a:t>6</a:t>
+              <a:t>사과</a:t>
             </a:r>
             <a:endParaRPr lang="ko-KR" sz="2200" dirty="0"/>
           </a:p>
@@ -14061,14 +13659,14 @@
       </p:sp>
       <p:sp>
         <p:nvSpPr>
-          <p:cNvPr id="32" name="S06-label191"/>
+          <p:cNvPr id="32" name="S06-label189"/>
           <p:cNvSpPr txBox="1"/>
           <p:nvPr/>
         </p:nvSpPr>
         <p:spPr>
           <a:xfrm>
-            <a:off x="2312958" y="3304798"/>
-            <a:ext cx="294132" cy="349250"/>
+            <a:off x="2903076" y="4734880"/>
+            <a:ext cx="383540" cy="349250"/>
           </a:xfrm>
           <a:prstGeom prst="rect">
             <a:avLst/>
@@ -14092,7 +13690,7 @@
                 <a:ea typeface="맑은 고딕" pitchFamily="34" charset="-122"/>
                 <a:cs typeface="맑은 고딕" pitchFamily="34" charset="-120"/>
               </a:rPr>
-              <a:t>8</a:t>
+              <a:t>배</a:t>
             </a:r>
             <a:endParaRPr lang="ko-KR" sz="2200" dirty="0"/>
           </a:p>
@@ -14100,14 +13698,14 @@
       </p:sp>
       <p:sp>
         <p:nvSpPr>
-          <p:cNvPr id="33" name="S06-label193"/>
+          <p:cNvPr id="33" name="S06-label191"/>
           <p:cNvSpPr txBox="1"/>
           <p:nvPr/>
         </p:nvSpPr>
         <p:spPr>
           <a:xfrm>
-            <a:off x="2100614" y="3132710"/>
-            <a:ext cx="718820" cy="349250"/>
+            <a:off x="3603307" y="4734880"/>
+            <a:ext cx="383540" cy="349250"/>
           </a:xfrm>
           <a:prstGeom prst="rect">
             <a:avLst/>
@@ -14131,7 +13729,7 @@
                 <a:ea typeface="맑은 고딕" pitchFamily="34" charset="-122"/>
                 <a:cs typeface="맑은 고딕" pitchFamily="34" charset="-120"/>
               </a:rPr>
-              <a:t>(명)</a:t>
+              <a:t>귤</a:t>
             </a:r>
             <a:endParaRPr lang="ko-KR" sz="2200" dirty="0"/>
           </a:p>
@@ -14139,13 +13737,13 @@
       </p:sp>
       <p:sp>
         <p:nvSpPr>
-          <p:cNvPr id="34" name="S06-label195"/>
+          <p:cNvPr id="34" name="S06-label193"/>
           <p:cNvSpPr txBox="1"/>
           <p:nvPr/>
         </p:nvSpPr>
         <p:spPr>
           <a:xfrm>
-            <a:off x="2501337" y="4793360"/>
+            <a:off x="4166632" y="4734880"/>
             <a:ext cx="657352" cy="349250"/>
           </a:xfrm>
           <a:prstGeom prst="rect">
@@ -14170,7 +13768,7 @@
                 <a:ea typeface="맑은 고딕" pitchFamily="34" charset="-122"/>
                 <a:cs typeface="맑은 고딕" pitchFamily="34" charset="-120"/>
               </a:rPr>
-              <a:t>사과</a:t>
+              <a:t>포도</a:t>
             </a:r>
             <a:endParaRPr lang="ko-KR" sz="2200" dirty="0"/>
           </a:p>
@@ -14178,124 +13776,7 @@
       </p:sp>
       <p:sp>
         <p:nvSpPr>
-          <p:cNvPr id="35" name="S06-label197"/>
-          <p:cNvSpPr txBox="1"/>
-          <p:nvPr/>
-        </p:nvSpPr>
-        <p:spPr>
-          <a:xfrm>
-            <a:off x="2982419" y="4793360"/>
-            <a:ext cx="383540" cy="349250"/>
-          </a:xfrm>
-          <a:prstGeom prst="rect">
-            <a:avLst/>
-          </a:prstGeom>
-          <a:noFill/>
-          <a:ln/>
-        </p:spPr>
-        <p:txBody>
-          <a:bodyPr wrap="square" lIns="0" tIns="0" rIns="0" bIns="0" rtlCol="0" anchor="ctr"/>
-          <a:lstStyle/>
-          <a:p>
-            <a:pPr eaLnBrk="0" algn="ctr" indent="0" marL="0">
-              <a:buNone/>
-            </a:pPr>
-            <a:r>
-              <a:rPr lang="ko-KR" altLang="en-US" sz="2200" dirty="0">
-                <a:solidFill>
-                  <a:srgbClr val="1F2937"/>
-                </a:solidFill>
-                <a:latin typeface="맑은 고딕" pitchFamily="34" charset="0"/>
-                <a:ea typeface="맑은 고딕" pitchFamily="34" charset="-122"/>
-                <a:cs typeface="맑은 고딕" pitchFamily="34" charset="-120"/>
-              </a:rPr>
-              <a:t>배</a:t>
-            </a:r>
-            <a:endParaRPr lang="ko-KR" sz="2200" dirty="0"/>
-          </a:p>
-        </p:txBody>
-      </p:sp>
-      <p:sp>
-        <p:nvSpPr>
-          <p:cNvPr id="36" name="S06-label199"/>
-          <p:cNvSpPr txBox="1"/>
-          <p:nvPr/>
-        </p:nvSpPr>
-        <p:spPr>
-          <a:xfrm>
-            <a:off x="3326595" y="4793360"/>
-            <a:ext cx="383540" cy="349250"/>
-          </a:xfrm>
-          <a:prstGeom prst="rect">
-            <a:avLst/>
-          </a:prstGeom>
-          <a:noFill/>
-          <a:ln/>
-        </p:spPr>
-        <p:txBody>
-          <a:bodyPr wrap="square" lIns="0" tIns="0" rIns="0" bIns="0" rtlCol="0" anchor="ctr"/>
-          <a:lstStyle/>
-          <a:p>
-            <a:pPr eaLnBrk="0" algn="ctr" indent="0" marL="0">
-              <a:buNone/>
-            </a:pPr>
-            <a:r>
-              <a:rPr lang="ko-KR" altLang="en-US" sz="2200" dirty="0">
-                <a:solidFill>
-                  <a:srgbClr val="1F2937"/>
-                </a:solidFill>
-                <a:latin typeface="맑은 고딕" pitchFamily="34" charset="0"/>
-                <a:ea typeface="맑은 고딕" pitchFamily="34" charset="-122"/>
-                <a:cs typeface="맑은 고딕" pitchFamily="34" charset="-120"/>
-              </a:rPr>
-              <a:t>귤</a:t>
-            </a:r>
-            <a:endParaRPr lang="ko-KR" sz="2200" dirty="0"/>
-          </a:p>
-        </p:txBody>
-      </p:sp>
-      <p:sp>
-        <p:nvSpPr>
-          <p:cNvPr id="37" name="S06-label201"/>
-          <p:cNvSpPr txBox="1"/>
-          <p:nvPr/>
-        </p:nvSpPr>
-        <p:spPr>
-          <a:xfrm>
-            <a:off x="3533866" y="4793360"/>
-            <a:ext cx="657352" cy="349250"/>
-          </a:xfrm>
-          <a:prstGeom prst="rect">
-            <a:avLst/>
-          </a:prstGeom>
-          <a:noFill/>
-          <a:ln/>
-        </p:spPr>
-        <p:txBody>
-          <a:bodyPr wrap="square" lIns="0" tIns="0" rIns="0" bIns="0" rtlCol="0" anchor="ctr"/>
-          <a:lstStyle/>
-          <a:p>
-            <a:pPr eaLnBrk="0" algn="ctr" indent="0" marL="0">
-              <a:buNone/>
-            </a:pPr>
-            <a:r>
-              <a:rPr lang="ko-KR" altLang="en-US" sz="2200" dirty="0">
-                <a:solidFill>
-                  <a:srgbClr val="1F2937"/>
-                </a:solidFill>
-                <a:latin typeface="맑은 고딕" pitchFamily="34" charset="0"/>
-                <a:ea typeface="맑은 고딕" pitchFamily="34" charset="-122"/>
-                <a:cs typeface="맑은 고딕" pitchFamily="34" charset="-120"/>
-              </a:rPr>
-              <a:t>포도</a:t>
-            </a:r>
-            <a:endParaRPr lang="ko-KR" sz="2200" dirty="0"/>
-          </a:p>
-        </p:txBody>
-      </p:sp>
-      <p:sp>
-        <p:nvSpPr>
-          <p:cNvPr id="38" name="S06-chip202"/>
+          <p:cNvPr id="35" name="S06-chip194"/>
           <p:cNvSpPr txBox="1"/>
           <p:nvPr/>
         </p:nvSpPr>
@@ -14342,14 +13823,14 @@
       </p:sp>
       <p:sp>
         <p:nvSpPr>
-          <p:cNvPr id="39" name="S06-figure203" descr="좋아하는 과일별 학생 수 막대그래프: 사과 6, 배 3, 귤 7, 포도 4"/>
-          <p:cNvSpPr/>
-          <p:nvPr/>
-        </p:nvSpPr>
-        <p:spPr>
-          <a:xfrm>
-            <a:off x="8455476" y="3823599"/>
-            <a:ext cx="206506" cy="1032528"/>
+          <p:cNvPr id="36" name="S06-figure195" descr="좋아하는 과일별 학생 수 막대그래프: 사과 6, 배 3, 귤 7, 포도 4"/>
+          <p:cNvSpPr/>
+          <p:nvPr/>
+        </p:nvSpPr>
+        <p:spPr>
+          <a:xfrm>
+            <a:off x="7932359" y="3938731"/>
+            <a:ext cx="381944" cy="763888"/>
           </a:xfrm>
           <a:custGeom>
             <a:avLst/>
@@ -14358,15 +13839,15 @@
             <a:cxnLst/>
             <a:rect l="l" t="t" r="r" b="b"/>
             <a:pathLst>
-              <a:path w="206506" h="1032528">
+              <a:path w="381944" h="763888">
                 <a:moveTo>
-                  <a:pt x="0" y="1032528"/>
+                  <a:pt x="0" y="763888"/>
                 </a:moveTo>
                 <a:lnTo>
-                  <a:pt x="206506" y="1032528"/>
-                </a:lnTo>
-                <a:lnTo>
-                  <a:pt x="206506" y="0"/>
+                  <a:pt x="381944" y="763888"/>
+                </a:lnTo>
+                <a:lnTo>
+                  <a:pt x="381944" y="0"/>
                 </a:lnTo>
                 <a:lnTo>
                   <a:pt x="0" y="0"/>
@@ -14388,14 +13869,14 @@
       </p:sp>
       <p:sp>
         <p:nvSpPr>
-          <p:cNvPr id="40" name="S06-mark204"/>
-          <p:cNvSpPr/>
-          <p:nvPr/>
-        </p:nvSpPr>
-        <p:spPr>
-          <a:xfrm>
-            <a:off x="8799653" y="4339863"/>
-            <a:ext cx="206506" cy="516264"/>
+          <p:cNvPr id="37" name="S06-mark196"/>
+          <p:cNvSpPr/>
+          <p:nvPr/>
+        </p:nvSpPr>
+        <p:spPr>
+          <a:xfrm>
+            <a:off x="8632590" y="4320675"/>
+            <a:ext cx="381944" cy="381944"/>
           </a:xfrm>
           <a:custGeom>
             <a:avLst/>
@@ -14404,15 +13885,15 @@
             <a:cxnLst/>
             <a:rect l="l" t="t" r="r" b="b"/>
             <a:pathLst>
-              <a:path w="206506" h="516264">
+              <a:path w="381944" h="381944">
                 <a:moveTo>
-                  <a:pt x="0" y="516264"/>
+                  <a:pt x="0" y="381944"/>
                 </a:moveTo>
                 <a:lnTo>
-                  <a:pt x="206506" y="516264"/>
-                </a:lnTo>
-                <a:lnTo>
-                  <a:pt x="206506" y="0"/>
+                  <a:pt x="381944" y="381944"/>
+                </a:lnTo>
+                <a:lnTo>
+                  <a:pt x="381944" y="0"/>
                 </a:lnTo>
                 <a:lnTo>
                   <a:pt x="0" y="0"/>
@@ -14434,14 +13915,14 @@
       </p:sp>
       <p:sp>
         <p:nvSpPr>
-          <p:cNvPr id="41" name="S06-mark205"/>
-          <p:cNvSpPr/>
-          <p:nvPr/>
-        </p:nvSpPr>
-        <p:spPr>
-          <a:xfrm>
-            <a:off x="9143829" y="3651511"/>
-            <a:ext cx="206506" cy="1204616"/>
+          <p:cNvPr id="38" name="S06-mark197"/>
+          <p:cNvSpPr/>
+          <p:nvPr/>
+        </p:nvSpPr>
+        <p:spPr>
+          <a:xfrm>
+            <a:off x="9332821" y="3811416"/>
+            <a:ext cx="381944" cy="891203"/>
           </a:xfrm>
           <a:custGeom>
             <a:avLst/>
@@ -14450,15 +13931,15 @@
             <a:cxnLst/>
             <a:rect l="l" t="t" r="r" b="b"/>
             <a:pathLst>
-              <a:path w="206506" h="1204616">
+              <a:path w="381944" h="891203">
                 <a:moveTo>
-                  <a:pt x="0" y="1204616"/>
+                  <a:pt x="0" y="891203"/>
                 </a:moveTo>
                 <a:lnTo>
-                  <a:pt x="206506" y="1204616"/>
-                </a:lnTo>
-                <a:lnTo>
-                  <a:pt x="206506" y="0"/>
+                  <a:pt x="381944" y="891203"/>
+                </a:lnTo>
+                <a:lnTo>
+                  <a:pt x="381944" y="0"/>
                 </a:lnTo>
                 <a:lnTo>
                   <a:pt x="0" y="0"/>
@@ -14480,14 +13961,14 @@
       </p:sp>
       <p:sp>
         <p:nvSpPr>
-          <p:cNvPr id="42" name="S06-mark206"/>
-          <p:cNvSpPr/>
-          <p:nvPr/>
-        </p:nvSpPr>
-        <p:spPr>
-          <a:xfrm>
-            <a:off x="9488005" y="4167775"/>
-            <a:ext cx="206506" cy="688352"/>
+          <p:cNvPr id="39" name="S06-mark198"/>
+          <p:cNvSpPr/>
+          <p:nvPr/>
+        </p:nvSpPr>
+        <p:spPr>
+          <a:xfrm>
+            <a:off x="10033052" y="4193360"/>
+            <a:ext cx="381944" cy="509259"/>
           </a:xfrm>
           <a:custGeom>
             <a:avLst/>
@@ -14496,15 +13977,15 @@
             <a:cxnLst/>
             <a:rect l="l" t="t" r="r" b="b"/>
             <a:pathLst>
-              <a:path w="206506" h="688352">
+              <a:path w="381944" h="509259">
                 <a:moveTo>
-                  <a:pt x="0" y="688352"/>
+                  <a:pt x="0" y="509259"/>
                 </a:moveTo>
                 <a:lnTo>
-                  <a:pt x="206506" y="688352"/>
-                </a:lnTo>
-                <a:lnTo>
-                  <a:pt x="206506" y="0"/>
+                  <a:pt x="381944" y="509259"/>
+                </a:lnTo>
+                <a:lnTo>
+                  <a:pt x="381944" y="0"/>
                 </a:lnTo>
                 <a:lnTo>
                   <a:pt x="0" y="0"/>
@@ -14526,14 +14007,14 @@
       </p:sp>
       <p:sp>
         <p:nvSpPr>
-          <p:cNvPr id="43" name="S06-mark207"/>
-          <p:cNvSpPr/>
-          <p:nvPr/>
-        </p:nvSpPr>
-        <p:spPr>
-          <a:xfrm>
-            <a:off x="8335015" y="4684040"/>
-            <a:ext cx="1479957" cy="0"/>
+          <p:cNvPr id="40" name="S06-mark199"/>
+          <p:cNvSpPr/>
+          <p:nvPr/>
+        </p:nvSpPr>
+        <p:spPr>
+          <a:xfrm>
+            <a:off x="7677730" y="4575304"/>
+            <a:ext cx="2991895" cy="0"/>
           </a:xfrm>
           <a:prstGeom prst="line">
             <a:avLst/>
@@ -14549,14 +14030,14 @@
       </p:sp>
       <p:sp>
         <p:nvSpPr>
-          <p:cNvPr id="44" name="S06-mark208"/>
-          <p:cNvSpPr/>
-          <p:nvPr/>
-        </p:nvSpPr>
-        <p:spPr>
-          <a:xfrm>
-            <a:off x="8335015" y="4511951"/>
-            <a:ext cx="1479957" cy="0"/>
+          <p:cNvPr id="41" name="S06-mark200"/>
+          <p:cNvSpPr/>
+          <p:nvPr/>
+        </p:nvSpPr>
+        <p:spPr>
+          <a:xfrm>
+            <a:off x="7677730" y="4447990"/>
+            <a:ext cx="2991895" cy="0"/>
           </a:xfrm>
           <a:prstGeom prst="line">
             <a:avLst/>
@@ -14572,14 +14053,14 @@
       </p:sp>
       <p:sp>
         <p:nvSpPr>
-          <p:cNvPr id="45" name="S06-mark209"/>
-          <p:cNvSpPr/>
-          <p:nvPr/>
-        </p:nvSpPr>
-        <p:spPr>
-          <a:xfrm>
-            <a:off x="8335015" y="4339863"/>
-            <a:ext cx="1479957" cy="0"/>
+          <p:cNvPr id="42" name="S06-mark201"/>
+          <p:cNvSpPr/>
+          <p:nvPr/>
+        </p:nvSpPr>
+        <p:spPr>
+          <a:xfrm>
+            <a:off x="7677730" y="4320675"/>
+            <a:ext cx="2991895" cy="0"/>
           </a:xfrm>
           <a:prstGeom prst="line">
             <a:avLst/>
@@ -14595,14 +14076,14 @@
       </p:sp>
       <p:sp>
         <p:nvSpPr>
-          <p:cNvPr id="46" name="S06-mark210"/>
-          <p:cNvSpPr/>
-          <p:nvPr/>
-        </p:nvSpPr>
-        <p:spPr>
-          <a:xfrm>
-            <a:off x="8335015" y="4167775"/>
-            <a:ext cx="1479957" cy="0"/>
+          <p:cNvPr id="43" name="S06-mark202"/>
+          <p:cNvSpPr/>
+          <p:nvPr/>
+        </p:nvSpPr>
+        <p:spPr>
+          <a:xfrm>
+            <a:off x="7677730" y="4193360"/>
+            <a:ext cx="2991895" cy="0"/>
           </a:xfrm>
           <a:prstGeom prst="line">
             <a:avLst/>
@@ -14618,14 +14099,14 @@
       </p:sp>
       <p:sp>
         <p:nvSpPr>
-          <p:cNvPr id="47" name="S06-mark211"/>
-          <p:cNvSpPr/>
-          <p:nvPr/>
-        </p:nvSpPr>
-        <p:spPr>
-          <a:xfrm>
-            <a:off x="8335015" y="3995687"/>
-            <a:ext cx="1479957" cy="0"/>
+          <p:cNvPr id="44" name="S06-mark203"/>
+          <p:cNvSpPr/>
+          <p:nvPr/>
+        </p:nvSpPr>
+        <p:spPr>
+          <a:xfrm>
+            <a:off x="7677730" y="4066045"/>
+            <a:ext cx="2991895" cy="0"/>
           </a:xfrm>
           <a:prstGeom prst="line">
             <a:avLst/>
@@ -14641,14 +14122,14 @@
       </p:sp>
       <p:sp>
         <p:nvSpPr>
-          <p:cNvPr id="48" name="S06-mark212"/>
-          <p:cNvSpPr/>
-          <p:nvPr/>
-        </p:nvSpPr>
-        <p:spPr>
-          <a:xfrm>
-            <a:off x="8335015" y="3823599"/>
-            <a:ext cx="1479957" cy="0"/>
+          <p:cNvPr id="45" name="S06-mark204"/>
+          <p:cNvSpPr/>
+          <p:nvPr/>
+        </p:nvSpPr>
+        <p:spPr>
+          <a:xfrm>
+            <a:off x="7677730" y="3938731"/>
+            <a:ext cx="2991895" cy="0"/>
           </a:xfrm>
           <a:prstGeom prst="line">
             <a:avLst/>
@@ -14664,14 +14145,14 @@
       </p:sp>
       <p:sp>
         <p:nvSpPr>
-          <p:cNvPr id="49" name="S06-mark213"/>
-          <p:cNvSpPr/>
-          <p:nvPr/>
-        </p:nvSpPr>
-        <p:spPr>
-          <a:xfrm>
-            <a:off x="8335015" y="3651511"/>
-            <a:ext cx="1479957" cy="0"/>
+          <p:cNvPr id="46" name="S06-mark205"/>
+          <p:cNvSpPr/>
+          <p:nvPr/>
+        </p:nvSpPr>
+        <p:spPr>
+          <a:xfrm>
+            <a:off x="7677730" y="3811416"/>
+            <a:ext cx="2991895" cy="0"/>
           </a:xfrm>
           <a:prstGeom prst="line">
             <a:avLst/>
@@ -14687,14 +14168,14 @@
       </p:sp>
       <p:sp>
         <p:nvSpPr>
-          <p:cNvPr id="50" name="S06-mark214"/>
-          <p:cNvSpPr/>
-          <p:nvPr/>
-        </p:nvSpPr>
-        <p:spPr>
-          <a:xfrm>
-            <a:off x="8335015" y="3479423"/>
-            <a:ext cx="1479957" cy="0"/>
+          <p:cNvPr id="47" name="S06-mark206"/>
+          <p:cNvSpPr/>
+          <p:nvPr/>
+        </p:nvSpPr>
+        <p:spPr>
+          <a:xfrm>
+            <a:off x="7677730" y="3684101"/>
+            <a:ext cx="2991895" cy="0"/>
           </a:xfrm>
           <a:prstGeom prst="line">
             <a:avLst/>
@@ -14710,14 +14191,14 @@
       </p:sp>
       <p:sp>
         <p:nvSpPr>
-          <p:cNvPr id="51" name="S06-mark215"/>
-          <p:cNvSpPr/>
-          <p:nvPr/>
-        </p:nvSpPr>
-        <p:spPr>
-          <a:xfrm>
-            <a:off x="8335015" y="4856128"/>
-            <a:ext cx="1479957" cy="0"/>
+          <p:cNvPr id="48" name="S06-mark207"/>
+          <p:cNvSpPr/>
+          <p:nvPr/>
+        </p:nvSpPr>
+        <p:spPr>
+          <a:xfrm>
+            <a:off x="7677730" y="4702619"/>
+            <a:ext cx="2991895" cy="0"/>
           </a:xfrm>
           <a:prstGeom prst="line">
             <a:avLst/>
@@ -14733,14 +14214,14 @@
       </p:sp>
       <p:sp>
         <p:nvSpPr>
-          <p:cNvPr id="52" name="S06-mark216"/>
+          <p:cNvPr id="49" name="S06-mark208"/>
           <p:cNvSpPr/>
           <p:nvPr/>
         </p:nvSpPr>
         <p:spPr>
           <a:xfrm flipV="1">
-            <a:off x="8335015" y="3410588"/>
-            <a:ext cx="0" cy="1445540"/>
+            <a:off x="7677730" y="3556787"/>
+            <a:ext cx="0" cy="1145832"/>
           </a:xfrm>
           <a:prstGeom prst="line">
             <a:avLst/>
@@ -14756,13 +14237,13 @@
       </p:sp>
       <p:sp>
         <p:nvSpPr>
-          <p:cNvPr id="53" name="S06-label218"/>
+          <p:cNvPr id="50" name="S06-label210"/>
           <p:cNvSpPr txBox="1"/>
           <p:nvPr/>
         </p:nvSpPr>
         <p:spPr>
           <a:xfrm>
-            <a:off x="8041674" y="4681503"/>
+            <a:off x="7260120" y="4527994"/>
             <a:ext cx="294132" cy="349250"/>
           </a:xfrm>
           <a:prstGeom prst="rect">
@@ -14795,13 +14276,13 @@
       </p:sp>
       <p:sp>
         <p:nvSpPr>
-          <p:cNvPr id="54" name="S06-label220"/>
+          <p:cNvPr id="51" name="S06-label212"/>
           <p:cNvSpPr txBox="1"/>
           <p:nvPr/>
         </p:nvSpPr>
         <p:spPr>
           <a:xfrm>
-            <a:off x="8041674" y="4337326"/>
+            <a:off x="7260120" y="4018735"/>
             <a:ext cx="294132" cy="349250"/>
           </a:xfrm>
           <a:prstGeom prst="rect">
@@ -14826,7 +14307,7 @@
                 <a:ea typeface="맑은 고딕" pitchFamily="34" charset="-122"/>
                 <a:cs typeface="맑은 고딕" pitchFamily="34" charset="-120"/>
               </a:rPr>
-              <a:t>2</a:t>
+              <a:t>4</a:t>
             </a:r>
             <a:endParaRPr lang="ko-KR" sz="2200" dirty="0"/>
           </a:p>
@@ -14834,13 +14315,13 @@
       </p:sp>
       <p:sp>
         <p:nvSpPr>
-          <p:cNvPr id="55" name="S06-label222"/>
+          <p:cNvPr id="52" name="S06-label214"/>
           <p:cNvSpPr txBox="1"/>
           <p:nvPr/>
         </p:nvSpPr>
         <p:spPr>
           <a:xfrm>
-            <a:off x="8041674" y="3993150"/>
+            <a:off x="7260120" y="3509476"/>
             <a:ext cx="294132" cy="349250"/>
           </a:xfrm>
           <a:prstGeom prst="rect">
@@ -14865,7 +14346,7 @@
                 <a:ea typeface="맑은 고딕" pitchFamily="34" charset="-122"/>
                 <a:cs typeface="맑은 고딕" pitchFamily="34" charset="-120"/>
               </a:rPr>
-              <a:t>4</a:t>
+              <a:t>8</a:t>
             </a:r>
             <a:endParaRPr lang="ko-KR" sz="2200" dirty="0"/>
           </a:p>
@@ -14873,14 +14354,14 @@
       </p:sp>
       <p:sp>
         <p:nvSpPr>
-          <p:cNvPr id="56" name="S06-label224"/>
+          <p:cNvPr id="53" name="S06-label216"/>
           <p:cNvSpPr txBox="1"/>
           <p:nvPr/>
         </p:nvSpPr>
         <p:spPr>
           <a:xfrm>
-            <a:off x="8041674" y="3648974"/>
-            <a:ext cx="294132" cy="349250"/>
+            <a:off x="7047776" y="3191190"/>
+            <a:ext cx="718820" cy="349250"/>
           </a:xfrm>
           <a:prstGeom prst="rect">
             <a:avLst/>
@@ -14904,7 +14385,7 @@
                 <a:ea typeface="맑은 고딕" pitchFamily="34" charset="-122"/>
                 <a:cs typeface="맑은 고딕" pitchFamily="34" charset="-120"/>
               </a:rPr>
-              <a:t>6</a:t>
+              <a:t>(명)</a:t>
             </a:r>
             <a:endParaRPr lang="ko-KR" sz="2200" dirty="0"/>
           </a:p>
@@ -14912,14 +14393,14 @@
       </p:sp>
       <p:sp>
         <p:nvSpPr>
-          <p:cNvPr id="57" name="S06-label226"/>
+          <p:cNvPr id="54" name="S06-label218"/>
           <p:cNvSpPr txBox="1"/>
           <p:nvPr/>
         </p:nvSpPr>
         <p:spPr>
           <a:xfrm>
-            <a:off x="8041674" y="3304798"/>
-            <a:ext cx="294132" cy="349250"/>
+            <a:off x="7794655" y="4734880"/>
+            <a:ext cx="657352" cy="349250"/>
           </a:xfrm>
           <a:prstGeom prst="rect">
             <a:avLst/>
@@ -14943,7 +14424,7 @@
                 <a:ea typeface="맑은 고딕" pitchFamily="34" charset="-122"/>
                 <a:cs typeface="맑은 고딕" pitchFamily="34" charset="-120"/>
               </a:rPr>
-              <a:t>8</a:t>
+              <a:t>사과</a:t>
             </a:r>
             <a:endParaRPr lang="ko-KR" sz="2200" dirty="0"/>
           </a:p>
@@ -14951,14 +14432,14 @@
       </p:sp>
       <p:sp>
         <p:nvSpPr>
-          <p:cNvPr id="58" name="S06-label228"/>
+          <p:cNvPr id="55" name="S06-label220"/>
           <p:cNvSpPr txBox="1"/>
           <p:nvPr/>
         </p:nvSpPr>
         <p:spPr>
           <a:xfrm>
-            <a:off x="7829330" y="3132710"/>
-            <a:ext cx="718820" cy="349250"/>
+            <a:off x="8631792" y="4734880"/>
+            <a:ext cx="383540" cy="349250"/>
           </a:xfrm>
           <a:prstGeom prst="rect">
             <a:avLst/>
@@ -14982,7 +14463,7 @@
                 <a:ea typeface="맑은 고딕" pitchFamily="34" charset="-122"/>
                 <a:cs typeface="맑은 고딕" pitchFamily="34" charset="-120"/>
               </a:rPr>
-              <a:t>(명)</a:t>
+              <a:t>배</a:t>
             </a:r>
             <a:endParaRPr lang="ko-KR" sz="2200" dirty="0"/>
           </a:p>
@@ -14990,14 +14471,14 @@
       </p:sp>
       <p:sp>
         <p:nvSpPr>
-          <p:cNvPr id="59" name="S06-label230"/>
+          <p:cNvPr id="56" name="S06-label222"/>
           <p:cNvSpPr txBox="1"/>
           <p:nvPr/>
         </p:nvSpPr>
         <p:spPr>
           <a:xfrm>
-            <a:off x="8230053" y="4793360"/>
-            <a:ext cx="657352" cy="349250"/>
+            <a:off x="9332023" y="4734880"/>
+            <a:ext cx="383540" cy="349250"/>
           </a:xfrm>
           <a:prstGeom prst="rect">
             <a:avLst/>
@@ -15021,7 +14502,7 @@
                 <a:ea typeface="맑은 고딕" pitchFamily="34" charset="-122"/>
                 <a:cs typeface="맑은 고딕" pitchFamily="34" charset="-120"/>
               </a:rPr>
-              <a:t>사과</a:t>
+              <a:t>귤</a:t>
             </a:r>
             <a:endParaRPr lang="ko-KR" sz="2200" dirty="0"/>
           </a:p>
@@ -15029,91 +14510,13 @@
       </p:sp>
       <p:sp>
         <p:nvSpPr>
-          <p:cNvPr id="60" name="S06-label232"/>
+          <p:cNvPr id="57" name="S06-label224"/>
           <p:cNvSpPr txBox="1"/>
           <p:nvPr/>
         </p:nvSpPr>
         <p:spPr>
           <a:xfrm>
-            <a:off x="8711135" y="4793360"/>
-            <a:ext cx="383540" cy="349250"/>
-          </a:xfrm>
-          <a:prstGeom prst="rect">
-            <a:avLst/>
-          </a:prstGeom>
-          <a:noFill/>
-          <a:ln/>
-        </p:spPr>
-        <p:txBody>
-          <a:bodyPr wrap="square" lIns="0" tIns="0" rIns="0" bIns="0" rtlCol="0" anchor="ctr"/>
-          <a:lstStyle/>
-          <a:p>
-            <a:pPr eaLnBrk="0" algn="ctr" indent="0" marL="0">
-              <a:buNone/>
-            </a:pPr>
-            <a:r>
-              <a:rPr lang="ko-KR" altLang="en-US" sz="2200" dirty="0">
-                <a:solidFill>
-                  <a:srgbClr val="1F2937"/>
-                </a:solidFill>
-                <a:latin typeface="맑은 고딕" pitchFamily="34" charset="0"/>
-                <a:ea typeface="맑은 고딕" pitchFamily="34" charset="-122"/>
-                <a:cs typeface="맑은 고딕" pitchFamily="34" charset="-120"/>
-              </a:rPr>
-              <a:t>배</a:t>
-            </a:r>
-            <a:endParaRPr lang="ko-KR" sz="2200" dirty="0"/>
-          </a:p>
-        </p:txBody>
-      </p:sp>
-      <p:sp>
-        <p:nvSpPr>
-          <p:cNvPr id="61" name="S06-label234"/>
-          <p:cNvSpPr txBox="1"/>
-          <p:nvPr/>
-        </p:nvSpPr>
-        <p:spPr>
-          <a:xfrm>
-            <a:off x="9055311" y="4793360"/>
-            <a:ext cx="383540" cy="349250"/>
-          </a:xfrm>
-          <a:prstGeom prst="rect">
-            <a:avLst/>
-          </a:prstGeom>
-          <a:noFill/>
-          <a:ln/>
-        </p:spPr>
-        <p:txBody>
-          <a:bodyPr wrap="square" lIns="0" tIns="0" rIns="0" bIns="0" rtlCol="0" anchor="ctr"/>
-          <a:lstStyle/>
-          <a:p>
-            <a:pPr eaLnBrk="0" algn="ctr" indent="0" marL="0">
-              <a:buNone/>
-            </a:pPr>
-            <a:r>
-              <a:rPr lang="ko-KR" altLang="en-US" sz="2200" dirty="0">
-                <a:solidFill>
-                  <a:srgbClr val="1F2937"/>
-                </a:solidFill>
-                <a:latin typeface="맑은 고딕" pitchFamily="34" charset="0"/>
-                <a:ea typeface="맑은 고딕" pitchFamily="34" charset="-122"/>
-                <a:cs typeface="맑은 고딕" pitchFamily="34" charset="-120"/>
-              </a:rPr>
-              <a:t>귤</a:t>
-            </a:r>
-            <a:endParaRPr lang="ko-KR" sz="2200" dirty="0"/>
-          </a:p>
-        </p:txBody>
-      </p:sp>
-      <p:sp>
-        <p:nvSpPr>
-          <p:cNvPr id="62" name="S06-label236"/>
-          <p:cNvSpPr txBox="1"/>
-          <p:nvPr/>
-        </p:nvSpPr>
-        <p:spPr>
-          <a:xfrm>
-            <a:off x="9262582" y="4793360"/>
+            <a:off x="9895348" y="4734880"/>
             <a:ext cx="657352" cy="349250"/>
           </a:xfrm>
           <a:prstGeom prst="rect">
@@ -15260,7 +14663,7 @@
       </p:sp>
       <p:sp>
         <p:nvSpPr>
-          <p:cNvPr id="3" name="S07-text237"/>
+          <p:cNvPr id="3" name="S07-text225"/>
           <p:cNvSpPr txBox="1"/>
           <p:nvPr/>
         </p:nvSpPr>
@@ -15299,7 +14702,7 @@
       </p:sp>
       <p:sp>
         <p:nvSpPr>
-          <p:cNvPr id="4" name="S07-figure238" descr="원그래프 ‘도서관 책의 종류’(400권): 문학 40 %, 과학 25 %, 역사 20 %, 기타 15 %"/>
+          <p:cNvPr id="4" name="S07-figure226" descr="원그래프 ‘도서관 책의 종류’(400권): 문학 40 %, 과학 25 %, 역사 20 %, 기타 15 %"/>
           <p:cNvSpPr/>
           <p:nvPr/>
         </p:nvSpPr>
@@ -15483,7 +14886,7 @@
       </p:sp>
       <p:sp>
         <p:nvSpPr>
-          <p:cNvPr id="5" name="S07-mark239"/>
+          <p:cNvPr id="5" name="S07-mark227"/>
           <p:cNvSpPr/>
           <p:nvPr/>
         </p:nvSpPr>
@@ -15613,7 +15016,7 @@
       </p:sp>
       <p:sp>
         <p:nvSpPr>
-          <p:cNvPr id="6" name="S07-mark240"/>
+          <p:cNvPr id="6" name="S07-mark228"/>
           <p:cNvSpPr/>
           <p:nvPr/>
         </p:nvSpPr>
@@ -15725,7 +15128,7 @@
       </p:sp>
       <p:sp>
         <p:nvSpPr>
-          <p:cNvPr id="7" name="S07-mark241"/>
+          <p:cNvPr id="7" name="S07-mark229"/>
           <p:cNvSpPr/>
           <p:nvPr/>
         </p:nvSpPr>
@@ -15819,7 +15222,7 @@
       </p:sp>
       <p:sp>
         <p:nvSpPr>
-          <p:cNvPr id="8" name="S07-mark242"/>
+          <p:cNvPr id="8" name="S07-mark230"/>
           <p:cNvSpPr/>
           <p:nvPr/>
         </p:nvSpPr>
@@ -15842,7 +15245,7 @@
       </p:sp>
       <p:sp>
         <p:nvSpPr>
-          <p:cNvPr id="9" name="S07-mark243"/>
+          <p:cNvPr id="9" name="S07-mark231"/>
           <p:cNvSpPr/>
           <p:nvPr/>
         </p:nvSpPr>
@@ -15865,7 +15268,7 @@
       </p:sp>
       <p:sp>
         <p:nvSpPr>
-          <p:cNvPr id="10" name="S07-mark244"/>
+          <p:cNvPr id="10" name="S07-mark232"/>
           <p:cNvSpPr/>
           <p:nvPr/>
         </p:nvSpPr>
@@ -15888,7 +15291,7 @@
       </p:sp>
       <p:sp>
         <p:nvSpPr>
-          <p:cNvPr id="11" name="S07-mark245"/>
+          <p:cNvPr id="11" name="S07-mark233"/>
           <p:cNvSpPr/>
           <p:nvPr/>
         </p:nvSpPr>
@@ -15911,7 +15314,7 @@
       </p:sp>
       <p:sp>
         <p:nvSpPr>
-          <p:cNvPr id="12" name="S07-mark246"/>
+          <p:cNvPr id="12" name="S07-mark234"/>
           <p:cNvSpPr/>
           <p:nvPr/>
         </p:nvSpPr>
@@ -15934,7 +15337,7 @@
       </p:sp>
       <p:sp>
         <p:nvSpPr>
-          <p:cNvPr id="13" name="S07-mark247"/>
+          <p:cNvPr id="13" name="S07-mark235"/>
           <p:cNvSpPr/>
           <p:nvPr/>
         </p:nvSpPr>
@@ -15957,7 +15360,7 @@
       </p:sp>
       <p:sp>
         <p:nvSpPr>
-          <p:cNvPr id="14" name="S07-mark248"/>
+          <p:cNvPr id="14" name="S07-mark236"/>
           <p:cNvSpPr/>
           <p:nvPr/>
         </p:nvSpPr>
@@ -15980,7 +15383,7 @@
       </p:sp>
       <p:sp>
         <p:nvSpPr>
-          <p:cNvPr id="15" name="S07-mark249"/>
+          <p:cNvPr id="15" name="S07-mark237"/>
           <p:cNvSpPr/>
           <p:nvPr/>
         </p:nvSpPr>
@@ -16003,7 +15406,7 @@
       </p:sp>
       <p:sp>
         <p:nvSpPr>
-          <p:cNvPr id="16" name="S07-mark250"/>
+          <p:cNvPr id="16" name="S07-mark238"/>
           <p:cNvSpPr/>
           <p:nvPr/>
         </p:nvSpPr>
@@ -16026,7 +15429,7 @@
       </p:sp>
       <p:sp>
         <p:nvSpPr>
-          <p:cNvPr id="17" name="S07-mark251"/>
+          <p:cNvPr id="17" name="S07-mark239"/>
           <p:cNvSpPr/>
           <p:nvPr/>
         </p:nvSpPr>
@@ -16049,7 +15452,7 @@
       </p:sp>
       <p:sp>
         <p:nvSpPr>
-          <p:cNvPr id="18" name="S07-mark252"/>
+          <p:cNvPr id="18" name="S07-mark240"/>
           <p:cNvSpPr/>
           <p:nvPr/>
         </p:nvSpPr>
@@ -16072,7 +15475,7 @@
       </p:sp>
       <p:sp>
         <p:nvSpPr>
-          <p:cNvPr id="19" name="S07-mark253"/>
+          <p:cNvPr id="19" name="S07-mark241"/>
           <p:cNvSpPr/>
           <p:nvPr/>
         </p:nvSpPr>
@@ -16095,7 +15498,7 @@
       </p:sp>
       <p:sp>
         <p:nvSpPr>
-          <p:cNvPr id="20" name="S07-mark254"/>
+          <p:cNvPr id="20" name="S07-mark242"/>
           <p:cNvSpPr/>
           <p:nvPr/>
         </p:nvSpPr>
@@ -16118,7 +15521,7 @@
       </p:sp>
       <p:sp>
         <p:nvSpPr>
-          <p:cNvPr id="21" name="S07-mark255"/>
+          <p:cNvPr id="21" name="S07-mark243"/>
           <p:cNvSpPr/>
           <p:nvPr/>
         </p:nvSpPr>
@@ -16141,7 +15544,7 @@
       </p:sp>
       <p:sp>
         <p:nvSpPr>
-          <p:cNvPr id="22" name="S07-mark256"/>
+          <p:cNvPr id="22" name="S07-mark244"/>
           <p:cNvSpPr/>
           <p:nvPr/>
         </p:nvSpPr>
@@ -16164,7 +15567,7 @@
       </p:sp>
       <p:sp>
         <p:nvSpPr>
-          <p:cNvPr id="23" name="S07-mark257"/>
+          <p:cNvPr id="23" name="S07-mark245"/>
           <p:cNvSpPr/>
           <p:nvPr/>
         </p:nvSpPr>
@@ -16187,7 +15590,7 @@
       </p:sp>
       <p:sp>
         <p:nvSpPr>
-          <p:cNvPr id="24" name="S07-mark258"/>
+          <p:cNvPr id="24" name="S07-mark246"/>
           <p:cNvSpPr/>
           <p:nvPr/>
         </p:nvSpPr>
@@ -16210,7 +15613,7 @@
       </p:sp>
       <p:sp>
         <p:nvSpPr>
-          <p:cNvPr id="25" name="S07-mark259"/>
+          <p:cNvPr id="25" name="S07-mark247"/>
           <p:cNvSpPr/>
           <p:nvPr/>
         </p:nvSpPr>
@@ -16233,7 +15636,7 @@
       </p:sp>
       <p:sp>
         <p:nvSpPr>
-          <p:cNvPr id="26" name="S07-mark260"/>
+          <p:cNvPr id="26" name="S07-mark248"/>
           <p:cNvSpPr/>
           <p:nvPr/>
         </p:nvSpPr>
@@ -16256,7 +15659,7 @@
       </p:sp>
       <p:sp>
         <p:nvSpPr>
-          <p:cNvPr id="27" name="S07-mark261"/>
+          <p:cNvPr id="27" name="S07-mark249"/>
           <p:cNvSpPr/>
           <p:nvPr/>
         </p:nvSpPr>
@@ -16279,7 +15682,7 @@
       </p:sp>
       <p:sp>
         <p:nvSpPr>
-          <p:cNvPr id="28" name="S07-label263"/>
+          <p:cNvPr id="28" name="S07-label251"/>
           <p:cNvSpPr txBox="1"/>
           <p:nvPr/>
         </p:nvSpPr>
@@ -16335,7 +15738,7 @@
       </p:sp>
       <p:sp>
         <p:nvSpPr>
-          <p:cNvPr id="29" name="S07-label265"/>
+          <p:cNvPr id="29" name="S07-label253"/>
           <p:cNvSpPr txBox="1"/>
           <p:nvPr/>
         </p:nvSpPr>
@@ -16391,7 +15794,7 @@
       </p:sp>
       <p:sp>
         <p:nvSpPr>
-          <p:cNvPr id="30" name="S07-label267"/>
+          <p:cNvPr id="30" name="S07-label255"/>
           <p:cNvSpPr txBox="1"/>
           <p:nvPr/>
         </p:nvSpPr>
@@ -16447,7 +15850,7 @@
       </p:sp>
       <p:sp>
         <p:nvSpPr>
-          <p:cNvPr id="31" name="S07-label269"/>
+          <p:cNvPr id="31" name="S07-label257"/>
           <p:cNvSpPr txBox="1"/>
           <p:nvPr/>
         </p:nvSpPr>
@@ -16503,7 +15906,7 @@
       </p:sp>
       <p:sp>
         <p:nvSpPr>
-          <p:cNvPr id="32" name="S07-label271"/>
+          <p:cNvPr id="32" name="S07-label259"/>
           <p:cNvSpPr txBox="1"/>
           <p:nvPr/>
         </p:nvSpPr>
@@ -16542,7 +15945,7 @@
       </p:sp>
       <p:sp>
         <p:nvSpPr>
-          <p:cNvPr id="33" name="S07-stepno272"/>
+          <p:cNvPr id="33" name="S07-stepno260"/>
           <p:cNvSpPr txBox="1"/>
           <p:nvPr/>
         </p:nvSpPr>
@@ -16587,7 +15990,7 @@
       </p:sp>
       <p:sp>
         <p:nvSpPr>
-          <p:cNvPr id="34" name="S07-text273"/>
+          <p:cNvPr id="34" name="S07-text261"/>
           <p:cNvSpPr txBox="1"/>
           <p:nvPr/>
         </p:nvSpPr>
@@ -16643,7 +16046,7 @@
       </p:sp>
       <p:sp>
         <p:nvSpPr>
-          <p:cNvPr id="35" name="S07-stepno274"/>
+          <p:cNvPr id="35" name="S07-stepno262"/>
           <p:cNvSpPr txBox="1"/>
           <p:nvPr/>
         </p:nvSpPr>
@@ -16688,7 +16091,7 @@
       </p:sp>
       <p:sp>
         <p:nvSpPr>
-          <p:cNvPr id="36" name="S07-text275"/>
+          <p:cNvPr id="36" name="S07-text263"/>
           <p:cNvSpPr txBox="1"/>
           <p:nvPr/>
         </p:nvSpPr>
@@ -16744,7 +16147,7 @@
       </p:sp>
       <p:sp>
         <p:nvSpPr>
-          <p:cNvPr id="37" name="S07-stepno276"/>
+          <p:cNvPr id="37" name="S07-stepno264"/>
           <p:cNvSpPr txBox="1"/>
           <p:nvPr/>
         </p:nvSpPr>
@@ -16789,7 +16192,7 @@
       </p:sp>
       <p:sp>
         <p:nvSpPr>
-          <p:cNvPr id="38" name="S07-text277"/>
+          <p:cNvPr id="38" name="S07-text265"/>
           <p:cNvSpPr txBox="1"/>
           <p:nvPr/>
         </p:nvSpPr>
@@ -16845,7 +16248,7 @@
       </p:sp>
       <p:sp>
         <p:nvSpPr>
-          <p:cNvPr id="39" name="S07-stepno278"/>
+          <p:cNvPr id="39" name="S07-stepno266"/>
           <p:cNvSpPr txBox="1"/>
           <p:nvPr/>
         </p:nvSpPr>
@@ -16890,7 +16293,7 @@
       </p:sp>
       <p:sp>
         <p:nvSpPr>
-          <p:cNvPr id="40" name="S07-text279"/>
+          <p:cNvPr id="40" name="S07-text267"/>
           <p:cNvSpPr txBox="1"/>
           <p:nvPr/>
         </p:nvSpPr>
@@ -17060,7 +16463,7 @@
       </p:sp>
       <p:sp>
         <p:nvSpPr>
-          <p:cNvPr id="3" name="S08-text280"/>
+          <p:cNvPr id="3" name="S08-text268"/>
           <p:cNvSpPr txBox="1"/>
           <p:nvPr/>
         </p:nvSpPr>
@@ -17099,7 +16502,7 @@
       </p:sp>
       <p:sp>
         <p:nvSpPr>
-          <p:cNvPr id="4" name="S08-figure281" descr="꺾은선그래프 ‘월별 도서관 이용자 수’(세로 눈금 한 칸 20명, 물결선 위 100부터): 3월 120, 4월 140, 5월 120, 6월 180, 7월 200"/>
+          <p:cNvPr id="4" name="S08-figure269" descr="꺾은선그래프 ‘월별 도서관 이용자 수’(세로 눈금 한 칸 20명, 물결선 위 100부터): 3월 120, 4월 140, 5월 120, 6월 180, 7월 200"/>
           <p:cNvSpPr/>
           <p:nvPr/>
         </p:nvSpPr>
@@ -17151,7 +16554,7 @@
       </p:sp>
       <p:sp>
         <p:nvSpPr>
-          <p:cNvPr id="5" name="S08-mark282"/>
+          <p:cNvPr id="5" name="S08-mark270"/>
           <p:cNvSpPr/>
           <p:nvPr/>
         </p:nvSpPr>
@@ -17197,7 +16600,7 @@
       </p:sp>
       <p:sp>
         <p:nvSpPr>
-          <p:cNvPr id="6" name="S08-mark283"/>
+          <p:cNvPr id="6" name="S08-mark271"/>
           <p:cNvSpPr/>
           <p:nvPr/>
         </p:nvSpPr>
@@ -17220,7 +16623,7 @@
       </p:sp>
       <p:sp>
         <p:nvSpPr>
-          <p:cNvPr id="7" name="S08-mark284"/>
+          <p:cNvPr id="7" name="S08-mark272"/>
           <p:cNvSpPr/>
           <p:nvPr/>
         </p:nvSpPr>
@@ -17243,7 +16646,7 @@
       </p:sp>
       <p:sp>
         <p:nvSpPr>
-          <p:cNvPr id="8" name="S08-mark285"/>
+          <p:cNvPr id="8" name="S08-mark273"/>
           <p:cNvSpPr/>
           <p:nvPr/>
         </p:nvSpPr>
@@ -17266,7 +16669,7 @@
       </p:sp>
       <p:sp>
         <p:nvSpPr>
-          <p:cNvPr id="9" name="S08-mark286"/>
+          <p:cNvPr id="9" name="S08-mark274"/>
           <p:cNvSpPr/>
           <p:nvPr/>
         </p:nvSpPr>
@@ -17289,7 +16692,7 @@
       </p:sp>
       <p:sp>
         <p:nvSpPr>
-          <p:cNvPr id="10" name="S08-mark287"/>
+          <p:cNvPr id="10" name="S08-mark275"/>
           <p:cNvSpPr/>
           <p:nvPr/>
         </p:nvSpPr>
@@ -17312,7 +16715,7 @@
       </p:sp>
       <p:sp>
         <p:nvSpPr>
-          <p:cNvPr id="11" name="S08-mark288"/>
+          <p:cNvPr id="11" name="S08-mark276"/>
           <p:cNvSpPr/>
           <p:nvPr/>
         </p:nvSpPr>
@@ -17335,7 +16738,7 @@
       </p:sp>
       <p:sp>
         <p:nvSpPr>
-          <p:cNvPr id="12" name="S08-mark289"/>
+          <p:cNvPr id="12" name="S08-mark277"/>
           <p:cNvSpPr/>
           <p:nvPr/>
         </p:nvSpPr>
@@ -17358,7 +16761,7 @@
       </p:sp>
       <p:sp>
         <p:nvSpPr>
-          <p:cNvPr id="13" name="S08-mark290"/>
+          <p:cNvPr id="13" name="S08-mark278"/>
           <p:cNvSpPr/>
           <p:nvPr/>
         </p:nvSpPr>
@@ -17381,7 +16784,7 @@
       </p:sp>
       <p:sp>
         <p:nvSpPr>
-          <p:cNvPr id="14" name="S08-mark291"/>
+          <p:cNvPr id="14" name="S08-mark279"/>
           <p:cNvSpPr/>
           <p:nvPr/>
         </p:nvSpPr>
@@ -17404,7 +16807,7 @@
       </p:sp>
       <p:sp>
         <p:nvSpPr>
-          <p:cNvPr id="15" name="S08-mark292"/>
+          <p:cNvPr id="15" name="S08-mark280"/>
           <p:cNvSpPr/>
           <p:nvPr/>
         </p:nvSpPr>
@@ -17427,7 +16830,7 @@
       </p:sp>
       <p:sp>
         <p:nvSpPr>
-          <p:cNvPr id="16" name="S08-mark293"/>
+          <p:cNvPr id="16" name="S08-mark281"/>
           <p:cNvSpPr/>
           <p:nvPr/>
         </p:nvSpPr>
@@ -17450,7 +16853,7 @@
       </p:sp>
       <p:sp>
         <p:nvSpPr>
-          <p:cNvPr id="17" name="S08-mark294"/>
+          <p:cNvPr id="17" name="S08-mark282"/>
           <p:cNvSpPr/>
           <p:nvPr/>
         </p:nvSpPr>
@@ -17473,7 +16876,7 @@
       </p:sp>
       <p:sp>
         <p:nvSpPr>
-          <p:cNvPr id="18" name="S08-mark295"/>
+          <p:cNvPr id="18" name="S08-mark283"/>
           <p:cNvSpPr/>
           <p:nvPr/>
         </p:nvSpPr>
@@ -17496,7 +16899,7 @@
       </p:sp>
       <p:sp>
         <p:nvSpPr>
-          <p:cNvPr id="19" name="S08-mark296"/>
+          <p:cNvPr id="19" name="S08-mark284"/>
           <p:cNvSpPr/>
           <p:nvPr/>
         </p:nvSpPr>
@@ -17521,7 +16924,7 @@
       </p:sp>
       <p:sp>
         <p:nvSpPr>
-          <p:cNvPr id="20" name="S08-mark297"/>
+          <p:cNvPr id="20" name="S08-mark285"/>
           <p:cNvSpPr/>
           <p:nvPr/>
         </p:nvSpPr>
@@ -17546,7 +16949,7 @@
       </p:sp>
       <p:sp>
         <p:nvSpPr>
-          <p:cNvPr id="21" name="S08-mark298"/>
+          <p:cNvPr id="21" name="S08-mark286"/>
           <p:cNvSpPr/>
           <p:nvPr/>
         </p:nvSpPr>
@@ -17571,7 +16974,7 @@
       </p:sp>
       <p:sp>
         <p:nvSpPr>
-          <p:cNvPr id="22" name="S08-mark299"/>
+          <p:cNvPr id="22" name="S08-mark287"/>
           <p:cNvSpPr/>
           <p:nvPr/>
         </p:nvSpPr>
@@ -17596,7 +16999,7 @@
       </p:sp>
       <p:sp>
         <p:nvSpPr>
-          <p:cNvPr id="23" name="S08-mark300"/>
+          <p:cNvPr id="23" name="S08-mark288"/>
           <p:cNvSpPr/>
           <p:nvPr/>
         </p:nvSpPr>
@@ -17621,7 +17024,7 @@
       </p:sp>
       <p:sp>
         <p:nvSpPr>
-          <p:cNvPr id="24" name="S08-label302"/>
+          <p:cNvPr id="24" name="S08-label290"/>
           <p:cNvSpPr txBox="1"/>
           <p:nvPr/>
         </p:nvSpPr>
@@ -17660,7 +17063,7 @@
       </p:sp>
       <p:sp>
         <p:nvSpPr>
-          <p:cNvPr id="25" name="S08-label304"/>
+          <p:cNvPr id="25" name="S08-label292"/>
           <p:cNvSpPr txBox="1"/>
           <p:nvPr/>
         </p:nvSpPr>
@@ -17699,7 +17102,7 @@
       </p:sp>
       <p:sp>
         <p:nvSpPr>
-          <p:cNvPr id="26" name="S08-label306"/>
+          <p:cNvPr id="26" name="S08-label294"/>
           <p:cNvSpPr txBox="1"/>
           <p:nvPr/>
         </p:nvSpPr>
@@ -17738,7 +17141,7 @@
       </p:sp>
       <p:sp>
         <p:nvSpPr>
-          <p:cNvPr id="27" name="S08-label308"/>
+          <p:cNvPr id="27" name="S08-label296"/>
           <p:cNvSpPr txBox="1"/>
           <p:nvPr/>
         </p:nvSpPr>
@@ -17777,7 +17180,7 @@
       </p:sp>
       <p:sp>
         <p:nvSpPr>
-          <p:cNvPr id="28" name="S08-label310"/>
+          <p:cNvPr id="28" name="S08-label298"/>
           <p:cNvSpPr txBox="1"/>
           <p:nvPr/>
         </p:nvSpPr>
@@ -17816,7 +17219,7 @@
       </p:sp>
       <p:sp>
         <p:nvSpPr>
-          <p:cNvPr id="29" name="S08-label312"/>
+          <p:cNvPr id="29" name="S08-label300"/>
           <p:cNvSpPr txBox="1"/>
           <p:nvPr/>
         </p:nvSpPr>
@@ -17855,7 +17258,7 @@
       </p:sp>
       <p:sp>
         <p:nvSpPr>
-          <p:cNvPr id="30" name="S08-label314"/>
+          <p:cNvPr id="30" name="S08-label302"/>
           <p:cNvSpPr txBox="1"/>
           <p:nvPr/>
         </p:nvSpPr>
@@ -17894,7 +17297,7 @@
       </p:sp>
       <p:sp>
         <p:nvSpPr>
-          <p:cNvPr id="31" name="S08-label316"/>
+          <p:cNvPr id="31" name="S08-label304"/>
           <p:cNvSpPr txBox="1"/>
           <p:nvPr/>
         </p:nvSpPr>
@@ -17933,7 +17336,7 @@
       </p:sp>
       <p:sp>
         <p:nvSpPr>
-          <p:cNvPr id="32" name="S08-label318"/>
+          <p:cNvPr id="32" name="S08-label306"/>
           <p:cNvSpPr txBox="1"/>
           <p:nvPr/>
         </p:nvSpPr>
@@ -17972,7 +17375,7 @@
       </p:sp>
       <p:sp>
         <p:nvSpPr>
-          <p:cNvPr id="33" name="S08-label320"/>
+          <p:cNvPr id="33" name="S08-label308"/>
           <p:cNvSpPr txBox="1"/>
           <p:nvPr/>
         </p:nvSpPr>
@@ -18011,7 +17414,7 @@
       </p:sp>
       <p:sp>
         <p:nvSpPr>
-          <p:cNvPr id="34" name="S08-label322"/>
+          <p:cNvPr id="34" name="S08-label310"/>
           <p:cNvSpPr txBox="1"/>
           <p:nvPr/>
         </p:nvSpPr>
@@ -18050,7 +17453,7 @@
       </p:sp>
       <p:sp>
         <p:nvSpPr>
-          <p:cNvPr id="35" name="S08-label324"/>
+          <p:cNvPr id="35" name="S08-label312"/>
           <p:cNvSpPr txBox="1"/>
           <p:nvPr/>
         </p:nvSpPr>
@@ -18089,7 +17492,7 @@
       </p:sp>
       <p:sp>
         <p:nvSpPr>
-          <p:cNvPr id="36" name="S08-label326"/>
+          <p:cNvPr id="36" name="S08-label314"/>
           <p:cNvSpPr txBox="1"/>
           <p:nvPr/>
         </p:nvSpPr>
@@ -18128,7 +17531,7 @@
       </p:sp>
       <p:sp>
         <p:nvSpPr>
-          <p:cNvPr id="37" name="S08-chip327"/>
+          <p:cNvPr id="37" name="S08-chip315"/>
           <p:cNvSpPr txBox="1"/>
           <p:nvPr/>
         </p:nvSpPr>
@@ -18175,7 +17578,7 @@
       </p:sp>
       <p:sp>
         <p:nvSpPr>
-          <p:cNvPr id="38" name="S08-text328"/>
+          <p:cNvPr id="38" name="S08-text316"/>
           <p:cNvSpPr txBox="1"/>
           <p:nvPr/>
         </p:nvSpPr>
@@ -18231,7 +17634,7 @@
       </p:sp>
       <p:sp>
         <p:nvSpPr>
-          <p:cNvPr id="39" name="S08-chip329"/>
+          <p:cNvPr id="39" name="S08-chip317"/>
           <p:cNvSpPr txBox="1"/>
           <p:nvPr/>
         </p:nvSpPr>
@@ -18278,7 +17681,7 @@
       </p:sp>
       <p:sp>
         <p:nvSpPr>
-          <p:cNvPr id="40" name="S08-text330"/>
+          <p:cNvPr id="40" name="S08-text318"/>
           <p:cNvSpPr txBox="1"/>
           <p:nvPr/>
         </p:nvSpPr>
@@ -18334,7 +17737,7 @@
       </p:sp>
       <p:sp>
         <p:nvSpPr>
-          <p:cNvPr id="41" name="S08-chip331"/>
+          <p:cNvPr id="41" name="S08-chip319"/>
           <p:cNvSpPr txBox="1"/>
           <p:nvPr/>
         </p:nvSpPr>
@@ -18381,7 +17784,7 @@
       </p:sp>
       <p:sp>
         <p:nvSpPr>
-          <p:cNvPr id="42" name="S08-text332"/>
+          <p:cNvPr id="42" name="S08-text320"/>
           <p:cNvSpPr txBox="1"/>
           <p:nvPr/>
         </p:nvSpPr>
@@ -18551,7 +17954,7 @@
       </p:sp>
       <p:sp>
         <p:nvSpPr>
-          <p:cNvPr id="3" name="S09-text333"/>
+          <p:cNvPr id="3" name="S09-text321"/>
           <p:cNvSpPr txBox="1"/>
           <p:nvPr/>
         </p:nvSpPr>
@@ -18590,7 +17993,7 @@
       </p:sp>
       <p:sp>
         <p:nvSpPr>
-          <p:cNvPr id="4" name="S09-chip334"/>
+          <p:cNvPr id="4" name="S09-chip322"/>
           <p:cNvSpPr txBox="1"/>
           <p:nvPr/>
         </p:nvSpPr>
@@ -18637,7 +18040,7 @@
       </p:sp>
       <p:sp>
         <p:nvSpPr>
-          <p:cNvPr id="5" name="S09-text335"/>
+          <p:cNvPr id="5" name="S09-text323"/>
           <p:cNvSpPr txBox="1"/>
           <p:nvPr/>
         </p:nvSpPr>
@@ -18693,7 +18096,7 @@
       </p:sp>
       <p:sp>
         <p:nvSpPr>
-          <p:cNvPr id="6" name="S09-chip336"/>
+          <p:cNvPr id="6" name="S09-chip324"/>
           <p:cNvSpPr txBox="1"/>
           <p:nvPr/>
         </p:nvSpPr>
@@ -18740,7 +18143,7 @@
       </p:sp>
       <p:sp>
         <p:nvSpPr>
-          <p:cNvPr id="7" name="S09-text337"/>
+          <p:cNvPr id="7" name="S09-text325"/>
           <p:cNvSpPr txBox="1"/>
           <p:nvPr/>
         </p:nvSpPr>
@@ -18796,7 +18199,7 @@
       </p:sp>
       <p:sp>
         <p:nvSpPr>
-          <p:cNvPr id="8" name="S09-chip338"/>
+          <p:cNvPr id="8" name="S09-chip326"/>
           <p:cNvSpPr txBox="1"/>
           <p:nvPr/>
         </p:nvSpPr>
@@ -18843,7 +18246,7 @@
       </p:sp>
       <p:sp>
         <p:nvSpPr>
-          <p:cNvPr id="9" name="S09-text339"/>
+          <p:cNvPr id="9" name="S09-text327"/>
           <p:cNvSpPr txBox="1"/>
           <p:nvPr/>
         </p:nvSpPr>
@@ -18899,7 +18302,7 @@
       </p:sp>
       <p:sp>
         <p:nvSpPr>
-          <p:cNvPr id="10" name="S09-chip340"/>
+          <p:cNvPr id="10" name="S09-chip328"/>
           <p:cNvSpPr txBox="1"/>
           <p:nvPr/>
         </p:nvSpPr>
@@ -18946,7 +18349,7 @@
       </p:sp>
       <p:sp>
         <p:nvSpPr>
-          <p:cNvPr id="11" name="S09-text341"/>
+          <p:cNvPr id="11" name="S09-text329"/>
           <p:cNvSpPr txBox="1"/>
           <p:nvPr/>
         </p:nvSpPr>
